--- a/docs/GDP_Nowcasting_경과보고_아젠다_2026-07-29.pptx
+++ b/docs/GDP_Nowcasting_경과보고_아젠다_2026-07-29.pptx
@@ -4,17 +4,20 @@
   <p:sldMasterIdLst>
     <p:sldMasterId id="2147483648" r:id="rId1"/>
   </p:sldMasterIdLst>
+  <p:notesMasterIdLst>
+    <p:notesMasterId r:id="rId10"/>
+  </p:notesMasterIdLst>
   <p:sldIdLst>
-    <p:sldId id="256" r:id="rId7"/>
-    <p:sldId id="257" r:id="rId9"/>
-    <p:sldId id="258" r:id="rId10"/>
-    <p:sldId id="259" r:id="rId11"/>
-    <p:sldId id="260" r:id="rId12"/>
-    <p:sldId id="261" r:id="rId13"/>
-    <p:sldId id="262" r:id="rId14"/>
-    <p:sldId id="263" r:id="rId15"/>
+    <p:sldId id="256" r:id="rId2"/>
+    <p:sldId id="257" r:id="rId3"/>
+    <p:sldId id="258" r:id="rId4"/>
+    <p:sldId id="259" r:id="rId5"/>
+    <p:sldId id="260" r:id="rId6"/>
+    <p:sldId id="261" r:id="rId7"/>
+    <p:sldId id="262" r:id="rId8"/>
+    <p:sldId id="263" r:id="rId9"/>
   </p:sldIdLst>
-  <p:sldSz cx="12191695" cy="6858000" type="screen4x3"/>
+  <p:sldSz cx="12192000" cy="6858000"/>
   <p:notesSz cx="6858000" cy="9144000"/>
   <p:defaultTextStyle>
     <a:defPPr>
@@ -111,11 +114,27 @@
       </a:defRPr>
     </a:lvl9pPr>
   </p:defaultTextStyle>
+  <p:extLst>
+    <p:ext uri="{EFAFB233-063F-42B5-8137-9DF3F51BA10A}">
+      <p15:sldGuideLst xmlns:p15="http://schemas.microsoft.com/office/powerpoint/2012/main">
+        <p15:guide id="1" orient="horz" pos="2160">
+          <p15:clr>
+            <a:srgbClr val="A4A3A4"/>
+          </p15:clr>
+        </p15:guide>
+        <p15:guide id="2" pos="2880">
+          <p15:clr>
+            <a:srgbClr val="A4A3A4"/>
+          </p15:clr>
+        </p15:guide>
+      </p15:sldGuideLst>
+    </p:ext>
+  </p:extLst>
 </p:presentation>
 </file>
 
 <file path=ppt/notesMasters/notesMaster1.xml><?xml version="1.0" encoding="utf-8"?>
-<p:notesMaster xmlns:a="http://schemas.openxmlformats.org/drawingml/2006/main" xmlns:p="http://schemas.openxmlformats.org/presentationml/2006/main" xmlns:r="http://schemas.openxmlformats.org/officeDocument/2006/relationships">
+<p:notesMaster xmlns:a="http://schemas.openxmlformats.org/drawingml/2006/main" xmlns:r="http://schemas.openxmlformats.org/officeDocument/2006/relationships" xmlns:p="http://schemas.openxmlformats.org/presentationml/2006/main">
   <p:cSld>
     <p:bg>
       <p:bgRef idx="1001">
@@ -136,241 +155,16 @@
           <a:chExt cx="0" cy="0"/>
         </a:xfrm>
       </p:grpSpPr>
-      <p:sp>
-        <p:nvSpPr>
-          <p:cNvPr id="2" name="Header Placeholder 1"/>
-          <p:cNvSpPr>
-            <a:spLocks noGrp="1"/>
-          </p:cNvSpPr>
-          <p:nvPr>
-            <p:ph type="hdr" sz="quarter"/>
-          </p:nvPr>
-        </p:nvSpPr>
-        <p:spPr>
-          <a:xfrm>
-            <a:off x="0" y="0"/>
-            <a:ext cx="2971800" cy="457200"/>
-          </a:xfrm>
-          <a:prstGeom prst="rect">
-            <a:avLst/>
-          </a:prstGeom>
-        </p:spPr>
-        <p:txBody>
-          <a:bodyPr vert="horz" lIns="91440" tIns="45720" rIns="91440" bIns="45720" rtlCol="0"/>
-          <a:lstStyle>
-            <a:lvl1pPr algn="l">
-              <a:defRPr sz="1200"/>
-            </a:lvl1pPr>
-          </a:lstStyle>
-          <a:p>
-            <a:endParaRPr lang="en-US"/>
-          </a:p>
-        </p:txBody>
-      </p:sp>
-      <p:sp>
-        <p:nvSpPr>
-          <p:cNvPr id="3" name="Date Placeholder 2"/>
-          <p:cNvSpPr>
-            <a:spLocks noGrp="1"/>
-          </p:cNvSpPr>
-          <p:nvPr>
-            <p:ph type="dt" idx="1"/>
-          </p:nvPr>
-        </p:nvSpPr>
-        <p:spPr>
-          <a:xfrm>
-            <a:off x="3884613" y="0"/>
-            <a:ext cx="2971800" cy="457200"/>
-          </a:xfrm>
-          <a:prstGeom prst="rect">
-            <a:avLst/>
-          </a:prstGeom>
-        </p:spPr>
-        <p:txBody>
-          <a:bodyPr vert="horz" lIns="91440" tIns="45720" rIns="91440" bIns="45720" rtlCol="0"/>
-          <a:lstStyle>
-            <a:lvl1pPr algn="r">
-              <a:defRPr sz="1200"/>
-            </a:lvl1pPr>
-          </a:lstStyle>
-          <a:p>
-            <a:fld id="{0F89C1C7-3DCD-1040-A9CF-14679D8B5DDD}" type="datetimeFigureOut">
-              <a:rPr lang="en-US" smtClean="0"/>
-              <a:t>10/17/16</a:t>
-            </a:fld>
-            <a:endParaRPr lang="en-US"/>
-          </a:p>
-        </p:txBody>
-      </p:sp>
-      <p:sp>
-        <p:nvSpPr>
-          <p:cNvPr id="4" name="Slide Image Placeholder 3"/>
-          <p:cNvSpPr>
-            <a:spLocks noGrp="1" noRot="1" noChangeAspect="1"/>
-          </p:cNvSpPr>
-          <p:nvPr>
-            <p:ph type="sldImg" idx="2"/>
-          </p:nvPr>
-        </p:nvSpPr>
-        <p:spPr>
-          <a:xfrm>
-            <a:off x="1143000" y="685800"/>
-            <a:ext cx="4572000" cy="3429000"/>
-          </a:xfrm>
-          <a:prstGeom prst="rect">
-            <a:avLst/>
-          </a:prstGeom>
-          <a:noFill/>
-          <a:ln w="12700">
-            <a:solidFill>
-              <a:prstClr val="black"/>
-            </a:solidFill>
-          </a:ln>
-        </p:spPr>
-        <p:txBody>
-          <a:bodyPr vert="horz" lIns="91440" tIns="45720" rIns="91440" bIns="45720" rtlCol="0" anchor="ctr"/>
-          <a:lstStyle/>
-          <a:p>
-            <a:endParaRPr lang="en-US"/>
-          </a:p>
-        </p:txBody>
-      </p:sp>
-      <p:sp>
-        <p:nvSpPr>
-          <p:cNvPr id="5" name="Notes Placeholder 4"/>
-          <p:cNvSpPr>
-            <a:spLocks noGrp="1"/>
-          </p:cNvSpPr>
-          <p:nvPr>
-            <p:ph type="body" sz="quarter" idx="3"/>
-          </p:nvPr>
-        </p:nvSpPr>
-        <p:spPr>
-          <a:xfrm>
-            <a:off x="685800" y="4343400"/>
-            <a:ext cx="5486400" cy="4114800"/>
-          </a:xfrm>
-          <a:prstGeom prst="rect">
-            <a:avLst/>
-          </a:prstGeom>
-        </p:spPr>
-        <p:txBody>
-          <a:bodyPr vert="horz" lIns="91440" tIns="45720" rIns="91440" bIns="45720" rtlCol="0"/>
-          <a:lstStyle/>
-          <a:p>
-            <a:pPr lvl="0"/>
-            <a:r>
-              <a:rPr lang="en-US" smtClean="0"/>
-              <a:t>Click to edit Master text styles</a:t>
-            </a:r>
-          </a:p>
-          <a:p>
-            <a:pPr lvl="1"/>
-            <a:r>
-              <a:rPr lang="en-US" smtClean="0"/>
-              <a:t>Second level</a:t>
-            </a:r>
-          </a:p>
-          <a:p>
-            <a:pPr lvl="2"/>
-            <a:r>
-              <a:rPr lang="en-US" smtClean="0"/>
-              <a:t>Third level</a:t>
-            </a:r>
-          </a:p>
-          <a:p>
-            <a:pPr lvl="3"/>
-            <a:r>
-              <a:rPr lang="en-US" smtClean="0"/>
-              <a:t>Fourth level</a:t>
-            </a:r>
-          </a:p>
-          <a:p>
-            <a:pPr lvl="4"/>
-            <a:r>
-              <a:rPr lang="en-US" smtClean="0"/>
-              <a:t>Fifth level</a:t>
-            </a:r>
-            <a:endParaRPr lang="en-US"/>
-          </a:p>
-        </p:txBody>
-      </p:sp>
-      <p:sp>
-        <p:nvSpPr>
-          <p:cNvPr id="6" name="Footer Placeholder 5"/>
-          <p:cNvSpPr>
-            <a:spLocks noGrp="1"/>
-          </p:cNvSpPr>
-          <p:nvPr>
-            <p:ph type="ftr" sz="quarter" idx="4"/>
-          </p:nvPr>
-        </p:nvSpPr>
-        <p:spPr>
-          <a:xfrm>
-            <a:off x="0" y="8685213"/>
-            <a:ext cx="2971800" cy="457200"/>
-          </a:xfrm>
-          <a:prstGeom prst="rect">
-            <a:avLst/>
-          </a:prstGeom>
-        </p:spPr>
-        <p:txBody>
-          <a:bodyPr vert="horz" lIns="91440" tIns="45720" rIns="91440" bIns="45720" rtlCol="0" anchor="b"/>
-          <a:lstStyle>
-            <a:lvl1pPr algn="l">
-              <a:defRPr sz="1200"/>
-            </a:lvl1pPr>
-          </a:lstStyle>
-          <a:p>
-            <a:endParaRPr lang="en-US"/>
-          </a:p>
-        </p:txBody>
-      </p:sp>
-      <p:sp>
-        <p:nvSpPr>
-          <p:cNvPr id="7" name="Slide Number Placeholder 6"/>
-          <p:cNvSpPr>
-            <a:spLocks noGrp="1"/>
-          </p:cNvSpPr>
-          <p:nvPr>
-            <p:ph type="sldNum" sz="quarter" idx="5"/>
-          </p:nvPr>
-        </p:nvSpPr>
-        <p:spPr>
-          <a:xfrm>
-            <a:off x="3884613" y="8685213"/>
-            <a:ext cx="2971800" cy="457200"/>
-          </a:xfrm>
-          <a:prstGeom prst="rect">
-            <a:avLst/>
-          </a:prstGeom>
-        </p:spPr>
-        <p:txBody>
-          <a:bodyPr vert="horz" lIns="91440" tIns="45720" rIns="91440" bIns="45720" rtlCol="0" anchor="b"/>
-          <a:lstStyle>
-            <a:lvl1pPr algn="r">
-              <a:defRPr sz="1200"/>
-            </a:lvl1pPr>
-          </a:lstStyle>
-          <a:p>
-            <a:fld id="{BB5E49A5-4136-284D-997B-48E1D791AD67}" type="slidenum">
-              <a:rPr lang="en-US" smtClean="0"/>
-              <a:t>‹#›</a:t>
-            </a:fld>
-            <a:endParaRPr lang="en-US"/>
-          </a:p>
-        </p:txBody>
-      </p:sp>
     </p:spTree>
     <p:extLst>
       <p:ext uri="{BB962C8B-B14F-4D97-AF65-F5344CB8AC3E}">
-        <p14:creationId xmlns:p14="http://schemas.microsoft.com/office/powerpoint/2010/main" val="2623252185"/>
+        <p14:creationId xmlns:p14="http://schemas.microsoft.com/office/powerpoint/2010/main" val="3554713954"/>
       </p:ext>
     </p:extLst>
   </p:cSld>
   <p:clrMap bg1="lt1" tx1="dk1" bg2="lt2" tx2="dk2" accent1="accent1" accent2="accent2" accent3="accent3" accent4="accent4" accent5="accent5" accent6="accent6" hlink="hlink" folHlink="folHlink"/>
   <p:notesStyle>
-    <a:lvl1pPr marL="0" algn="l" defTabSz="457200" rtl="0" eaLnBrk="1" latinLnBrk="0" hangingPunct="1">
+    <a:lvl1pPr marL="0" algn="l" defTabSz="914400" rtl="0" eaLnBrk="1" latinLnBrk="1" hangingPunct="1">
       <a:defRPr sz="1200" kern="1200">
         <a:solidFill>
           <a:schemeClr val="tx1"/>
@@ -380,7 +174,7 @@
         <a:cs typeface="+mn-cs"/>
       </a:defRPr>
     </a:lvl1pPr>
-    <a:lvl2pPr marL="457200" algn="l" defTabSz="457200" rtl="0" eaLnBrk="1" latinLnBrk="0" hangingPunct="1">
+    <a:lvl2pPr marL="457200" algn="l" defTabSz="914400" rtl="0" eaLnBrk="1" latinLnBrk="1" hangingPunct="1">
       <a:defRPr sz="1200" kern="1200">
         <a:solidFill>
           <a:schemeClr val="tx1"/>
@@ -390,7 +184,7 @@
         <a:cs typeface="+mn-cs"/>
       </a:defRPr>
     </a:lvl2pPr>
-    <a:lvl3pPr marL="914400" algn="l" defTabSz="457200" rtl="0" eaLnBrk="1" latinLnBrk="0" hangingPunct="1">
+    <a:lvl3pPr marL="914400" algn="l" defTabSz="914400" rtl="0" eaLnBrk="1" latinLnBrk="1" hangingPunct="1">
       <a:defRPr sz="1200" kern="1200">
         <a:solidFill>
           <a:schemeClr val="tx1"/>
@@ -400,7 +194,7 @@
         <a:cs typeface="+mn-cs"/>
       </a:defRPr>
     </a:lvl3pPr>
-    <a:lvl4pPr marL="1371600" algn="l" defTabSz="457200" rtl="0" eaLnBrk="1" latinLnBrk="0" hangingPunct="1">
+    <a:lvl4pPr marL="1371600" algn="l" defTabSz="914400" rtl="0" eaLnBrk="1" latinLnBrk="1" hangingPunct="1">
       <a:defRPr sz="1200" kern="1200">
         <a:solidFill>
           <a:schemeClr val="tx1"/>
@@ -410,7 +204,7 @@
         <a:cs typeface="+mn-cs"/>
       </a:defRPr>
     </a:lvl4pPr>
-    <a:lvl5pPr marL="1828800" algn="l" defTabSz="457200" rtl="0" eaLnBrk="1" latinLnBrk="0" hangingPunct="1">
+    <a:lvl5pPr marL="1828800" algn="l" defTabSz="914400" rtl="0" eaLnBrk="1" latinLnBrk="1" hangingPunct="1">
       <a:defRPr sz="1200" kern="1200">
         <a:solidFill>
           <a:schemeClr val="tx1"/>
@@ -420,7 +214,7 @@
         <a:cs typeface="+mn-cs"/>
       </a:defRPr>
     </a:lvl5pPr>
-    <a:lvl6pPr marL="2286000" algn="l" defTabSz="457200" rtl="0" eaLnBrk="1" latinLnBrk="0" hangingPunct="1">
+    <a:lvl6pPr marL="2286000" algn="l" defTabSz="914400" rtl="0" eaLnBrk="1" latinLnBrk="1" hangingPunct="1">
       <a:defRPr sz="1200" kern="1200">
         <a:solidFill>
           <a:schemeClr val="tx1"/>
@@ -430,7 +224,7 @@
         <a:cs typeface="+mn-cs"/>
       </a:defRPr>
     </a:lvl6pPr>
-    <a:lvl7pPr marL="2743200" algn="l" defTabSz="457200" rtl="0" eaLnBrk="1" latinLnBrk="0" hangingPunct="1">
+    <a:lvl7pPr marL="2743200" algn="l" defTabSz="914400" rtl="0" eaLnBrk="1" latinLnBrk="1" hangingPunct="1">
       <a:defRPr sz="1200" kern="1200">
         <a:solidFill>
           <a:schemeClr val="tx1"/>
@@ -440,7 +234,7 @@
         <a:cs typeface="+mn-cs"/>
       </a:defRPr>
     </a:lvl7pPr>
-    <a:lvl8pPr marL="3200400" algn="l" defTabSz="457200" rtl="0" eaLnBrk="1" latinLnBrk="0" hangingPunct="1">
+    <a:lvl8pPr marL="3200400" algn="l" defTabSz="914400" rtl="0" eaLnBrk="1" latinLnBrk="1" hangingPunct="1">
       <a:defRPr sz="1200" kern="1200">
         <a:solidFill>
           <a:schemeClr val="tx1"/>
@@ -450,7 +244,7 @@
         <a:cs typeface="+mn-cs"/>
       </a:defRPr>
     </a:lvl8pPr>
-    <a:lvl9pPr marL="3657600" algn="l" defTabSz="457200" rtl="0" eaLnBrk="1" latinLnBrk="0" hangingPunct="1">
+    <a:lvl9pPr marL="3657600" algn="l" defTabSz="914400" rtl="0" eaLnBrk="1" latinLnBrk="1" hangingPunct="1">
       <a:defRPr sz="1200" kern="1200">
         <a:solidFill>
           <a:schemeClr val="tx1"/>
@@ -465,7 +259,7 @@
 </file>
 
 <file path=ppt/notesSlides/notesSlide1.xml><?xml version="1.0" encoding="utf-8"?>
-<p:notes xmlns:a="http://schemas.openxmlformats.org/drawingml/2006/main" xmlns:p="http://schemas.openxmlformats.org/presentationml/2006/main" xmlns:r="http://schemas.openxmlformats.org/officeDocument/2006/relationships">
+<p:notes xmlns:a="http://schemas.openxmlformats.org/drawingml/2006/main" xmlns:r="http://schemas.openxmlformats.org/officeDocument/2006/relationships" xmlns:p="http://schemas.openxmlformats.org/presentationml/2006/main">
   <p:cSld>
     <p:spTree>
       <p:nvGrpSpPr>
@@ -485,7 +279,7 @@
         <p:nvSpPr>
           <p:cNvPr id="2" name="Slide Image Placeholder 1"/>
           <p:cNvSpPr>
-            <a:spLocks noGrp="1"/>
+            <a:spLocks noGrp="1" noRot="1" noChangeAspect="1"/>
           </p:cNvSpPr>
           <p:nvPr>
             <p:ph type="sldImg" idx="2"/>
@@ -500,7 +294,7 @@
             <a:spLocks noGrp="1"/>
           </p:cNvSpPr>
           <p:nvPr>
-            <p:ph type="body" idx="3" sz="quarter"/>
+            <p:ph type="body" sz="quarter" idx="3"/>
           </p:nvPr>
         </p:nvSpPr>
         <p:spPr/>
@@ -517,7 +311,9 @@
               <a:t>협업 시작(2026년 6월) 이후 수행한 모든 검증 작업과, 그 결과 도출된 제안을 공식 아젠다 논의용으로 정리한 자료입니다.</a:t>
             </a:r>
           </a:p>
-          <a:p/>
+          <a:p>
+            <a:endParaRPr/>
+          </a:p>
           <a:p>
             <a:r>
               <a:t>[전체 이야기 구조 — 5부]</a:t>
@@ -548,7 +344,9 @@
               <a:t>5) 논의 안건: 한은 측 의사결정이 필요한 항목 목록.</a:t>
             </a:r>
           </a:p>
-          <a:p/>
+          <a:p>
+            <a:endParaRPr/>
+          </a:p>
           <a:p>
             <a:r>
               <a:t>[발표 시 유의]</a:t>
@@ -568,7 +366,7 @@
             <a:spLocks noGrp="1"/>
           </p:cNvSpPr>
           <p:nvPr>
-            <p:ph type="sldNum" idx="5" sz="quarter"/>
+            <p:ph type="sldNum" sz="quarter" idx="5"/>
           </p:nvPr>
         </p:nvSpPr>
         <p:spPr/>
@@ -582,7 +380,7 @@
 </file>
 
 <file path=ppt/notesSlides/notesSlide2.xml><?xml version="1.0" encoding="utf-8"?>
-<p:notes xmlns:a="http://schemas.openxmlformats.org/drawingml/2006/main" xmlns:p="http://schemas.openxmlformats.org/presentationml/2006/main" xmlns:r="http://schemas.openxmlformats.org/officeDocument/2006/relationships">
+<p:notes xmlns:a="http://schemas.openxmlformats.org/drawingml/2006/main" xmlns:r="http://schemas.openxmlformats.org/officeDocument/2006/relationships" xmlns:p="http://schemas.openxmlformats.org/presentationml/2006/main">
   <p:cSld>
     <p:spTree>
       <p:nvGrpSpPr>
@@ -602,7 +400,7 @@
         <p:nvSpPr>
           <p:cNvPr id="2" name="Slide Image Placeholder 1"/>
           <p:cNvSpPr>
-            <a:spLocks noGrp="1"/>
+            <a:spLocks noGrp="1" noRot="1" noChangeAspect="1"/>
           </p:cNvSpPr>
           <p:nvPr>
             <p:ph type="sldImg" idx="2"/>
@@ -617,7 +415,7 @@
             <a:spLocks noGrp="1"/>
           </p:cNvSpPr>
           <p:nvPr>
-            <p:ph type="body" idx="3" sz="quarter"/>
+            <p:ph type="body" sz="quarter" idx="3"/>
           </p:nvPr>
         </p:nvSpPr>
         <p:spPr/>
@@ -634,7 +432,9 @@
               <a:t>서로 다른 모델의 점수는 채점 규칙이 같을 때만 비교 가능합니다. 이후 나오는 모든 숫자(0.865, 0.765, 0.746 등)는 전부 이 규칙 하나로 채점한 것입니다.</a:t>
             </a:r>
           </a:p>
-          <a:p/>
+          <a:p>
+            <a:endParaRPr/>
+          </a:p>
           <a:p>
             <a:r>
               <a:t>[용어를 처음 보는 분을 위한 설명]</a:t>
@@ -660,7 +460,9 @@
               <a:t>· RMSE(평균제곱근오차): 오차를 제곱해 평균 낸 뒤 제곱근. 오차 1%p는 벌점 1, 오차 2%p는 벌점 4가 되어 '크게 틀리는 것'에 더 민감한 지표입니다.</a:t>
             </a:r>
           </a:p>
-          <a:p/>
+          <a:p>
+            <a:endParaRPr/>
+          </a:p>
           <a:p>
             <a:r>
               <a:t>[기준선 숫자 읽기]</a:t>
@@ -680,7 +482,7 @@
             <a:spLocks noGrp="1"/>
           </p:cNvSpPr>
           <p:nvPr>
-            <p:ph type="sldNum" idx="5" sz="quarter"/>
+            <p:ph type="sldNum" sz="quarter" idx="5"/>
           </p:nvPr>
         </p:nvSpPr>
         <p:spPr/>
@@ -694,7 +496,7 @@
 </file>
 
 <file path=ppt/notesSlides/notesSlide3.xml><?xml version="1.0" encoding="utf-8"?>
-<p:notes xmlns:a="http://schemas.openxmlformats.org/drawingml/2006/main" xmlns:p="http://schemas.openxmlformats.org/presentationml/2006/main" xmlns:r="http://schemas.openxmlformats.org/officeDocument/2006/relationships">
+<p:notes xmlns:a="http://schemas.openxmlformats.org/drawingml/2006/main" xmlns:r="http://schemas.openxmlformats.org/officeDocument/2006/relationships" xmlns:p="http://schemas.openxmlformats.org/presentationml/2006/main">
   <p:cSld>
     <p:spTree>
       <p:nvGrpSpPr>
@@ -714,7 +516,7 @@
         <p:nvSpPr>
           <p:cNvPr id="2" name="Slide Image Placeholder 1"/>
           <p:cNvSpPr>
-            <a:spLocks noGrp="1"/>
+            <a:spLocks noGrp="1" noRot="1" noChangeAspect="1"/>
           </p:cNvSpPr>
           <p:nvPr>
             <p:ph type="sldImg" idx="2"/>
@@ -729,7 +531,7 @@
             <a:spLocks noGrp="1"/>
           </p:cNvSpPr>
           <p:nvPr>
-            <p:ph type="body" idx="3" sz="quarter"/>
+            <p:ph type="body" sz="quarter" idx="3"/>
           </p:nvPr>
         </p:nvSpPr>
         <p:spPr/>
@@ -746,25 +548,33 @@
               <a:t>T1 (6월 말~7월 초): 먼저 한은의 현행 시스템을 우리 환경에서 그대로 재현하고, 실시간 빈티지 기준으로 채점했습니다. 이게 없으면 "우리 모델이 좋아졌다"는 말 자체가 불가능합니다.</a:t>
             </a:r>
           </a:p>
-          <a:p/>
+          <a:p>
+            <a:endParaRPr/>
+          </a:p>
           <a:p>
             <a:r>
               <a:t>T2 (7월 초~중순): 경기 국면(급변기/안정기/반등기)에 따라 서로 다른 모델을 쓰는 '국면 조건부 결합'을 연구했습니다. 성능 자체는 전체 실험 중 최고(0.718)였으나, 7/9 회의에서 "현재 시점에 국면을 단정하는 것이 맞는가"라는 방법론적 문제 제기가 있었고, 이를 타당한 지적으로 수용해 예측 경로로의 채택은 보류했습니다. 다만 이 연구에서 검증된 부품들 — 반등 국면에서 사전학습 모델이 강하다는 사실, 심리지표 저점 통과 신호 — 은 이후 트랙에서 재사용되고 있습니다.</a:t>
             </a:r>
           </a:p>
-          <a:p/>
+          <a:p>
+            <a:endParaRPr/>
+          </a:p>
           <a:p>
             <a:r>
               <a:t>T3 (7월 중순~하순): "딥러닝으로 GDP 나우캐스팅이 가능한가"를 체계적으로 검증했습니다. 결론은 '방식에 따라 갈린다'입니다. 우리 데이터(월 140개 관측치)로 신경망을 처음부터 학습시키는 방식은 전부 실패했고(과적합), 대규모 외부 시계열로 미리 학습된 모델(파운데이션 모델)을 가져다 쓰는 방식은 유효했습니다. 상세는 5번 슬라이드.</a:t>
             </a:r>
           </a:p>
-          <a:p/>
+          <a:p>
+            <a:endParaRPr/>
+          </a:p>
           <a:p>
             <a:r>
               <a:t>T4 (7월 하순~현재): 전략 전환의 산물입니다. 점 예측의 정확도 경쟁은 32개 분기 표본으로는 통계적 입증이 어렵다는 판단에 따라, 예측값은 건드리지 않고 그 위에 가치를 더하는 레이어(예측구간, 설명 리포트, 개정 예측)로 방향을 잡았습니다.</a:t>
             </a:r>
           </a:p>
-          <a:p/>
+          <a:p>
+            <a:endParaRPr/>
+          </a:p>
           <a:p>
             <a:r>
               <a:t>[인턴을 위한 맥락]</a:t>
@@ -784,7 +594,7 @@
             <a:spLocks noGrp="1"/>
           </p:cNvSpPr>
           <p:nvPr>
-            <p:ph type="sldNum" idx="5" sz="quarter"/>
+            <p:ph type="sldNum" sz="quarter" idx="5"/>
           </p:nvPr>
         </p:nvSpPr>
         <p:spPr/>
@@ -798,7 +608,7 @@
 </file>
 
 <file path=ppt/notesSlides/notesSlide4.xml><?xml version="1.0" encoding="utf-8"?>
-<p:notes xmlns:a="http://schemas.openxmlformats.org/drawingml/2006/main" xmlns:p="http://schemas.openxmlformats.org/presentationml/2006/main" xmlns:r="http://schemas.openxmlformats.org/officeDocument/2006/relationships">
+<p:notes xmlns:a="http://schemas.openxmlformats.org/drawingml/2006/main" xmlns:r="http://schemas.openxmlformats.org/officeDocument/2006/relationships" xmlns:p="http://schemas.openxmlformats.org/presentationml/2006/main">
   <p:cSld>
     <p:spTree>
       <p:nvGrpSpPr>
@@ -818,7 +628,7 @@
         <p:nvSpPr>
           <p:cNvPr id="2" name="Slide Image Placeholder 1"/>
           <p:cNvSpPr>
-            <a:spLocks noGrp="1"/>
+            <a:spLocks noGrp="1" noRot="1" noChangeAspect="1"/>
           </p:cNvSpPr>
           <p:nvPr>
             <p:ph type="sldImg" idx="2"/>
@@ -833,7 +643,7 @@
             <a:spLocks noGrp="1"/>
           </p:cNvSpPr>
           <p:nvPr>
-            <p:ph type="body" idx="3" sz="quarter"/>
+            <p:ph type="body" sz="quarter" idx="3"/>
           </p:nvPr>
         </p:nvSpPr>
         <p:spPr/>
@@ -880,7 +690,9 @@
               <a:t>· DFM 단독 (0.865): 요인모형만 사용한 경우.</a:t>
             </a:r>
           </a:p>
-          <a:p/>
+          <a:p>
+            <a:endParaRPr/>
+          </a:p>
           <a:p>
             <a:r>
               <a:t>[모델 용어 쉬운 설명]</a:t>
@@ -901,7 +713,9 @@
               <a:t>· 사전학습(pre-trained) 모델: 남의 데이터(전 세계 수백만 개 시계열)로 미리 학습을 끝낸 모델. 우리 데이터에는 학습 없이 적용(zero-shot)하거나 소량만 추가 학습(few-shot).</a:t>
             </a:r>
           </a:p>
-          <a:p/>
+          <a:p>
+            <a:endParaRPr/>
+          </a:p>
           <a:p>
             <a:r>
               <a:t>[막대에 없는 것들]</a:t>
@@ -921,7 +735,7 @@
             <a:spLocks noGrp="1"/>
           </p:cNvSpPr>
           <p:nvPr>
-            <p:ph type="sldNum" idx="5" sz="quarter"/>
+            <p:ph type="sldNum" sz="quarter" idx="5"/>
           </p:nvPr>
         </p:nvSpPr>
         <p:spPr/>
@@ -935,7 +749,7 @@
 </file>
 
 <file path=ppt/notesSlides/notesSlide5.xml><?xml version="1.0" encoding="utf-8"?>
-<p:notes xmlns:a="http://schemas.openxmlformats.org/drawingml/2006/main" xmlns:p="http://schemas.openxmlformats.org/presentationml/2006/main" xmlns:r="http://schemas.openxmlformats.org/officeDocument/2006/relationships">
+<p:notes xmlns:a="http://schemas.openxmlformats.org/drawingml/2006/main" xmlns:r="http://schemas.openxmlformats.org/officeDocument/2006/relationships" xmlns:p="http://schemas.openxmlformats.org/presentationml/2006/main">
   <p:cSld>
     <p:spTree>
       <p:nvGrpSpPr>
@@ -955,7 +769,7 @@
         <p:nvSpPr>
           <p:cNvPr id="2" name="Slide Image Placeholder 1"/>
           <p:cNvSpPr>
-            <a:spLocks noGrp="1"/>
+            <a:spLocks noGrp="1" noRot="1" noChangeAspect="1"/>
           </p:cNvSpPr>
           <p:nvPr>
             <p:ph type="sldImg" idx="2"/>
@@ -970,7 +784,7 @@
             <a:spLocks noGrp="1"/>
           </p:cNvSpPr>
           <p:nvPr>
-            <p:ph type="body" idx="3" sz="quarter"/>
+            <p:ph type="body" sz="quarter" idx="3"/>
           </p:nvPr>
         </p:nvSpPr>
         <p:spPr/>
@@ -987,7 +801,9 @@
               <a:t>"딥러닝이 되느냐"가 아니라 "어떤 방식의 딥러닝이 되느냐"가 올바른 질문이었습니다. 답은: 우리 데이터로 처음부터 학습(from scratch)은 실패, 사전학습 모델의 활용은 성공.</a:t>
             </a:r>
           </a:p>
-          <a:p/>
+          <a:p>
+            <a:endParaRPr/>
+          </a:p>
           <a:p>
             <a:r>
               <a:t>[왜 직접학습은 실패하는가]</a:t>
@@ -998,7 +814,9 @@
               <a:t>GDP 나우캐스팅의 학습 데이터는 월 단위 약 140개 행(12년치)입니다. 수백만 개 파라미터를 가진 신경망이 140개 사례에서 일반 규칙을 배우는 것은 원리적으로 어렵고, 실제로 LSTM 계열·Neural CDE·오토인코더 요인모형 등 시도한 모든 직접학습 구성이 현행보다 나빴습니다.</a:t>
             </a:r>
           </a:p>
-          <a:p/>
+          <a:p>
+            <a:endParaRPr/>
+          </a:p>
           <a:p>
             <a:r>
               <a:t>[사전학습 모델이란 — 비유]</a:t>
@@ -1009,7 +827,9 @@
               <a:t>바둑을 책 한 권(우리 데이터)으로 배운 사람과, 전 세계 기보 수백만 판을 먼저 공부하고 온 사람의 차이입니다. Chronos-2(아마존, 2025년 공개)는 전 세계 다양한 시계열 수백만 개로 미리 학습되어, 처음 보는 한국 GDP 시계열에도 '시계열의 일반 문법'을 적용할 수 있습니다. 우리 데이터로는 학습을 전혀 하지 않고 예측만 시켰는데(zero-shot) 0.836이 나왔습니다.</a:t>
             </a:r>
           </a:p>
-          <a:p/>
+          <a:p>
+            <a:endParaRPr/>
+          </a:p>
           <a:p>
             <a:r>
               <a:t>[일별 신호(빠른 신호)란]</a:t>
@@ -1020,7 +840,9 @@
               <a:t>공식 경제지표는 해당 월이 끝나고 1~2개월 뒤에 발표되지만, 주가와 환율은 당일 확정되고 이후 절대 수정되지 않습니다(무개정). 그래서 실시간 재현 검증에서도 미래 정보 유출 걱정 없이 쓸 수 있습니다. Chronos-2에 일별 KOSPI·원달러 수익률과 ESI 원지수를 보조 입력(공변량)으로 넣자 0.836→0.808로 개선됐습니다.</a:t>
             </a:r>
           </a:p>
-          <a:p/>
+          <a:p>
+            <a:endParaRPr/>
+          </a:p>
           <a:p>
             <a:r>
               <a:t>[오른쪽 차트 읽기 — 2020년 사례]</a:t>
@@ -1040,7 +862,7 @@
             <a:spLocks noGrp="1"/>
           </p:cNvSpPr>
           <p:nvPr>
-            <p:ph type="sldNum" idx="5" sz="quarter"/>
+            <p:ph type="sldNum" sz="quarter" idx="5"/>
           </p:nvPr>
         </p:nvSpPr>
         <p:spPr/>
@@ -1054,7 +876,7 @@
 </file>
 
 <file path=ppt/notesSlides/notesSlide6.xml><?xml version="1.0" encoding="utf-8"?>
-<p:notes xmlns:a="http://schemas.openxmlformats.org/drawingml/2006/main" xmlns:p="http://schemas.openxmlformats.org/presentationml/2006/main" xmlns:r="http://schemas.openxmlformats.org/officeDocument/2006/relationships">
+<p:notes xmlns:a="http://schemas.openxmlformats.org/drawingml/2006/main" xmlns:r="http://schemas.openxmlformats.org/officeDocument/2006/relationships" xmlns:p="http://schemas.openxmlformats.org/presentationml/2006/main">
   <p:cSld>
     <p:spTree>
       <p:nvGrpSpPr>
@@ -1074,7 +896,7 @@
         <p:nvSpPr>
           <p:cNvPr id="2" name="Slide Image Placeholder 1"/>
           <p:cNvSpPr>
-            <a:spLocks noGrp="1"/>
+            <a:spLocks noGrp="1" noRot="1" noChangeAspect="1"/>
           </p:cNvSpPr>
           <p:nvPr>
             <p:ph type="sldImg" idx="2"/>
@@ -1089,7 +911,7 @@
             <a:spLocks noGrp="1"/>
           </p:cNvSpPr>
           <p:nvPr>
-            <p:ph type="body" idx="3" sz="quarter"/>
+            <p:ph type="body" sz="quarter" idx="3"/>
           </p:nvPr>
         </p:nvSpPr>
         <p:spPr/>
@@ -1106,7 +928,9 @@
               <a:t>세 모델 예측값의 단순 평균이라는 가장 단순한 방법이, 국면 판단 없이 현행 대비 2.5% 개선을 보였습니다.</a:t>
             </a:r>
           </a:p>
-          <a:p/>
+          <a:p>
+            <a:endParaRPr/>
+          </a:p>
           <a:p>
             <a:r>
               <a:t>[구성 방법 — 그대로 재현 가능한 수준으로]</a:t>
@@ -1117,7 +941,9 @@
               <a:t>매주 예측 시점마다 ① 현행 DFM 예측값 ② 현행 XGBoost 예측값 ③ Chronos-2f(사전학습 모델 + 일별 신호) 예측값을 구하고, 세 숫자를 그냥 평균 냅니다. 가중치도, 국면 판단도, 추가 학습도 없습니다.</a:t>
             </a:r>
           </a:p>
-          <a:p/>
+          <a:p>
+            <a:endParaRPr/>
+          </a:p>
           <a:p>
             <a:r>
               <a:t>[왼쪽 점검표를 하나씩]</a:t>
@@ -1143,7 +969,9 @@
               <a:t>· 통계적 유의성 p=0.37: Diebold-Mariano 검정은 "두 모델의 오차 차이가 우연일 확률"을 계산합니다. p=0.37은 우연일 가능성을 배제할 수 없다는 뜻입니다. 다만 이는 개선폭이 작아서라기보다 표본이 32개 분기뿐이어서입니다 — 이 표본에서는 6% 개선도 유의성이 나오지 않는다는 것을 별도 검정력 분석으로 확인했습니다. 그래서 '비열등 확인 + 개선 방향'이라는 정직한 수위로 보고드립니다.</a:t>
             </a:r>
           </a:p>
-          <a:p/>
+          <a:p>
+            <a:endParaRPr/>
+          </a:p>
           <a:p>
             <a:r>
               <a:t>[오른쪽 아래 상자 — 부수 확인 사항]</a:t>
@@ -1168,7 +996,7 @@
             <a:spLocks noGrp="1"/>
           </p:cNvSpPr>
           <p:nvPr>
-            <p:ph type="sldNum" idx="5" sz="quarter"/>
+            <p:ph type="sldNum" sz="quarter" idx="5"/>
           </p:nvPr>
         </p:nvSpPr>
         <p:spPr/>
@@ -1182,7 +1010,7 @@
 </file>
 
 <file path=ppt/notesSlides/notesSlide7.xml><?xml version="1.0" encoding="utf-8"?>
-<p:notes xmlns:a="http://schemas.openxmlformats.org/drawingml/2006/main" xmlns:p="http://schemas.openxmlformats.org/presentationml/2006/main" xmlns:r="http://schemas.openxmlformats.org/officeDocument/2006/relationships">
+<p:notes xmlns:a="http://schemas.openxmlformats.org/drawingml/2006/main" xmlns:r="http://schemas.openxmlformats.org/officeDocument/2006/relationships" xmlns:p="http://schemas.openxmlformats.org/presentationml/2006/main">
   <p:cSld>
     <p:spTree>
       <p:nvGrpSpPr>
@@ -1202,7 +1030,7 @@
         <p:nvSpPr>
           <p:cNvPr id="2" name="Slide Image Placeholder 1"/>
           <p:cNvSpPr>
-            <a:spLocks noGrp="1"/>
+            <a:spLocks noGrp="1" noRot="1" noChangeAspect="1"/>
           </p:cNvSpPr>
           <p:nvPr>
             <p:ph type="sldImg" idx="2"/>
@@ -1217,7 +1045,7 @@
             <a:spLocks noGrp="1"/>
           </p:cNvSpPr>
           <p:nvPr>
-            <p:ph type="body" idx="3" sz="quarter"/>
+            <p:ph type="body" sz="quarter" idx="3"/>
           </p:nvPr>
         </p:nvSpPr>
         <p:spPr/>
@@ -1234,7 +1062,9 @@
               <a:t>현행 시스템의 점 예측(한 개의 숫자)은 한 글자도 바꾸지 않습니다. 그 위에 "이 예측이 얼마나 확실한가"를 나타내는 구간을 얹는 것이 전부입니다. 영란은행(BoE) Inflation Report의 fan chart와 같은 커뮤니케이션 형식입니다.</a:t>
             </a:r>
           </a:p>
-          <a:p/>
+          <a:p>
+            <a:endParaRPr/>
+          </a:p>
           <a:p>
             <a:r>
               <a:t>[컨포멀 예측이란 — 쉬운 설명]</a:t>
@@ -1245,7 +1075,9 @@
               <a:t>"이 시스템이 과거에 비슷한 시점(예: 발표 16주 전)에 냈던 예측들이 실제와 얼마나 벌어졌었는지"를 모아, 그 오차들의 경험적 분포에서 구간을 만듭니다. 예를 들어 과거 오차의 10%~90% 분위수가 [-1.2, +0.9]였다면, 이번 점 예측에 그 폭을 그대로 얹어 80% 구간으로 제시합니다. 정규분포 같은 가정이 전혀 없고, 방법이 단순해 설명과 검증이 쉽습니다.</a:t>
             </a:r>
           </a:p>
-          <a:p/>
+          <a:p>
+            <a:endParaRPr/>
+          </a:p>
           <a:p>
             <a:r>
               <a:t>[구간의 성질]</a:t>
@@ -1266,7 +1098,9 @@
               <a:t>· 조기 주차 하이브리드: 발표 19~14주 전 구간만은 사전학습 모델(Chronos-2f)의 예측 분포를 같은 컨포멀 방식으로 보정해 씁니다. 이는 '전망 시계(얼마나 먼 미래인가)에 따른 조건화'로, 국면 판단과는 무관한 예측 실무의 표준 관행입니다.</a:t>
             </a:r>
           </a:p>
-          <a:p/>
+          <a:p>
+            <a:endParaRPr/>
+          </a:p>
           <a:p>
             <a:r>
               <a:t>[검증 숫자 읽기]</a:t>
@@ -1282,7 +1116,9 @@
               <a:t>· Winkler 점수: 구간의 품질 지표로, 구간이 좁을수록 좋지만 실제값이 구간을 벗어나면 큰 벌점을 받습니다. 딥러닝 하이브리드가 현행 오차만으로 만든 구간보다 5.5% 우수했습니다.</a:t>
             </a:r>
           </a:p>
-          <a:p/>
+          <a:p>
+            <a:endParaRPr/>
+          </a:p>
           <a:p>
             <a:r>
               <a:t>[오른쪽 그림]</a:t>
@@ -1302,7 +1138,7 @@
             <a:spLocks noGrp="1"/>
           </p:cNvSpPr>
           <p:nvPr>
-            <p:ph type="sldNum" idx="5" sz="quarter"/>
+            <p:ph type="sldNum" sz="quarter" idx="5"/>
           </p:nvPr>
         </p:nvSpPr>
         <p:spPr/>
@@ -1316,7 +1152,7 @@
 </file>
 
 <file path=ppt/notesSlides/notesSlide8.xml><?xml version="1.0" encoding="utf-8"?>
-<p:notes xmlns:a="http://schemas.openxmlformats.org/drawingml/2006/main" xmlns:p="http://schemas.openxmlformats.org/presentationml/2006/main" xmlns:r="http://schemas.openxmlformats.org/officeDocument/2006/relationships">
+<p:notes xmlns:a="http://schemas.openxmlformats.org/drawingml/2006/main" xmlns:r="http://schemas.openxmlformats.org/officeDocument/2006/relationships" xmlns:p="http://schemas.openxmlformats.org/presentationml/2006/main">
   <p:cSld>
     <p:spTree>
       <p:nvGrpSpPr>
@@ -1336,7 +1172,7 @@
         <p:nvSpPr>
           <p:cNvPr id="2" name="Slide Image Placeholder 1"/>
           <p:cNvSpPr>
-            <a:spLocks noGrp="1"/>
+            <a:spLocks noGrp="1" noRot="1" noChangeAspect="1"/>
           </p:cNvSpPr>
           <p:nvPr>
             <p:ph type="sldImg" idx="2"/>
@@ -1351,7 +1187,7 @@
             <a:spLocks noGrp="1"/>
           </p:cNvSpPr>
           <p:nvPr>
-            <p:ph type="body" idx="3" sz="quarter"/>
+            <p:ph type="body" sz="quarter" idx="3"/>
           </p:nvPr>
         </p:nvSpPr>
         <p:spPr/>
@@ -1360,73 +1196,1737 @@
           <a:lstStyle/>
           <a:p>
             <a:r>
-              <a:t>[안건별 배경 설명]</a:t>
-            </a:r>
-          </a:p>
-          <a:p/>
-          <a:p>
-            <a:r>
-              <a:t>A1. Fan chart 시범 도입 (결정 요청)</a:t>
-            </a:r>
-          </a:p>
-          <a:p>
-            <a:r>
-              <a:t>7번 슬라이드에서 설명한 예측구간입니다. 검증이 완료되어 있고, 기존 시스템 수정이 전혀 없으며, 주간 보고서에 그림 1장을 추가하는 형태라 도입 부담이 가장 작습니다. 이번 회의에서 도입 여부와 형식(그림 양식, 시범 운영 기간)을 결정할 수 있으면 다음 보고 주기부터 적용 가능합니다.</a:t>
-            </a:r>
-          </a:p>
-          <a:p/>
-          <a:p>
-            <a:r>
-              <a:t>A2. 상시 3자 결합의 병행 산출 (의견 요청)</a:t>
-            </a:r>
-          </a:p>
-          <a:p>
-            <a:r>
-              <a:t>6번 슬라이드의 결과입니다. 통계적 유의성이 표본 한계로 확보되지 않았으므로 '현행 교체'를 제안하는 것이 아니라, 현행과 나란히 산출해 실전 데이터를 축적하면서 비교하는 병행 운영을 여쭙는 것입니다. 병행 산출이면 현행 보고 체계에 영향이 없습니다.</a:t>
-            </a:r>
-          </a:p>
-          <a:p/>
-          <a:p>
-            <a:r>
-              <a:t>A3. 전망변동 자동 설명 리포트 (차기 시연)</a:t>
-            </a:r>
-          </a:p>
-          <a:p>
-            <a:r>
-              <a:t>"이번 주 나우캐스트가 지난주보다 0.2%p 내려간 이유는 무엇인가"를 자동으로 서술하는 리포트입니다. 예측값 자체는 건드리지 않고 해석 가능성을 높이는 층위로, 다음 회의에서 실제 분기 사례로 프로토타입을 시연드릴 계획입니다.</a:t>
-            </a:r>
-          </a:p>
-          <a:p/>
-          <a:p>
-            <a:r>
-              <a:t>A4. 속보-확정 개정 예측 (동의 요청)</a:t>
-            </a:r>
-          </a:p>
-          <a:p>
-            <a:r>
-              <a:t>속보치는 이후 잠정·확정 단계에서 개정되는데, 그 개정폭 자체를 예측하는 연구 축입니다(국제적으로 Faust 등의 선행 연구가 있는 분야). 현행 나우캐스트와 독립적인 신규 부가가치 축이라 타당성 검토(약 반나절 분량의 예비 분석) 착수에 대한 동의를 구합니다.</a:t>
-            </a:r>
-          </a:p>
-          <a:p/>
-          <a:p>
-            <a:r>
-              <a:t>A5. 데이터 협조 (실무 협조)</a:t>
-            </a:r>
-          </a:p>
-          <a:p>
-            <a:r>
-              <a:t>관세청이 공개하는 1~10일 단위 수출 통계는 무개정·고빈도 신호로 일별 금융지표와 같은 방식으로 활용 가능합니다. API 키 발급 등 실무 협조와, 빈티지 파일 내 일부 지표의 정의 확인(컬럼 사전)을 요청드립니다.</a:t>
-            </a:r>
-          </a:p>
-          <a:p/>
-          <a:p>
-            <a:r>
-              <a:t>[회의 운영 팁]</a:t>
-            </a:r>
-          </a:p>
-          <a:p>
-            <a:r>
-              <a:t>A1이 가장 결정이 쉽고 효과가 즉시 보이는 안건이므로 먼저 다루고, A2는 '병행'이라는 수위를 분명히 하면 부담 없이 논의됩니다.</a:t>
+              <a:rPr dirty="0"/>
+              <a:t>[</a:t>
+            </a:r>
+            <a:r>
+              <a:rPr dirty="0" err="1"/>
+              <a:t>안건별</a:t>
+            </a:r>
+            <a:r>
+              <a:rPr dirty="0"/>
+              <a:t> </a:t>
+            </a:r>
+            <a:r>
+              <a:rPr dirty="0" err="1"/>
+              <a:t>배경</a:t>
+            </a:r>
+            <a:r>
+              <a:rPr dirty="0"/>
+              <a:t> </a:t>
+            </a:r>
+            <a:r>
+              <a:rPr dirty="0" err="1"/>
+              <a:t>설명</a:t>
+            </a:r>
+            <a:r>
+              <a:rPr dirty="0"/>
+              <a:t>]</a:t>
+            </a:r>
+          </a:p>
+          <a:p>
+            <a:endParaRPr dirty="0"/>
+          </a:p>
+          <a:p>
+            <a:r>
+              <a:rPr dirty="0"/>
+              <a:t>A1. Fan chart </a:t>
+            </a:r>
+            <a:r>
+              <a:rPr dirty="0" err="1"/>
+              <a:t>시범</a:t>
+            </a:r>
+            <a:r>
+              <a:rPr dirty="0"/>
+              <a:t> </a:t>
+            </a:r>
+            <a:r>
+              <a:rPr dirty="0" err="1"/>
+              <a:t>도입</a:t>
+            </a:r>
+            <a:r>
+              <a:rPr dirty="0"/>
+              <a:t> (</a:t>
+            </a:r>
+            <a:r>
+              <a:rPr dirty="0" err="1"/>
+              <a:t>결정</a:t>
+            </a:r>
+            <a:r>
+              <a:rPr dirty="0"/>
+              <a:t> </a:t>
+            </a:r>
+            <a:r>
+              <a:rPr dirty="0" err="1"/>
+              <a:t>요청</a:t>
+            </a:r>
+            <a:r>
+              <a:rPr dirty="0"/>
+              <a:t>)</a:t>
+            </a:r>
+          </a:p>
+          <a:p>
+            <a:r>
+              <a:rPr dirty="0"/>
+              <a:t>7번 </a:t>
+            </a:r>
+            <a:r>
+              <a:rPr dirty="0" err="1"/>
+              <a:t>슬라이드에서</a:t>
+            </a:r>
+            <a:r>
+              <a:rPr dirty="0"/>
+              <a:t> </a:t>
+            </a:r>
+            <a:r>
+              <a:rPr dirty="0" err="1"/>
+              <a:t>설명한</a:t>
+            </a:r>
+            <a:r>
+              <a:rPr dirty="0"/>
+              <a:t> </a:t>
+            </a:r>
+            <a:r>
+              <a:rPr dirty="0" err="1"/>
+              <a:t>예측구간입니다</a:t>
+            </a:r>
+            <a:r>
+              <a:rPr dirty="0"/>
+              <a:t>. </a:t>
+            </a:r>
+            <a:r>
+              <a:rPr dirty="0" err="1"/>
+              <a:t>검증이</a:t>
+            </a:r>
+            <a:r>
+              <a:rPr dirty="0"/>
+              <a:t> </a:t>
+            </a:r>
+            <a:r>
+              <a:rPr dirty="0" err="1"/>
+              <a:t>완료되어</a:t>
+            </a:r>
+            <a:r>
+              <a:rPr dirty="0"/>
+              <a:t> </a:t>
+            </a:r>
+            <a:r>
+              <a:rPr dirty="0" err="1"/>
+              <a:t>있고</a:t>
+            </a:r>
+            <a:r>
+              <a:rPr dirty="0"/>
+              <a:t>, </a:t>
+            </a:r>
+            <a:r>
+              <a:rPr dirty="0" err="1"/>
+              <a:t>기존</a:t>
+            </a:r>
+            <a:r>
+              <a:rPr dirty="0"/>
+              <a:t> </a:t>
+            </a:r>
+            <a:r>
+              <a:rPr dirty="0" err="1"/>
+              <a:t>시스템</a:t>
+            </a:r>
+            <a:r>
+              <a:rPr dirty="0"/>
+              <a:t> </a:t>
+            </a:r>
+            <a:r>
+              <a:rPr dirty="0" err="1"/>
+              <a:t>수정이</a:t>
+            </a:r>
+            <a:r>
+              <a:rPr dirty="0"/>
+              <a:t> </a:t>
+            </a:r>
+            <a:r>
+              <a:rPr dirty="0" err="1"/>
+              <a:t>전혀</a:t>
+            </a:r>
+            <a:r>
+              <a:rPr dirty="0"/>
+              <a:t> </a:t>
+            </a:r>
+            <a:r>
+              <a:rPr dirty="0" err="1"/>
+              <a:t>없으며</a:t>
+            </a:r>
+            <a:r>
+              <a:rPr dirty="0"/>
+              <a:t>, </a:t>
+            </a:r>
+            <a:r>
+              <a:rPr dirty="0" err="1"/>
+              <a:t>주간</a:t>
+            </a:r>
+            <a:r>
+              <a:rPr dirty="0"/>
+              <a:t> </a:t>
+            </a:r>
+            <a:r>
+              <a:rPr dirty="0" err="1"/>
+              <a:t>보고서에</a:t>
+            </a:r>
+            <a:r>
+              <a:rPr dirty="0"/>
+              <a:t> </a:t>
+            </a:r>
+            <a:r>
+              <a:rPr dirty="0" err="1"/>
+              <a:t>그림</a:t>
+            </a:r>
+            <a:r>
+              <a:rPr dirty="0"/>
+              <a:t> 1장을 </a:t>
+            </a:r>
+            <a:r>
+              <a:rPr dirty="0" err="1"/>
+              <a:t>추가하는</a:t>
+            </a:r>
+            <a:r>
+              <a:rPr dirty="0"/>
+              <a:t> </a:t>
+            </a:r>
+            <a:r>
+              <a:rPr dirty="0" err="1"/>
+              <a:t>형태라</a:t>
+            </a:r>
+            <a:r>
+              <a:rPr dirty="0"/>
+              <a:t> </a:t>
+            </a:r>
+            <a:r>
+              <a:rPr dirty="0" err="1"/>
+              <a:t>도입</a:t>
+            </a:r>
+            <a:r>
+              <a:rPr dirty="0"/>
+              <a:t> </a:t>
+            </a:r>
+            <a:r>
+              <a:rPr dirty="0" err="1"/>
+              <a:t>부담이</a:t>
+            </a:r>
+            <a:r>
+              <a:rPr dirty="0"/>
+              <a:t> </a:t>
+            </a:r>
+            <a:r>
+              <a:rPr dirty="0" err="1"/>
+              <a:t>가장</a:t>
+            </a:r>
+            <a:r>
+              <a:rPr dirty="0"/>
+              <a:t> </a:t>
+            </a:r>
+            <a:r>
+              <a:rPr dirty="0" err="1"/>
+              <a:t>작습니다</a:t>
+            </a:r>
+            <a:r>
+              <a:rPr dirty="0"/>
+              <a:t>. </a:t>
+            </a:r>
+            <a:r>
+              <a:rPr dirty="0" err="1"/>
+              <a:t>이번</a:t>
+            </a:r>
+            <a:r>
+              <a:rPr dirty="0"/>
+              <a:t> </a:t>
+            </a:r>
+            <a:r>
+              <a:rPr dirty="0" err="1"/>
+              <a:t>회의에서</a:t>
+            </a:r>
+            <a:r>
+              <a:rPr dirty="0"/>
+              <a:t> </a:t>
+            </a:r>
+            <a:r>
+              <a:rPr dirty="0" err="1"/>
+              <a:t>도입</a:t>
+            </a:r>
+            <a:r>
+              <a:rPr dirty="0"/>
+              <a:t> </a:t>
+            </a:r>
+            <a:r>
+              <a:rPr dirty="0" err="1"/>
+              <a:t>여부와</a:t>
+            </a:r>
+            <a:r>
+              <a:rPr dirty="0"/>
+              <a:t> </a:t>
+            </a:r>
+            <a:r>
+              <a:rPr dirty="0" err="1"/>
+              <a:t>형식</a:t>
+            </a:r>
+            <a:r>
+              <a:rPr dirty="0"/>
+              <a:t>(</a:t>
+            </a:r>
+            <a:r>
+              <a:rPr dirty="0" err="1"/>
+              <a:t>그림</a:t>
+            </a:r>
+            <a:r>
+              <a:rPr dirty="0"/>
+              <a:t> </a:t>
+            </a:r>
+            <a:r>
+              <a:rPr dirty="0" err="1"/>
+              <a:t>양식</a:t>
+            </a:r>
+            <a:r>
+              <a:rPr dirty="0"/>
+              <a:t>, </a:t>
+            </a:r>
+            <a:r>
+              <a:rPr dirty="0" err="1"/>
+              <a:t>시범</a:t>
+            </a:r>
+            <a:r>
+              <a:rPr dirty="0"/>
+              <a:t> </a:t>
+            </a:r>
+            <a:r>
+              <a:rPr dirty="0" err="1"/>
+              <a:t>운영</a:t>
+            </a:r>
+            <a:r>
+              <a:rPr dirty="0"/>
+              <a:t> </a:t>
+            </a:r>
+            <a:r>
+              <a:rPr dirty="0" err="1"/>
+              <a:t>기간</a:t>
+            </a:r>
+            <a:r>
+              <a:rPr dirty="0"/>
+              <a:t>)</a:t>
+            </a:r>
+            <a:r>
+              <a:rPr dirty="0" err="1"/>
+              <a:t>을</a:t>
+            </a:r>
+            <a:r>
+              <a:rPr dirty="0"/>
+              <a:t> </a:t>
+            </a:r>
+            <a:r>
+              <a:rPr dirty="0" err="1"/>
+              <a:t>결정할</a:t>
+            </a:r>
+            <a:r>
+              <a:rPr dirty="0"/>
+              <a:t> </a:t>
+            </a:r>
+            <a:r>
+              <a:rPr dirty="0" err="1"/>
+              <a:t>수</a:t>
+            </a:r>
+            <a:r>
+              <a:rPr dirty="0"/>
+              <a:t> </a:t>
+            </a:r>
+            <a:r>
+              <a:rPr dirty="0" err="1"/>
+              <a:t>있으면</a:t>
+            </a:r>
+            <a:r>
+              <a:rPr dirty="0"/>
+              <a:t> </a:t>
+            </a:r>
+            <a:r>
+              <a:rPr dirty="0" err="1"/>
+              <a:t>다음</a:t>
+            </a:r>
+            <a:r>
+              <a:rPr dirty="0"/>
+              <a:t> </a:t>
+            </a:r>
+            <a:r>
+              <a:rPr dirty="0" err="1"/>
+              <a:t>보고</a:t>
+            </a:r>
+            <a:r>
+              <a:rPr dirty="0"/>
+              <a:t> </a:t>
+            </a:r>
+            <a:r>
+              <a:rPr dirty="0" err="1"/>
+              <a:t>주기부터</a:t>
+            </a:r>
+            <a:r>
+              <a:rPr dirty="0"/>
+              <a:t> </a:t>
+            </a:r>
+            <a:r>
+              <a:rPr dirty="0" err="1"/>
+              <a:t>적용</a:t>
+            </a:r>
+            <a:r>
+              <a:rPr dirty="0"/>
+              <a:t> </a:t>
+            </a:r>
+            <a:r>
+              <a:rPr dirty="0" err="1"/>
+              <a:t>가능합니다</a:t>
+            </a:r>
+            <a:r>
+              <a:rPr dirty="0"/>
+              <a:t>.</a:t>
+            </a:r>
+          </a:p>
+          <a:p>
+            <a:endParaRPr dirty="0"/>
+          </a:p>
+          <a:p>
+            <a:r>
+              <a:rPr dirty="0"/>
+              <a:t>A2. </a:t>
+            </a:r>
+            <a:r>
+              <a:rPr dirty="0" err="1"/>
+              <a:t>상시</a:t>
+            </a:r>
+            <a:r>
+              <a:rPr dirty="0"/>
+              <a:t> 3자 </a:t>
+            </a:r>
+            <a:r>
+              <a:rPr dirty="0" err="1"/>
+              <a:t>결합의</a:t>
+            </a:r>
+            <a:r>
+              <a:rPr dirty="0"/>
+              <a:t> </a:t>
+            </a:r>
+            <a:r>
+              <a:rPr dirty="0" err="1"/>
+              <a:t>병행</a:t>
+            </a:r>
+            <a:r>
+              <a:rPr dirty="0"/>
+              <a:t> </a:t>
+            </a:r>
+            <a:r>
+              <a:rPr dirty="0" err="1"/>
+              <a:t>산출</a:t>
+            </a:r>
+            <a:r>
+              <a:rPr dirty="0"/>
+              <a:t> (</a:t>
+            </a:r>
+            <a:r>
+              <a:rPr dirty="0" err="1"/>
+              <a:t>의견</a:t>
+            </a:r>
+            <a:r>
+              <a:rPr dirty="0"/>
+              <a:t> </a:t>
+            </a:r>
+            <a:r>
+              <a:rPr dirty="0" err="1"/>
+              <a:t>요청</a:t>
+            </a:r>
+            <a:r>
+              <a:t>)</a:t>
+            </a:r>
+          </a:p>
+          <a:p>
+            <a:r>
+              <a:rPr dirty="0"/>
+              <a:t>6번 </a:t>
+            </a:r>
+            <a:r>
+              <a:rPr dirty="0" err="1"/>
+              <a:t>슬라이드의</a:t>
+            </a:r>
+            <a:r>
+              <a:rPr dirty="0"/>
+              <a:t> </a:t>
+            </a:r>
+            <a:r>
+              <a:rPr dirty="0" err="1"/>
+              <a:t>결과입니다</a:t>
+            </a:r>
+            <a:r>
+              <a:rPr dirty="0"/>
+              <a:t>. </a:t>
+            </a:r>
+            <a:r>
+              <a:rPr dirty="0" err="1"/>
+              <a:t>통계적</a:t>
+            </a:r>
+            <a:r>
+              <a:rPr dirty="0"/>
+              <a:t> </a:t>
+            </a:r>
+            <a:r>
+              <a:rPr dirty="0" err="1"/>
+              <a:t>유의성이</a:t>
+            </a:r>
+            <a:r>
+              <a:rPr dirty="0"/>
+              <a:t> </a:t>
+            </a:r>
+            <a:r>
+              <a:rPr dirty="0" err="1"/>
+              <a:t>표본</a:t>
+            </a:r>
+            <a:r>
+              <a:rPr dirty="0"/>
+              <a:t> </a:t>
+            </a:r>
+            <a:r>
+              <a:rPr dirty="0" err="1"/>
+              <a:t>한계로</a:t>
+            </a:r>
+            <a:r>
+              <a:rPr dirty="0"/>
+              <a:t> </a:t>
+            </a:r>
+            <a:r>
+              <a:rPr dirty="0" err="1"/>
+              <a:t>확보되지</a:t>
+            </a:r>
+            <a:r>
+              <a:rPr dirty="0"/>
+              <a:t> </a:t>
+            </a:r>
+            <a:r>
+              <a:rPr dirty="0" err="1"/>
+              <a:t>않았으므로</a:t>
+            </a:r>
+            <a:r>
+              <a:rPr dirty="0"/>
+              <a:t> '</a:t>
+            </a:r>
+            <a:r>
+              <a:rPr dirty="0" err="1"/>
+              <a:t>현행</a:t>
+            </a:r>
+            <a:r>
+              <a:rPr dirty="0"/>
+              <a:t> </a:t>
+            </a:r>
+            <a:r>
+              <a:rPr dirty="0" err="1"/>
+              <a:t>교체'를</a:t>
+            </a:r>
+            <a:r>
+              <a:rPr dirty="0"/>
+              <a:t> </a:t>
+            </a:r>
+            <a:r>
+              <a:rPr dirty="0" err="1"/>
+              <a:t>제안하는</a:t>
+            </a:r>
+            <a:r>
+              <a:rPr dirty="0"/>
+              <a:t> </a:t>
+            </a:r>
+            <a:r>
+              <a:rPr dirty="0" err="1"/>
+              <a:t>것이</a:t>
+            </a:r>
+            <a:r>
+              <a:rPr dirty="0"/>
+              <a:t> </a:t>
+            </a:r>
+            <a:r>
+              <a:rPr dirty="0" err="1"/>
+              <a:t>아니라</a:t>
+            </a:r>
+            <a:r>
+              <a:rPr dirty="0"/>
+              <a:t>, </a:t>
+            </a:r>
+            <a:r>
+              <a:rPr dirty="0" err="1"/>
+              <a:t>현행과</a:t>
+            </a:r>
+            <a:r>
+              <a:rPr dirty="0"/>
+              <a:t> </a:t>
+            </a:r>
+            <a:r>
+              <a:rPr dirty="0" err="1"/>
+              <a:t>나란히</a:t>
+            </a:r>
+            <a:r>
+              <a:rPr dirty="0"/>
+              <a:t> </a:t>
+            </a:r>
+            <a:r>
+              <a:rPr dirty="0" err="1"/>
+              <a:t>산출해</a:t>
+            </a:r>
+            <a:r>
+              <a:rPr dirty="0"/>
+              <a:t> </a:t>
+            </a:r>
+            <a:r>
+              <a:rPr dirty="0" err="1"/>
+              <a:t>실전</a:t>
+            </a:r>
+            <a:r>
+              <a:rPr dirty="0"/>
+              <a:t> </a:t>
+            </a:r>
+            <a:r>
+              <a:rPr dirty="0" err="1"/>
+              <a:t>데이터를</a:t>
+            </a:r>
+            <a:r>
+              <a:rPr dirty="0"/>
+              <a:t> </a:t>
+            </a:r>
+            <a:r>
+              <a:rPr dirty="0" err="1"/>
+              <a:t>축적하면서</a:t>
+            </a:r>
+            <a:r>
+              <a:rPr dirty="0"/>
+              <a:t> </a:t>
+            </a:r>
+            <a:r>
+              <a:rPr dirty="0" err="1"/>
+              <a:t>비교하는</a:t>
+            </a:r>
+            <a:r>
+              <a:rPr dirty="0"/>
+              <a:t> </a:t>
+            </a:r>
+            <a:r>
+              <a:rPr dirty="0" err="1"/>
+              <a:t>병행</a:t>
+            </a:r>
+            <a:r>
+              <a:rPr dirty="0"/>
+              <a:t> </a:t>
+            </a:r>
+            <a:r>
+              <a:rPr dirty="0" err="1"/>
+              <a:t>운영을</a:t>
+            </a:r>
+            <a:r>
+              <a:rPr dirty="0"/>
+              <a:t> </a:t>
+            </a:r>
+            <a:r>
+              <a:rPr dirty="0" err="1"/>
+              <a:t>여쭙는</a:t>
+            </a:r>
+            <a:r>
+              <a:rPr dirty="0"/>
+              <a:t> </a:t>
+            </a:r>
+            <a:r>
+              <a:rPr dirty="0" err="1"/>
+              <a:t>것입니다</a:t>
+            </a:r>
+            <a:r>
+              <a:rPr dirty="0"/>
+              <a:t>. </a:t>
+            </a:r>
+            <a:r>
+              <a:rPr dirty="0" err="1"/>
+              <a:t>병행</a:t>
+            </a:r>
+            <a:r>
+              <a:rPr dirty="0"/>
+              <a:t> </a:t>
+            </a:r>
+            <a:r>
+              <a:rPr dirty="0" err="1"/>
+              <a:t>산출이면</a:t>
+            </a:r>
+            <a:r>
+              <a:rPr dirty="0"/>
+              <a:t> </a:t>
+            </a:r>
+            <a:r>
+              <a:rPr dirty="0" err="1"/>
+              <a:t>현행</a:t>
+            </a:r>
+            <a:r>
+              <a:rPr dirty="0"/>
+              <a:t> </a:t>
+            </a:r>
+            <a:r>
+              <a:rPr dirty="0" err="1"/>
+              <a:t>보고</a:t>
+            </a:r>
+            <a:r>
+              <a:rPr dirty="0"/>
+              <a:t> </a:t>
+            </a:r>
+            <a:r>
+              <a:rPr dirty="0" err="1"/>
+              <a:t>체계에</a:t>
+            </a:r>
+            <a:r>
+              <a:rPr dirty="0"/>
+              <a:t> </a:t>
+            </a:r>
+            <a:r>
+              <a:rPr dirty="0" err="1"/>
+              <a:t>영향이</a:t>
+            </a:r>
+            <a:r>
+              <a:rPr dirty="0"/>
+              <a:t> </a:t>
+            </a:r>
+            <a:r>
+              <a:rPr dirty="0" err="1"/>
+              <a:t>없습니다</a:t>
+            </a:r>
+            <a:r>
+              <a:rPr dirty="0"/>
+              <a:t>.</a:t>
+            </a:r>
+          </a:p>
+          <a:p>
+            <a:endParaRPr dirty="0"/>
+          </a:p>
+          <a:p>
+            <a:r>
+              <a:rPr dirty="0"/>
+              <a:t>A3. </a:t>
+            </a:r>
+            <a:r>
+              <a:rPr dirty="0" err="1"/>
+              <a:t>전망변동</a:t>
+            </a:r>
+            <a:r>
+              <a:rPr dirty="0"/>
+              <a:t> </a:t>
+            </a:r>
+            <a:r>
+              <a:rPr dirty="0" err="1"/>
+              <a:t>자동</a:t>
+            </a:r>
+            <a:r>
+              <a:rPr dirty="0"/>
+              <a:t> </a:t>
+            </a:r>
+            <a:r>
+              <a:rPr dirty="0" err="1"/>
+              <a:t>설명</a:t>
+            </a:r>
+            <a:r>
+              <a:rPr dirty="0"/>
+              <a:t> </a:t>
+            </a:r>
+            <a:r>
+              <a:rPr dirty="0" err="1"/>
+              <a:t>리포트</a:t>
+            </a:r>
+            <a:r>
+              <a:rPr dirty="0"/>
+              <a:t> (</a:t>
+            </a:r>
+            <a:r>
+              <a:rPr dirty="0" err="1"/>
+              <a:t>차기</a:t>
+            </a:r>
+            <a:r>
+              <a:rPr dirty="0"/>
+              <a:t> </a:t>
+            </a:r>
+            <a:r>
+              <a:rPr dirty="0" err="1"/>
+              <a:t>시연</a:t>
+            </a:r>
+            <a:r>
+              <a:rPr dirty="0"/>
+              <a:t>)</a:t>
+            </a:r>
+          </a:p>
+          <a:p>
+            <a:r>
+              <a:rPr dirty="0"/>
+              <a:t>"</a:t>
+            </a:r>
+            <a:r>
+              <a:rPr dirty="0" err="1"/>
+              <a:t>이번</a:t>
+            </a:r>
+            <a:r>
+              <a:rPr dirty="0"/>
+              <a:t> </a:t>
+            </a:r>
+            <a:r>
+              <a:rPr dirty="0" err="1"/>
+              <a:t>주</a:t>
+            </a:r>
+            <a:r>
+              <a:rPr dirty="0"/>
+              <a:t> </a:t>
+            </a:r>
+            <a:r>
+              <a:rPr dirty="0" err="1"/>
+              <a:t>나우캐스트가</a:t>
+            </a:r>
+            <a:r>
+              <a:rPr dirty="0"/>
+              <a:t> </a:t>
+            </a:r>
+            <a:r>
+              <a:rPr dirty="0" err="1"/>
+              <a:t>지난주보다</a:t>
+            </a:r>
+            <a:r>
+              <a:rPr dirty="0"/>
+              <a:t> 0.2%p </a:t>
+            </a:r>
+            <a:r>
+              <a:rPr dirty="0" err="1"/>
+              <a:t>내려간</a:t>
+            </a:r>
+            <a:r>
+              <a:rPr dirty="0"/>
+              <a:t> </a:t>
+            </a:r>
+            <a:r>
+              <a:rPr dirty="0" err="1"/>
+              <a:t>이유는</a:t>
+            </a:r>
+            <a:r>
+              <a:rPr dirty="0"/>
+              <a:t> </a:t>
+            </a:r>
+            <a:r>
+              <a:rPr dirty="0" err="1"/>
+              <a:t>무엇인가"를</a:t>
+            </a:r>
+            <a:r>
+              <a:rPr dirty="0"/>
+              <a:t> </a:t>
+            </a:r>
+            <a:r>
+              <a:rPr dirty="0" err="1"/>
+              <a:t>자동으로</a:t>
+            </a:r>
+            <a:r>
+              <a:rPr dirty="0"/>
+              <a:t> </a:t>
+            </a:r>
+            <a:r>
+              <a:rPr dirty="0" err="1"/>
+              <a:t>서술하는</a:t>
+            </a:r>
+            <a:r>
+              <a:rPr dirty="0"/>
+              <a:t> </a:t>
+            </a:r>
+            <a:r>
+              <a:rPr dirty="0" err="1"/>
+              <a:t>리포트입니다</a:t>
+            </a:r>
+            <a:r>
+              <a:rPr dirty="0"/>
+              <a:t>. </a:t>
+            </a:r>
+            <a:r>
+              <a:rPr dirty="0" err="1"/>
+              <a:t>예측값</a:t>
+            </a:r>
+            <a:r>
+              <a:rPr dirty="0"/>
+              <a:t> </a:t>
+            </a:r>
+            <a:r>
+              <a:rPr dirty="0" err="1"/>
+              <a:t>자체는</a:t>
+            </a:r>
+            <a:r>
+              <a:rPr dirty="0"/>
+              <a:t> </a:t>
+            </a:r>
+            <a:r>
+              <a:rPr dirty="0" err="1"/>
+              <a:t>건드리지</a:t>
+            </a:r>
+            <a:r>
+              <a:rPr dirty="0"/>
+              <a:t> </a:t>
+            </a:r>
+            <a:r>
+              <a:rPr dirty="0" err="1"/>
+              <a:t>않고</a:t>
+            </a:r>
+            <a:r>
+              <a:rPr dirty="0"/>
+              <a:t> </a:t>
+            </a:r>
+            <a:r>
+              <a:rPr dirty="0" err="1"/>
+              <a:t>해석</a:t>
+            </a:r>
+            <a:r>
+              <a:rPr dirty="0"/>
+              <a:t> </a:t>
+            </a:r>
+            <a:r>
+              <a:rPr dirty="0" err="1"/>
+              <a:t>가능성을</a:t>
+            </a:r>
+            <a:r>
+              <a:rPr dirty="0"/>
+              <a:t> </a:t>
+            </a:r>
+            <a:r>
+              <a:rPr dirty="0" err="1"/>
+              <a:t>높이는</a:t>
+            </a:r>
+            <a:r>
+              <a:rPr dirty="0"/>
+              <a:t> </a:t>
+            </a:r>
+            <a:r>
+              <a:rPr dirty="0" err="1"/>
+              <a:t>층위로</a:t>
+            </a:r>
+            <a:r>
+              <a:rPr dirty="0"/>
+              <a:t>, </a:t>
+            </a:r>
+            <a:r>
+              <a:rPr dirty="0" err="1"/>
+              <a:t>다음</a:t>
+            </a:r>
+            <a:r>
+              <a:rPr dirty="0"/>
+              <a:t> </a:t>
+            </a:r>
+            <a:r>
+              <a:rPr dirty="0" err="1"/>
+              <a:t>회의에서</a:t>
+            </a:r>
+            <a:r>
+              <a:rPr dirty="0"/>
+              <a:t> </a:t>
+            </a:r>
+            <a:r>
+              <a:rPr dirty="0" err="1"/>
+              <a:t>실제</a:t>
+            </a:r>
+            <a:r>
+              <a:rPr dirty="0"/>
+              <a:t> </a:t>
+            </a:r>
+            <a:r>
+              <a:rPr dirty="0" err="1"/>
+              <a:t>분기</a:t>
+            </a:r>
+            <a:r>
+              <a:rPr dirty="0"/>
+              <a:t> </a:t>
+            </a:r>
+            <a:r>
+              <a:rPr dirty="0" err="1"/>
+              <a:t>사례로</a:t>
+            </a:r>
+            <a:r>
+              <a:rPr dirty="0"/>
+              <a:t> </a:t>
+            </a:r>
+            <a:r>
+              <a:rPr dirty="0" err="1"/>
+              <a:t>프로토타입을</a:t>
+            </a:r>
+            <a:r>
+              <a:rPr dirty="0"/>
+              <a:t> </a:t>
+            </a:r>
+            <a:r>
+              <a:rPr dirty="0" err="1"/>
+              <a:t>시연드릴</a:t>
+            </a:r>
+            <a:r>
+              <a:rPr dirty="0"/>
+              <a:t> </a:t>
+            </a:r>
+            <a:r>
+              <a:rPr dirty="0" err="1"/>
+              <a:t>계획입니다</a:t>
+            </a:r>
+            <a:r>
+              <a:rPr dirty="0"/>
+              <a:t>.</a:t>
+            </a:r>
+          </a:p>
+          <a:p>
+            <a:endParaRPr dirty="0"/>
+          </a:p>
+          <a:p>
+            <a:r>
+              <a:rPr dirty="0"/>
+              <a:t>A4. </a:t>
+            </a:r>
+            <a:r>
+              <a:rPr dirty="0" err="1"/>
+              <a:t>속보-확정</a:t>
+            </a:r>
+            <a:r>
+              <a:rPr dirty="0"/>
+              <a:t> </a:t>
+            </a:r>
+            <a:r>
+              <a:rPr dirty="0" err="1"/>
+              <a:t>개정</a:t>
+            </a:r>
+            <a:r>
+              <a:rPr dirty="0"/>
+              <a:t> </a:t>
+            </a:r>
+            <a:r>
+              <a:rPr dirty="0" err="1"/>
+              <a:t>예측</a:t>
+            </a:r>
+            <a:r>
+              <a:rPr dirty="0"/>
+              <a:t> (</a:t>
+            </a:r>
+            <a:r>
+              <a:rPr dirty="0" err="1"/>
+              <a:t>동의</a:t>
+            </a:r>
+            <a:r>
+              <a:rPr dirty="0"/>
+              <a:t> </a:t>
+            </a:r>
+            <a:r>
+              <a:rPr dirty="0" err="1"/>
+              <a:t>요청</a:t>
+            </a:r>
+            <a:r>
+              <a:rPr dirty="0"/>
+              <a:t>)</a:t>
+            </a:r>
+          </a:p>
+          <a:p>
+            <a:r>
+              <a:rPr dirty="0" err="1"/>
+              <a:t>속보치는</a:t>
+            </a:r>
+            <a:r>
+              <a:rPr dirty="0"/>
+              <a:t> </a:t>
+            </a:r>
+            <a:r>
+              <a:rPr dirty="0" err="1"/>
+              <a:t>이후</a:t>
+            </a:r>
+            <a:r>
+              <a:rPr dirty="0"/>
+              <a:t> </a:t>
+            </a:r>
+            <a:r>
+              <a:rPr dirty="0" err="1"/>
+              <a:t>잠정·확정</a:t>
+            </a:r>
+            <a:r>
+              <a:rPr dirty="0"/>
+              <a:t> </a:t>
+            </a:r>
+            <a:r>
+              <a:rPr dirty="0" err="1"/>
+              <a:t>단계에서</a:t>
+            </a:r>
+            <a:r>
+              <a:rPr dirty="0"/>
+              <a:t> </a:t>
+            </a:r>
+            <a:r>
+              <a:rPr dirty="0" err="1"/>
+              <a:t>개정되는데</a:t>
+            </a:r>
+            <a:r>
+              <a:rPr dirty="0"/>
+              <a:t>, </a:t>
+            </a:r>
+            <a:r>
+              <a:rPr dirty="0" err="1"/>
+              <a:t>그</a:t>
+            </a:r>
+            <a:r>
+              <a:rPr dirty="0"/>
+              <a:t> </a:t>
+            </a:r>
+            <a:r>
+              <a:rPr dirty="0" err="1"/>
+              <a:t>개정폭</a:t>
+            </a:r>
+            <a:r>
+              <a:rPr dirty="0"/>
+              <a:t> </a:t>
+            </a:r>
+            <a:r>
+              <a:rPr dirty="0" err="1"/>
+              <a:t>자체를</a:t>
+            </a:r>
+            <a:r>
+              <a:rPr dirty="0"/>
+              <a:t> </a:t>
+            </a:r>
+            <a:r>
+              <a:rPr dirty="0" err="1"/>
+              <a:t>예측하는</a:t>
+            </a:r>
+            <a:r>
+              <a:rPr dirty="0"/>
+              <a:t> </a:t>
+            </a:r>
+            <a:r>
+              <a:rPr dirty="0" err="1"/>
+              <a:t>연구</a:t>
+            </a:r>
+            <a:r>
+              <a:rPr dirty="0"/>
+              <a:t> </a:t>
+            </a:r>
+            <a:r>
+              <a:rPr dirty="0" err="1"/>
+              <a:t>축입니다</a:t>
+            </a:r>
+            <a:r>
+              <a:rPr dirty="0"/>
+              <a:t>(</a:t>
+            </a:r>
+            <a:r>
+              <a:rPr dirty="0" err="1"/>
+              <a:t>국제적으로</a:t>
+            </a:r>
+            <a:r>
+              <a:rPr dirty="0"/>
+              <a:t> Faust </a:t>
+            </a:r>
+            <a:r>
+              <a:rPr dirty="0" err="1"/>
+              <a:t>등의</a:t>
+            </a:r>
+            <a:r>
+              <a:rPr dirty="0"/>
+              <a:t> </a:t>
+            </a:r>
+            <a:r>
+              <a:rPr dirty="0" err="1"/>
+              <a:t>선행</a:t>
+            </a:r>
+            <a:r>
+              <a:rPr dirty="0"/>
+              <a:t> </a:t>
+            </a:r>
+            <a:r>
+              <a:rPr dirty="0" err="1"/>
+              <a:t>연구가</a:t>
+            </a:r>
+            <a:r>
+              <a:rPr dirty="0"/>
+              <a:t> </a:t>
+            </a:r>
+            <a:r>
+              <a:rPr dirty="0" err="1"/>
+              <a:t>있는</a:t>
+            </a:r>
+            <a:r>
+              <a:rPr dirty="0"/>
+              <a:t> </a:t>
+            </a:r>
+            <a:r>
+              <a:rPr dirty="0" err="1"/>
+              <a:t>분야</a:t>
+            </a:r>
+            <a:r>
+              <a:rPr dirty="0"/>
+              <a:t>). </a:t>
+            </a:r>
+            <a:r>
+              <a:rPr dirty="0" err="1"/>
+              <a:t>현행</a:t>
+            </a:r>
+            <a:r>
+              <a:rPr dirty="0"/>
+              <a:t> </a:t>
+            </a:r>
+            <a:r>
+              <a:rPr dirty="0" err="1"/>
+              <a:t>나우캐스트와</a:t>
+            </a:r>
+            <a:r>
+              <a:rPr dirty="0"/>
+              <a:t> </a:t>
+            </a:r>
+            <a:r>
+              <a:rPr dirty="0" err="1"/>
+              <a:t>독립적인</a:t>
+            </a:r>
+            <a:r>
+              <a:rPr dirty="0"/>
+              <a:t> </a:t>
+            </a:r>
+            <a:r>
+              <a:rPr dirty="0" err="1"/>
+              <a:t>신규</a:t>
+            </a:r>
+            <a:r>
+              <a:rPr dirty="0"/>
+              <a:t> </a:t>
+            </a:r>
+            <a:r>
+              <a:rPr dirty="0" err="1"/>
+              <a:t>부가가치</a:t>
+            </a:r>
+            <a:r>
+              <a:rPr dirty="0"/>
+              <a:t> </a:t>
+            </a:r>
+            <a:r>
+              <a:rPr dirty="0" err="1"/>
+              <a:t>축이라</a:t>
+            </a:r>
+            <a:r>
+              <a:rPr dirty="0"/>
+              <a:t> </a:t>
+            </a:r>
+            <a:r>
+              <a:rPr dirty="0" err="1"/>
+              <a:t>타당성</a:t>
+            </a:r>
+            <a:r>
+              <a:rPr dirty="0"/>
+              <a:t> </a:t>
+            </a:r>
+            <a:r>
+              <a:rPr dirty="0" err="1"/>
+              <a:t>검토</a:t>
+            </a:r>
+            <a:r>
+              <a:rPr dirty="0"/>
+              <a:t>(</a:t>
+            </a:r>
+            <a:r>
+              <a:rPr dirty="0" err="1"/>
+              <a:t>약</a:t>
+            </a:r>
+            <a:r>
+              <a:rPr dirty="0"/>
+              <a:t> </a:t>
+            </a:r>
+            <a:r>
+              <a:rPr dirty="0" err="1"/>
+              <a:t>반나절</a:t>
+            </a:r>
+            <a:r>
+              <a:rPr dirty="0"/>
+              <a:t> </a:t>
+            </a:r>
+            <a:r>
+              <a:rPr dirty="0" err="1"/>
+              <a:t>분량의</a:t>
+            </a:r>
+            <a:r>
+              <a:rPr dirty="0"/>
+              <a:t> </a:t>
+            </a:r>
+            <a:r>
+              <a:rPr dirty="0" err="1"/>
+              <a:t>예비</a:t>
+            </a:r>
+            <a:r>
+              <a:rPr dirty="0"/>
+              <a:t> </a:t>
+            </a:r>
+            <a:r>
+              <a:rPr dirty="0" err="1"/>
+              <a:t>분석</a:t>
+            </a:r>
+            <a:r>
+              <a:rPr dirty="0"/>
+              <a:t>) </a:t>
+            </a:r>
+            <a:r>
+              <a:rPr dirty="0" err="1"/>
+              <a:t>착수에</a:t>
+            </a:r>
+            <a:r>
+              <a:rPr dirty="0"/>
+              <a:t> </a:t>
+            </a:r>
+            <a:r>
+              <a:rPr dirty="0" err="1"/>
+              <a:t>대한</a:t>
+            </a:r>
+            <a:r>
+              <a:rPr dirty="0"/>
+              <a:t> </a:t>
+            </a:r>
+            <a:r>
+              <a:rPr dirty="0" err="1"/>
+              <a:t>동의를</a:t>
+            </a:r>
+            <a:r>
+              <a:rPr dirty="0"/>
+              <a:t> </a:t>
+            </a:r>
+            <a:r>
+              <a:rPr dirty="0" err="1"/>
+              <a:t>구합니다</a:t>
+            </a:r>
+            <a:r>
+              <a:rPr dirty="0"/>
+              <a:t>.</a:t>
+            </a:r>
+          </a:p>
+          <a:p>
+            <a:endParaRPr dirty="0"/>
+          </a:p>
+          <a:p>
+            <a:r>
+              <a:rPr dirty="0"/>
+              <a:t>A5. </a:t>
+            </a:r>
+            <a:r>
+              <a:rPr dirty="0" err="1"/>
+              <a:t>데이터</a:t>
+            </a:r>
+            <a:r>
+              <a:rPr dirty="0"/>
+              <a:t> </a:t>
+            </a:r>
+            <a:r>
+              <a:rPr dirty="0" err="1"/>
+              <a:t>협조</a:t>
+            </a:r>
+            <a:r>
+              <a:rPr dirty="0"/>
+              <a:t> (</a:t>
+            </a:r>
+            <a:r>
+              <a:rPr dirty="0" err="1"/>
+              <a:t>실무</a:t>
+            </a:r>
+            <a:r>
+              <a:rPr dirty="0"/>
+              <a:t> </a:t>
+            </a:r>
+            <a:r>
+              <a:rPr dirty="0" err="1"/>
+              <a:t>협조</a:t>
+            </a:r>
+            <a:r>
+              <a:rPr dirty="0"/>
+              <a:t>)</a:t>
+            </a:r>
+          </a:p>
+          <a:p>
+            <a:r>
+              <a:rPr dirty="0" err="1"/>
+              <a:t>관세청이</a:t>
+            </a:r>
+            <a:r>
+              <a:rPr dirty="0"/>
+              <a:t> </a:t>
+            </a:r>
+            <a:r>
+              <a:rPr dirty="0" err="1"/>
+              <a:t>공개하는</a:t>
+            </a:r>
+            <a:r>
+              <a:rPr dirty="0"/>
+              <a:t> 1~10일 </a:t>
+            </a:r>
+            <a:r>
+              <a:rPr dirty="0" err="1"/>
+              <a:t>단위</a:t>
+            </a:r>
+            <a:r>
+              <a:rPr dirty="0"/>
+              <a:t> </a:t>
+            </a:r>
+            <a:r>
+              <a:rPr dirty="0" err="1"/>
+              <a:t>수출</a:t>
+            </a:r>
+            <a:r>
+              <a:rPr dirty="0"/>
+              <a:t> </a:t>
+            </a:r>
+            <a:r>
+              <a:rPr dirty="0" err="1"/>
+              <a:t>통계는</a:t>
+            </a:r>
+            <a:r>
+              <a:rPr dirty="0"/>
+              <a:t> </a:t>
+            </a:r>
+            <a:r>
+              <a:rPr dirty="0" err="1"/>
+              <a:t>무개정·고빈도</a:t>
+            </a:r>
+            <a:r>
+              <a:rPr dirty="0"/>
+              <a:t> </a:t>
+            </a:r>
+            <a:r>
+              <a:rPr dirty="0" err="1"/>
+              <a:t>신호로</a:t>
+            </a:r>
+            <a:r>
+              <a:rPr dirty="0"/>
+              <a:t> </a:t>
+            </a:r>
+            <a:r>
+              <a:rPr dirty="0" err="1"/>
+              <a:t>일별</a:t>
+            </a:r>
+            <a:r>
+              <a:rPr dirty="0"/>
+              <a:t> </a:t>
+            </a:r>
+            <a:r>
+              <a:rPr dirty="0" err="1"/>
+              <a:t>금융지표와</a:t>
+            </a:r>
+            <a:r>
+              <a:rPr dirty="0"/>
+              <a:t> </a:t>
+            </a:r>
+            <a:r>
+              <a:rPr dirty="0" err="1"/>
+              <a:t>같은</a:t>
+            </a:r>
+            <a:r>
+              <a:rPr dirty="0"/>
+              <a:t> </a:t>
+            </a:r>
+            <a:r>
+              <a:rPr dirty="0" err="1"/>
+              <a:t>방식으로</a:t>
+            </a:r>
+            <a:r>
+              <a:rPr dirty="0"/>
+              <a:t> </a:t>
+            </a:r>
+            <a:r>
+              <a:rPr dirty="0" err="1"/>
+              <a:t>활용</a:t>
+            </a:r>
+            <a:r>
+              <a:rPr dirty="0"/>
+              <a:t> </a:t>
+            </a:r>
+            <a:r>
+              <a:rPr dirty="0" err="1"/>
+              <a:t>가능합니다</a:t>
+            </a:r>
+            <a:r>
+              <a:rPr dirty="0"/>
+              <a:t>. API </a:t>
+            </a:r>
+            <a:r>
+              <a:rPr dirty="0" err="1"/>
+              <a:t>키</a:t>
+            </a:r>
+            <a:r>
+              <a:rPr dirty="0"/>
+              <a:t> </a:t>
+            </a:r>
+            <a:r>
+              <a:rPr dirty="0" err="1"/>
+              <a:t>발급</a:t>
+            </a:r>
+            <a:r>
+              <a:rPr dirty="0"/>
+              <a:t> </a:t>
+            </a:r>
+            <a:r>
+              <a:rPr dirty="0" err="1"/>
+              <a:t>등</a:t>
+            </a:r>
+            <a:r>
+              <a:rPr dirty="0"/>
+              <a:t> </a:t>
+            </a:r>
+            <a:r>
+              <a:rPr dirty="0" err="1"/>
+              <a:t>실무</a:t>
+            </a:r>
+            <a:r>
+              <a:rPr dirty="0"/>
+              <a:t> </a:t>
+            </a:r>
+            <a:r>
+              <a:rPr dirty="0" err="1"/>
+              <a:t>협조와</a:t>
+            </a:r>
+            <a:r>
+              <a:rPr dirty="0"/>
+              <a:t>, </a:t>
+            </a:r>
+            <a:r>
+              <a:rPr dirty="0" err="1"/>
+              <a:t>빈티지</a:t>
+            </a:r>
+            <a:r>
+              <a:rPr dirty="0"/>
+              <a:t> </a:t>
+            </a:r>
+            <a:r>
+              <a:rPr dirty="0" err="1"/>
+              <a:t>파일</a:t>
+            </a:r>
+            <a:r>
+              <a:rPr dirty="0"/>
+              <a:t> </a:t>
+            </a:r>
+            <a:r>
+              <a:rPr dirty="0" err="1"/>
+              <a:t>내</a:t>
+            </a:r>
+            <a:r>
+              <a:rPr dirty="0"/>
+              <a:t> </a:t>
+            </a:r>
+            <a:r>
+              <a:rPr dirty="0" err="1"/>
+              <a:t>일부</a:t>
+            </a:r>
+            <a:r>
+              <a:rPr dirty="0"/>
+              <a:t> </a:t>
+            </a:r>
+            <a:r>
+              <a:rPr dirty="0" err="1"/>
+              <a:t>지표의</a:t>
+            </a:r>
+            <a:r>
+              <a:rPr dirty="0"/>
+              <a:t> </a:t>
+            </a:r>
+            <a:r>
+              <a:rPr dirty="0" err="1"/>
+              <a:t>정의</a:t>
+            </a:r>
+            <a:r>
+              <a:rPr dirty="0"/>
+              <a:t> </a:t>
+            </a:r>
+            <a:r>
+              <a:rPr dirty="0" err="1"/>
+              <a:t>확인</a:t>
+            </a:r>
+            <a:r>
+              <a:rPr dirty="0"/>
+              <a:t>(</a:t>
+            </a:r>
+            <a:r>
+              <a:rPr dirty="0" err="1"/>
+              <a:t>컬럼</a:t>
+            </a:r>
+            <a:r>
+              <a:rPr dirty="0"/>
+              <a:t> </a:t>
+            </a:r>
+            <a:r>
+              <a:rPr dirty="0" err="1"/>
+              <a:t>사전</a:t>
+            </a:r>
+            <a:r>
+              <a:rPr dirty="0"/>
+              <a:t>)</a:t>
+            </a:r>
+            <a:r>
+              <a:rPr dirty="0" err="1"/>
+              <a:t>을</a:t>
+            </a:r>
+            <a:r>
+              <a:rPr dirty="0"/>
+              <a:t> </a:t>
+            </a:r>
+            <a:r>
+              <a:rPr dirty="0" err="1"/>
+              <a:t>요청드립니다</a:t>
+            </a:r>
+            <a:r>
+              <a:rPr dirty="0"/>
+              <a:t>.</a:t>
+            </a:r>
+          </a:p>
+          <a:p>
+            <a:endParaRPr dirty="0"/>
+          </a:p>
+          <a:p>
+            <a:r>
+              <a:rPr dirty="0"/>
+              <a:t>[</a:t>
+            </a:r>
+            <a:r>
+              <a:rPr dirty="0" err="1"/>
+              <a:t>회의</a:t>
+            </a:r>
+            <a:r>
+              <a:rPr dirty="0"/>
+              <a:t> </a:t>
+            </a:r>
+            <a:r>
+              <a:rPr dirty="0" err="1"/>
+              <a:t>운영</a:t>
+            </a:r>
+            <a:r>
+              <a:rPr dirty="0"/>
+              <a:t> </a:t>
+            </a:r>
+            <a:r>
+              <a:rPr dirty="0" err="1"/>
+              <a:t>팁</a:t>
+            </a:r>
+            <a:r>
+              <a:rPr dirty="0"/>
+              <a:t>]</a:t>
+            </a:r>
+          </a:p>
+          <a:p>
+            <a:r>
+              <a:rPr dirty="0"/>
+              <a:t>A1이 </a:t>
+            </a:r>
+            <a:r>
+              <a:rPr dirty="0" err="1"/>
+              <a:t>가장</a:t>
+            </a:r>
+            <a:r>
+              <a:rPr dirty="0"/>
+              <a:t> </a:t>
+            </a:r>
+            <a:r>
+              <a:rPr dirty="0" err="1"/>
+              <a:t>결정이</a:t>
+            </a:r>
+            <a:r>
+              <a:rPr dirty="0"/>
+              <a:t> </a:t>
+            </a:r>
+            <a:r>
+              <a:rPr dirty="0" err="1"/>
+              <a:t>쉽고</a:t>
+            </a:r>
+            <a:r>
+              <a:rPr dirty="0"/>
+              <a:t> </a:t>
+            </a:r>
+            <a:r>
+              <a:rPr dirty="0" err="1"/>
+              <a:t>효과가</a:t>
+            </a:r>
+            <a:r>
+              <a:rPr dirty="0"/>
+              <a:t> </a:t>
+            </a:r>
+            <a:r>
+              <a:rPr dirty="0" err="1"/>
+              <a:t>즉시</a:t>
+            </a:r>
+            <a:r>
+              <a:rPr dirty="0"/>
+              <a:t> </a:t>
+            </a:r>
+            <a:r>
+              <a:rPr dirty="0" err="1"/>
+              <a:t>보이는</a:t>
+            </a:r>
+            <a:r>
+              <a:rPr dirty="0"/>
+              <a:t> </a:t>
+            </a:r>
+            <a:r>
+              <a:rPr dirty="0" err="1"/>
+              <a:t>안건이므로</a:t>
+            </a:r>
+            <a:r>
+              <a:rPr dirty="0"/>
+              <a:t> </a:t>
+            </a:r>
+            <a:r>
+              <a:rPr dirty="0" err="1"/>
+              <a:t>먼저</a:t>
+            </a:r>
+            <a:r>
+              <a:rPr dirty="0"/>
+              <a:t> </a:t>
+            </a:r>
+            <a:r>
+              <a:rPr dirty="0" err="1"/>
+              <a:t>다루고</a:t>
+            </a:r>
+            <a:r>
+              <a:rPr dirty="0"/>
+              <a:t>, A2는 '</a:t>
+            </a:r>
+            <a:r>
+              <a:rPr dirty="0" err="1"/>
+              <a:t>병행'이라는</a:t>
+            </a:r>
+            <a:r>
+              <a:rPr dirty="0"/>
+              <a:t> </a:t>
+            </a:r>
+            <a:r>
+              <a:rPr dirty="0" err="1"/>
+              <a:t>수위를</a:t>
+            </a:r>
+            <a:r>
+              <a:rPr dirty="0"/>
+              <a:t> </a:t>
+            </a:r>
+            <a:r>
+              <a:rPr dirty="0" err="1"/>
+              <a:t>분명히</a:t>
+            </a:r>
+            <a:r>
+              <a:rPr dirty="0"/>
+              <a:t> </a:t>
+            </a:r>
+            <a:r>
+              <a:rPr dirty="0" err="1"/>
+              <a:t>하면</a:t>
+            </a:r>
+            <a:r>
+              <a:rPr dirty="0"/>
+              <a:t> </a:t>
+            </a:r>
+            <a:r>
+              <a:rPr dirty="0" err="1"/>
+              <a:t>부담</a:t>
+            </a:r>
+            <a:r>
+              <a:rPr dirty="0"/>
+              <a:t> </a:t>
+            </a:r>
+            <a:r>
+              <a:rPr dirty="0" err="1"/>
+              <a:t>없이</a:t>
+            </a:r>
+            <a:r>
+              <a:rPr dirty="0"/>
+              <a:t> </a:t>
+            </a:r>
+            <a:r>
+              <a:rPr dirty="0" err="1"/>
+              <a:t>논의됩니다</a:t>
+            </a:r>
+            <a:r>
+              <a:rPr dirty="0"/>
+              <a:t>.</a:t>
             </a:r>
           </a:p>
         </p:txBody>
@@ -1438,7 +2938,7 @@
             <a:spLocks noGrp="1"/>
           </p:cNvSpPr>
           <p:nvPr>
-            <p:ph type="sldNum" idx="5" sz="quarter"/>
+            <p:ph type="sldNum" sz="quarter" idx="5"/>
           </p:nvPr>
         </p:nvSpPr>
         <p:spPr/>
@@ -1489,10 +2989,9 @@
           <a:lstStyle/>
           <a:p>
             <a:r>
-              <a:rPr lang="en-US" smtClean="0"/>
+              <a:rPr lang="en-US"/>
               <a:t>Click to edit Master title style</a:t>
             </a:r>
-            <a:endParaRPr lang="en-US"/>
           </a:p>
         </p:txBody>
       </p:sp>
@@ -1608,10 +3107,9 @@
           </a:lstStyle>
           <a:p>
             <a:r>
-              <a:rPr lang="en-US" smtClean="0"/>
+              <a:rPr lang="en-US"/>
               <a:t>Click to edit Master subtitle style</a:t>
             </a:r>
-            <a:endParaRPr lang="en-US"/>
           </a:p>
         </p:txBody>
       </p:sp>
@@ -1632,7 +3130,7 @@
           <a:p>
             <a:fld id="{5BCAD085-E8A6-8845-BD4E-CB4CCA059FC4}" type="datetimeFigureOut">
               <a:rPr lang="en-US" smtClean="0"/>
-              <a:t>1/27/13</a:t>
+              <a:t>7/29/26</a:t>
             </a:fld>
             <a:endParaRPr lang="en-US"/>
           </a:p>
@@ -1726,10 +3224,9 @@
           <a:lstStyle/>
           <a:p>
             <a:r>
-              <a:rPr lang="en-US" smtClean="0"/>
+              <a:rPr lang="en-US"/>
               <a:t>Click to edit Master title style</a:t>
             </a:r>
-            <a:endParaRPr lang="en-US"/>
           </a:p>
         </p:txBody>
       </p:sp>
@@ -1750,38 +3247,37 @@
           <a:p>
             <a:pPr lvl="0"/>
             <a:r>
-              <a:rPr lang="en-US" smtClean="0"/>
+              <a:rPr lang="en-US"/>
               <a:t>Click to edit Master text styles</a:t>
             </a:r>
           </a:p>
           <a:p>
             <a:pPr lvl="1"/>
             <a:r>
-              <a:rPr lang="en-US" smtClean="0"/>
+              <a:rPr lang="en-US"/>
               <a:t>Second level</a:t>
             </a:r>
           </a:p>
           <a:p>
             <a:pPr lvl="2"/>
             <a:r>
-              <a:rPr lang="en-US" smtClean="0"/>
+              <a:rPr lang="en-US"/>
               <a:t>Third level</a:t>
             </a:r>
           </a:p>
           <a:p>
             <a:pPr lvl="3"/>
             <a:r>
-              <a:rPr lang="en-US" smtClean="0"/>
+              <a:rPr lang="en-US"/>
               <a:t>Fourth level</a:t>
             </a:r>
           </a:p>
           <a:p>
             <a:pPr lvl="4"/>
             <a:r>
-              <a:rPr lang="en-US" smtClean="0"/>
+              <a:rPr lang="en-US"/>
               <a:t>Fifth level</a:t>
             </a:r>
-            <a:endParaRPr lang="en-US"/>
           </a:p>
         </p:txBody>
       </p:sp>
@@ -1802,7 +3298,7 @@
           <a:p>
             <a:fld id="{5BCAD085-E8A6-8845-BD4E-CB4CCA059FC4}" type="datetimeFigureOut">
               <a:rPr lang="en-US" smtClean="0"/>
-              <a:t>1/27/13</a:t>
+              <a:t>7/29/26</a:t>
             </a:fld>
             <a:endParaRPr lang="en-US"/>
           </a:p>
@@ -1901,10 +3397,9 @@
           <a:lstStyle/>
           <a:p>
             <a:r>
-              <a:rPr lang="en-US" smtClean="0"/>
+              <a:rPr lang="en-US"/>
               <a:t>Click to edit Master title style</a:t>
             </a:r>
-            <a:endParaRPr lang="en-US"/>
           </a:p>
         </p:txBody>
       </p:sp>
@@ -1930,38 +3425,37 @@
           <a:p>
             <a:pPr lvl="0"/>
             <a:r>
-              <a:rPr lang="en-US" smtClean="0"/>
+              <a:rPr lang="en-US"/>
               <a:t>Click to edit Master text styles</a:t>
             </a:r>
           </a:p>
           <a:p>
             <a:pPr lvl="1"/>
             <a:r>
-              <a:rPr lang="en-US" smtClean="0"/>
+              <a:rPr lang="en-US"/>
               <a:t>Second level</a:t>
             </a:r>
           </a:p>
           <a:p>
             <a:pPr lvl="2"/>
             <a:r>
-              <a:rPr lang="en-US" smtClean="0"/>
+              <a:rPr lang="en-US"/>
               <a:t>Third level</a:t>
             </a:r>
           </a:p>
           <a:p>
             <a:pPr lvl="3"/>
             <a:r>
-              <a:rPr lang="en-US" smtClean="0"/>
+              <a:rPr lang="en-US"/>
               <a:t>Fourth level</a:t>
             </a:r>
           </a:p>
           <a:p>
             <a:pPr lvl="4"/>
             <a:r>
-              <a:rPr lang="en-US" smtClean="0"/>
+              <a:rPr lang="en-US"/>
               <a:t>Fifth level</a:t>
             </a:r>
-            <a:endParaRPr lang="en-US"/>
           </a:p>
         </p:txBody>
       </p:sp>
@@ -1982,7 +3476,7 @@
           <a:p>
             <a:fld id="{5BCAD085-E8A6-8845-BD4E-CB4CCA059FC4}" type="datetimeFigureOut">
               <a:rPr lang="en-US" smtClean="0"/>
-              <a:t>1/27/13</a:t>
+              <a:t>7/29/26</a:t>
             </a:fld>
             <a:endParaRPr lang="en-US"/>
           </a:p>
@@ -2076,10 +3570,9 @@
           <a:lstStyle/>
           <a:p>
             <a:r>
-              <a:rPr lang="en-US" smtClean="0"/>
+              <a:rPr lang="en-US"/>
               <a:t>Click to edit Master title style</a:t>
             </a:r>
-            <a:endParaRPr lang="en-US"/>
           </a:p>
         </p:txBody>
       </p:sp>
@@ -2100,38 +3593,37 @@
           <a:p>
             <a:pPr lvl="0"/>
             <a:r>
-              <a:rPr lang="en-US" smtClean="0"/>
+              <a:rPr lang="en-US"/>
               <a:t>Click to edit Master text styles</a:t>
             </a:r>
           </a:p>
           <a:p>
             <a:pPr lvl="1"/>
             <a:r>
-              <a:rPr lang="en-US" smtClean="0"/>
+              <a:rPr lang="en-US"/>
               <a:t>Second level</a:t>
             </a:r>
           </a:p>
           <a:p>
             <a:pPr lvl="2"/>
             <a:r>
-              <a:rPr lang="en-US" smtClean="0"/>
+              <a:rPr lang="en-US"/>
               <a:t>Third level</a:t>
             </a:r>
           </a:p>
           <a:p>
             <a:pPr lvl="3"/>
             <a:r>
-              <a:rPr lang="en-US" smtClean="0"/>
+              <a:rPr lang="en-US"/>
               <a:t>Fourth level</a:t>
             </a:r>
           </a:p>
           <a:p>
             <a:pPr lvl="4"/>
             <a:r>
-              <a:rPr lang="en-US" smtClean="0"/>
+              <a:rPr lang="en-US"/>
               <a:t>Fifth level</a:t>
             </a:r>
-            <a:endParaRPr lang="en-US"/>
           </a:p>
         </p:txBody>
       </p:sp>
@@ -2152,7 +3644,7 @@
           <a:p>
             <a:fld id="{5BCAD085-E8A6-8845-BD4E-CB4CCA059FC4}" type="datetimeFigureOut">
               <a:rPr lang="en-US" smtClean="0"/>
-              <a:t>1/27/13</a:t>
+              <a:t>7/29/26</a:t>
             </a:fld>
             <a:endParaRPr lang="en-US"/>
           </a:p>
@@ -2255,10 +3747,9 @@
           </a:lstStyle>
           <a:p>
             <a:r>
-              <a:rPr lang="en-US" smtClean="0"/>
+              <a:rPr lang="en-US"/>
               <a:t>Click to edit Master title style</a:t>
             </a:r>
-            <a:endParaRPr lang="en-US"/>
           </a:p>
         </p:txBody>
       </p:sp>
@@ -2375,7 +3866,7 @@
           <a:p>
             <a:pPr lvl="0"/>
             <a:r>
-              <a:rPr lang="en-US" smtClean="0"/>
+              <a:rPr lang="en-US"/>
               <a:t>Click to edit Master text styles</a:t>
             </a:r>
           </a:p>
@@ -2398,7 +3889,7 @@
           <a:p>
             <a:fld id="{5BCAD085-E8A6-8845-BD4E-CB4CCA059FC4}" type="datetimeFigureOut">
               <a:rPr lang="en-US" smtClean="0"/>
-              <a:t>1/27/13</a:t>
+              <a:t>7/29/26</a:t>
             </a:fld>
             <a:endParaRPr lang="en-US"/>
           </a:p>
@@ -2492,10 +3983,9 @@
           <a:lstStyle/>
           <a:p>
             <a:r>
-              <a:rPr lang="en-US" smtClean="0"/>
+              <a:rPr lang="en-US"/>
               <a:t>Click to edit Master title style</a:t>
             </a:r>
-            <a:endParaRPr lang="en-US"/>
           </a:p>
         </p:txBody>
       </p:sp>
@@ -2549,38 +4039,37 @@
           <a:p>
             <a:pPr lvl="0"/>
             <a:r>
-              <a:rPr lang="en-US" smtClean="0"/>
+              <a:rPr lang="en-US"/>
               <a:t>Click to edit Master text styles</a:t>
             </a:r>
           </a:p>
           <a:p>
             <a:pPr lvl="1"/>
             <a:r>
-              <a:rPr lang="en-US" smtClean="0"/>
+              <a:rPr lang="en-US"/>
               <a:t>Second level</a:t>
             </a:r>
           </a:p>
           <a:p>
             <a:pPr lvl="2"/>
             <a:r>
-              <a:rPr lang="en-US" smtClean="0"/>
+              <a:rPr lang="en-US"/>
               <a:t>Third level</a:t>
             </a:r>
           </a:p>
           <a:p>
             <a:pPr lvl="3"/>
             <a:r>
-              <a:rPr lang="en-US" smtClean="0"/>
+              <a:rPr lang="en-US"/>
               <a:t>Fourth level</a:t>
             </a:r>
           </a:p>
           <a:p>
             <a:pPr lvl="4"/>
             <a:r>
-              <a:rPr lang="en-US" smtClean="0"/>
+              <a:rPr lang="en-US"/>
               <a:t>Fifth level</a:t>
             </a:r>
-            <a:endParaRPr lang="en-US"/>
           </a:p>
         </p:txBody>
       </p:sp>
@@ -2634,38 +4123,37 @@
           <a:p>
             <a:pPr lvl="0"/>
             <a:r>
-              <a:rPr lang="en-US" smtClean="0"/>
+              <a:rPr lang="en-US"/>
               <a:t>Click to edit Master text styles</a:t>
             </a:r>
           </a:p>
           <a:p>
             <a:pPr lvl="1"/>
             <a:r>
-              <a:rPr lang="en-US" smtClean="0"/>
+              <a:rPr lang="en-US"/>
               <a:t>Second level</a:t>
             </a:r>
           </a:p>
           <a:p>
             <a:pPr lvl="2"/>
             <a:r>
-              <a:rPr lang="en-US" smtClean="0"/>
+              <a:rPr lang="en-US"/>
               <a:t>Third level</a:t>
             </a:r>
           </a:p>
           <a:p>
             <a:pPr lvl="3"/>
             <a:r>
-              <a:rPr lang="en-US" smtClean="0"/>
+              <a:rPr lang="en-US"/>
               <a:t>Fourth level</a:t>
             </a:r>
           </a:p>
           <a:p>
             <a:pPr lvl="4"/>
             <a:r>
-              <a:rPr lang="en-US" smtClean="0"/>
+              <a:rPr lang="en-US"/>
               <a:t>Fifth level</a:t>
             </a:r>
-            <a:endParaRPr lang="en-US"/>
           </a:p>
         </p:txBody>
       </p:sp>
@@ -2686,7 +4174,7 @@
           <a:p>
             <a:fld id="{5BCAD085-E8A6-8845-BD4E-CB4CCA059FC4}" type="datetimeFigureOut">
               <a:rPr lang="en-US" smtClean="0"/>
-              <a:t>1/27/13</a:t>
+              <a:t>7/29/26</a:t>
             </a:fld>
             <a:endParaRPr lang="en-US"/>
           </a:p>
@@ -2784,10 +4272,9 @@
           </a:lstStyle>
           <a:p>
             <a:r>
-              <a:rPr lang="en-US" smtClean="0"/>
+              <a:rPr lang="en-US"/>
               <a:t>Click to edit Master title style</a:t>
             </a:r>
-            <a:endParaRPr lang="en-US"/>
           </a:p>
         </p:txBody>
       </p:sp>
@@ -2850,7 +4337,7 @@
           <a:p>
             <a:pPr lvl="0"/>
             <a:r>
-              <a:rPr lang="en-US" smtClean="0"/>
+              <a:rPr lang="en-US"/>
               <a:t>Click to edit Master text styles</a:t>
             </a:r>
           </a:p>
@@ -2906,38 +4393,37 @@
           <a:p>
             <a:pPr lvl="0"/>
             <a:r>
-              <a:rPr lang="en-US" smtClean="0"/>
+              <a:rPr lang="en-US"/>
               <a:t>Click to edit Master text styles</a:t>
             </a:r>
           </a:p>
           <a:p>
             <a:pPr lvl="1"/>
             <a:r>
-              <a:rPr lang="en-US" smtClean="0"/>
+              <a:rPr lang="en-US"/>
               <a:t>Second level</a:t>
             </a:r>
           </a:p>
           <a:p>
             <a:pPr lvl="2"/>
             <a:r>
-              <a:rPr lang="en-US" smtClean="0"/>
+              <a:rPr lang="en-US"/>
               <a:t>Third level</a:t>
             </a:r>
           </a:p>
           <a:p>
             <a:pPr lvl="3"/>
             <a:r>
-              <a:rPr lang="en-US" smtClean="0"/>
+              <a:rPr lang="en-US"/>
               <a:t>Fourth level</a:t>
             </a:r>
           </a:p>
           <a:p>
             <a:pPr lvl="4"/>
             <a:r>
-              <a:rPr lang="en-US" smtClean="0"/>
+              <a:rPr lang="en-US"/>
               <a:t>Fifth level</a:t>
             </a:r>
-            <a:endParaRPr lang="en-US"/>
           </a:p>
         </p:txBody>
       </p:sp>
@@ -3000,7 +4486,7 @@
           <a:p>
             <a:pPr lvl="0"/>
             <a:r>
-              <a:rPr lang="en-US" smtClean="0"/>
+              <a:rPr lang="en-US"/>
               <a:t>Click to edit Master text styles</a:t>
             </a:r>
           </a:p>
@@ -3056,38 +4542,37 @@
           <a:p>
             <a:pPr lvl="0"/>
             <a:r>
-              <a:rPr lang="en-US" smtClean="0"/>
+              <a:rPr lang="en-US"/>
               <a:t>Click to edit Master text styles</a:t>
             </a:r>
           </a:p>
           <a:p>
             <a:pPr lvl="1"/>
             <a:r>
-              <a:rPr lang="en-US" smtClean="0"/>
+              <a:rPr lang="en-US"/>
               <a:t>Second level</a:t>
             </a:r>
           </a:p>
           <a:p>
             <a:pPr lvl="2"/>
             <a:r>
-              <a:rPr lang="en-US" smtClean="0"/>
+              <a:rPr lang="en-US"/>
               <a:t>Third level</a:t>
             </a:r>
           </a:p>
           <a:p>
             <a:pPr lvl="3"/>
             <a:r>
-              <a:rPr lang="en-US" smtClean="0"/>
+              <a:rPr lang="en-US"/>
               <a:t>Fourth level</a:t>
             </a:r>
           </a:p>
           <a:p>
             <a:pPr lvl="4"/>
             <a:r>
-              <a:rPr lang="en-US" smtClean="0"/>
+              <a:rPr lang="en-US"/>
               <a:t>Fifth level</a:t>
             </a:r>
-            <a:endParaRPr lang="en-US"/>
           </a:p>
         </p:txBody>
       </p:sp>
@@ -3108,7 +4593,7 @@
           <a:p>
             <a:fld id="{5BCAD085-E8A6-8845-BD4E-CB4CCA059FC4}" type="datetimeFigureOut">
               <a:rPr lang="en-US" smtClean="0"/>
-              <a:t>1/27/13</a:t>
+              <a:t>7/29/26</a:t>
             </a:fld>
             <a:endParaRPr lang="en-US"/>
           </a:p>
@@ -3202,10 +4687,9 @@
           <a:lstStyle/>
           <a:p>
             <a:r>
-              <a:rPr lang="en-US" smtClean="0"/>
+              <a:rPr lang="en-US"/>
               <a:t>Click to edit Master title style</a:t>
             </a:r>
-            <a:endParaRPr lang="en-US"/>
           </a:p>
         </p:txBody>
       </p:sp>
@@ -3226,7 +4710,7 @@
           <a:p>
             <a:fld id="{5BCAD085-E8A6-8845-BD4E-CB4CCA059FC4}" type="datetimeFigureOut">
               <a:rPr lang="en-US" smtClean="0"/>
-              <a:t>1/27/13</a:t>
+              <a:t>7/29/26</a:t>
             </a:fld>
             <a:endParaRPr lang="en-US"/>
           </a:p>
@@ -3321,7 +4805,7 @@
           <a:p>
             <a:fld id="{5BCAD085-E8A6-8845-BD4E-CB4CCA059FC4}" type="datetimeFigureOut">
               <a:rPr lang="en-US" smtClean="0"/>
-              <a:t>1/27/13</a:t>
+              <a:t>7/29/26</a:t>
             </a:fld>
             <a:endParaRPr lang="en-US"/>
           </a:p>
@@ -3424,10 +4908,9 @@
           </a:lstStyle>
           <a:p>
             <a:r>
-              <a:rPr lang="en-US" smtClean="0"/>
+              <a:rPr lang="en-US"/>
               <a:t>Click to edit Master title style</a:t>
             </a:r>
-            <a:endParaRPr lang="en-US"/>
           </a:p>
         </p:txBody>
       </p:sp>
@@ -3481,38 +4964,37 @@
           <a:p>
             <a:pPr lvl="0"/>
             <a:r>
-              <a:rPr lang="en-US" smtClean="0"/>
+              <a:rPr lang="en-US"/>
               <a:t>Click to edit Master text styles</a:t>
             </a:r>
           </a:p>
           <a:p>
             <a:pPr lvl="1"/>
             <a:r>
-              <a:rPr lang="en-US" smtClean="0"/>
+              <a:rPr lang="en-US"/>
               <a:t>Second level</a:t>
             </a:r>
           </a:p>
           <a:p>
             <a:pPr lvl="2"/>
             <a:r>
-              <a:rPr lang="en-US" smtClean="0"/>
+              <a:rPr lang="en-US"/>
               <a:t>Third level</a:t>
             </a:r>
           </a:p>
           <a:p>
             <a:pPr lvl="3"/>
             <a:r>
-              <a:rPr lang="en-US" smtClean="0"/>
+              <a:rPr lang="en-US"/>
               <a:t>Fourth level</a:t>
             </a:r>
           </a:p>
           <a:p>
             <a:pPr lvl="4"/>
             <a:r>
-              <a:rPr lang="en-US" smtClean="0"/>
+              <a:rPr lang="en-US"/>
               <a:t>Fifth level</a:t>
             </a:r>
-            <a:endParaRPr lang="en-US"/>
           </a:p>
         </p:txBody>
       </p:sp>
@@ -3575,7 +5057,7 @@
           <a:p>
             <a:pPr lvl="0"/>
             <a:r>
-              <a:rPr lang="en-US" smtClean="0"/>
+              <a:rPr lang="en-US"/>
               <a:t>Click to edit Master text styles</a:t>
             </a:r>
           </a:p>
@@ -3598,7 +5080,7 @@
           <a:p>
             <a:fld id="{5BCAD085-E8A6-8845-BD4E-CB4CCA059FC4}" type="datetimeFigureOut">
               <a:rPr lang="en-US" smtClean="0"/>
-              <a:t>1/27/13</a:t>
+              <a:t>7/29/26</a:t>
             </a:fld>
             <a:endParaRPr lang="en-US"/>
           </a:p>
@@ -3701,10 +5183,9 @@
           </a:lstStyle>
           <a:p>
             <a:r>
-              <a:rPr lang="en-US" smtClean="0"/>
+              <a:rPr lang="en-US"/>
               <a:t>Click to edit Master title style</a:t>
             </a:r>
-            <a:endParaRPr lang="en-US"/>
           </a:p>
         </p:txBody>
       </p:sp>
@@ -3828,7 +5309,7 @@
           <a:p>
             <a:pPr lvl="0"/>
             <a:r>
-              <a:rPr lang="en-US" smtClean="0"/>
+              <a:rPr lang="en-US"/>
               <a:t>Click to edit Master text styles</a:t>
             </a:r>
           </a:p>
@@ -3851,7 +5332,7 @@
           <a:p>
             <a:fld id="{5BCAD085-E8A6-8845-BD4E-CB4CCA059FC4}" type="datetimeFigureOut">
               <a:rPr lang="en-US" smtClean="0"/>
-              <a:t>1/27/13</a:t>
+              <a:t>7/29/26</a:t>
             </a:fld>
             <a:endParaRPr lang="en-US"/>
           </a:p>
@@ -3960,10 +5441,9 @@
           <a:lstStyle/>
           <a:p>
             <a:r>
-              <a:rPr lang="en-US" smtClean="0"/>
+              <a:rPr lang="en-US"/>
               <a:t>Click to edit Master title style</a:t>
             </a:r>
-            <a:endParaRPr lang="en-US"/>
           </a:p>
         </p:txBody>
       </p:sp>
@@ -3994,38 +5474,37 @@
           <a:p>
             <a:pPr lvl="0"/>
             <a:r>
-              <a:rPr lang="en-US" smtClean="0"/>
+              <a:rPr lang="en-US"/>
               <a:t>Click to edit Master text styles</a:t>
             </a:r>
           </a:p>
           <a:p>
             <a:pPr lvl="1"/>
             <a:r>
-              <a:rPr lang="en-US" smtClean="0"/>
+              <a:rPr lang="en-US"/>
               <a:t>Second level</a:t>
             </a:r>
           </a:p>
           <a:p>
             <a:pPr lvl="2"/>
             <a:r>
-              <a:rPr lang="en-US" smtClean="0"/>
+              <a:rPr lang="en-US"/>
               <a:t>Third level</a:t>
             </a:r>
           </a:p>
           <a:p>
             <a:pPr lvl="3"/>
             <a:r>
-              <a:rPr lang="en-US" smtClean="0"/>
+              <a:rPr lang="en-US"/>
               <a:t>Fourth level</a:t>
             </a:r>
           </a:p>
           <a:p>
             <a:pPr lvl="4"/>
             <a:r>
-              <a:rPr lang="en-US" smtClean="0"/>
+              <a:rPr lang="en-US"/>
               <a:t>Fifth level</a:t>
             </a:r>
-            <a:endParaRPr lang="en-US"/>
           </a:p>
         </p:txBody>
       </p:sp>
@@ -4064,7 +5543,7 @@
           <a:p>
             <a:fld id="{5BCAD085-E8A6-8845-BD4E-CB4CCA059FC4}" type="datetimeFigureOut">
               <a:rPr lang="en-US" smtClean="0"/>
-              <a:t>1/27/13</a:t>
+              <a:t>7/29/26</a:t>
             </a:fld>
             <a:endParaRPr lang="en-US"/>
           </a:p>
@@ -4423,7 +5902,7 @@
 </file>
 
 <file path=ppt/slides/slide1.xml><?xml version="1.0" encoding="utf-8"?>
-<p:sld xmlns:a="http://schemas.openxmlformats.org/drawingml/2006/main" xmlns:p="http://schemas.openxmlformats.org/presentationml/2006/main" xmlns:r="http://schemas.openxmlformats.org/officeDocument/2006/relationships">
+<p:sld xmlns:a="http://schemas.openxmlformats.org/drawingml/2006/main" xmlns:r="http://schemas.openxmlformats.org/officeDocument/2006/relationships" xmlns:p="http://schemas.openxmlformats.org/presentationml/2006/main">
   <p:cSld>
     <p:spTree>
       <p:nvGrpSpPr>
@@ -4431,7 +5910,14 @@
         <p:cNvGrpSpPr/>
         <p:nvPr/>
       </p:nvGrpSpPr>
-      <p:grpSpPr/>
+      <p:grpSpPr>
+        <a:xfrm>
+          <a:off x="0" y="0"/>
+          <a:ext cx="0" cy="0"/>
+          <a:chOff x="0" y="0"/>
+          <a:chExt cx="0" cy="0"/>
+        </a:xfrm>
+      </p:grpSpPr>
       <p:sp>
         <p:nvSpPr>
           <p:cNvPr id="2" name="TextBox 1"/>
@@ -4441,7 +5927,7 @@
         <p:spPr>
           <a:xfrm>
             <a:off x="731520" y="2286000"/>
-            <a:ext cx="10698480" cy="822960"/>
+            <a:ext cx="10698480" cy="560153"/>
           </a:xfrm>
           <a:prstGeom prst="rect">
             <a:avLst/>
@@ -4449,7 +5935,7 @@
           <a:noFill/>
         </p:spPr>
         <p:txBody>
-          <a:bodyPr wrap="square" anchor="t" lIns="45720" rIns="45720" tIns="18288" bIns="18288">
+          <a:bodyPr wrap="square" lIns="45720" tIns="18288" rIns="45720" bIns="18288" anchor="t">
             <a:spAutoFit/>
           </a:bodyPr>
           <a:lstStyle/>
@@ -4464,8 +5950,8 @@
                 <a:solidFill>
                   <a:srgbClr val="243447"/>
                 </a:solidFill>
-                <a:latin typeface="Apple SD Gothic Neo"/>
-                <a:ea typeface="Apple SD Gothic Neo"/>
+                <a:latin typeface="NanumSquare Neo Regular" pitchFamily="2" charset="-127"/>
+                <a:ea typeface="NanumSquare Neo Regular" pitchFamily="2" charset="-127"/>
               </a:rPr>
               <a:t>GDP Nowcasting 고도화 협업</a:t>
             </a:r>
@@ -4481,7 +5967,7 @@
         <p:spPr>
           <a:xfrm>
             <a:off x="731520" y="3063240"/>
-            <a:ext cx="10698480" cy="548640"/>
+            <a:ext cx="10698480" cy="375487"/>
           </a:xfrm>
           <a:prstGeom prst="rect">
             <a:avLst/>
@@ -4489,7 +5975,7 @@
           <a:noFill/>
         </p:spPr>
         <p:txBody>
-          <a:bodyPr wrap="square" anchor="t" lIns="45720" rIns="45720" tIns="18288" bIns="18288">
+          <a:bodyPr wrap="square" lIns="45720" tIns="18288" rIns="45720" bIns="18288" anchor="t">
             <a:spAutoFit/>
           </a:bodyPr>
           <a:lstStyle/>
@@ -4504,8 +5990,8 @@
                 <a:solidFill>
                   <a:srgbClr val="243447"/>
                 </a:solidFill>
-                <a:latin typeface="Apple SD Gothic Neo"/>
-                <a:ea typeface="Apple SD Gothic Neo"/>
+                <a:latin typeface="NanumSquare Neo Regular" pitchFamily="2" charset="-127"/>
+                <a:ea typeface="NanumSquare Neo Regular" pitchFamily="2" charset="-127"/>
               </a:rPr>
               <a:t>경과 보고 및 논의 안건</a:t>
             </a:r>
@@ -4556,7 +6042,7 @@
         <p:spPr>
           <a:xfrm>
             <a:off x="731520" y="4069080"/>
-            <a:ext cx="10698480" cy="457200"/>
+            <a:ext cx="10698480" cy="236988"/>
           </a:xfrm>
           <a:prstGeom prst="rect">
             <a:avLst/>
@@ -4564,7 +6050,7 @@
           <a:noFill/>
         </p:spPr>
         <p:txBody>
-          <a:bodyPr wrap="square" anchor="t" lIns="45720" rIns="45720" tIns="18288" bIns="18288">
+          <a:bodyPr wrap="square" lIns="45720" tIns="18288" rIns="45720" bIns="18288" anchor="t">
             <a:spAutoFit/>
           </a:bodyPr>
           <a:lstStyle/>
@@ -4579,8 +6065,8 @@
                 <a:solidFill>
                   <a:srgbClr val="6B6B6B"/>
                 </a:solidFill>
-                <a:latin typeface="Apple SD Gothic Neo"/>
-                <a:ea typeface="Apple SD Gothic Neo"/>
+                <a:latin typeface="NanumSquare Neo Regular" pitchFamily="2" charset="-127"/>
+                <a:ea typeface="NanumSquare Neo Regular" pitchFamily="2" charset="-127"/>
               </a:rPr>
               <a:t>네이버클라우드 AX Lab  |  2026. 7.</a:t>
             </a:r>
@@ -4596,7 +6082,7 @@
         <p:spPr>
           <a:xfrm>
             <a:off x="731520" y="4572000"/>
-            <a:ext cx="10698480" cy="457200"/>
+            <a:ext cx="10698480" cy="206210"/>
           </a:xfrm>
           <a:prstGeom prst="rect">
             <a:avLst/>
@@ -4604,7 +6090,7 @@
           <a:noFill/>
         </p:spPr>
         <p:txBody>
-          <a:bodyPr wrap="square" anchor="t" lIns="45720" rIns="45720" tIns="18288" bIns="18288">
+          <a:bodyPr wrap="square" lIns="45720" tIns="18288" rIns="45720" bIns="18288" anchor="t">
             <a:spAutoFit/>
           </a:bodyPr>
           <a:lstStyle/>
@@ -4619,8 +6105,8 @@
                 <a:solidFill>
                   <a:srgbClr val="6B6B6B"/>
                 </a:solidFill>
-                <a:latin typeface="Apple SD Gothic Neo"/>
-                <a:ea typeface="Apple SD Gothic Neo"/>
+                <a:latin typeface="NanumSquare Neo Regular" pitchFamily="2" charset="-127"/>
+                <a:ea typeface="NanumSquare Neo Regular" pitchFamily="2" charset="-127"/>
               </a:rPr>
               <a:t>구성: 검증 체계 · 경과 총괄 · 검증 결과 · 부가가치 제안 · 논의 안건</a:t>
             </a:r>
@@ -4636,7 +6122,7 @@
 </file>
 
 <file path=ppt/slides/slide2.xml><?xml version="1.0" encoding="utf-8"?>
-<p:sld xmlns:a="http://schemas.openxmlformats.org/drawingml/2006/main" xmlns:p="http://schemas.openxmlformats.org/presentationml/2006/main" xmlns:r="http://schemas.openxmlformats.org/officeDocument/2006/relationships">
+<p:sld xmlns:a="http://schemas.openxmlformats.org/drawingml/2006/main" xmlns:r="http://schemas.openxmlformats.org/officeDocument/2006/relationships" xmlns:p="http://schemas.openxmlformats.org/presentationml/2006/main">
   <p:cSld>
     <p:spTree>
       <p:nvGrpSpPr>
@@ -4644,7 +6130,14 @@
         <p:cNvGrpSpPr/>
         <p:nvPr/>
       </p:nvGrpSpPr>
-      <p:grpSpPr/>
+      <p:grpSpPr>
+        <a:xfrm>
+          <a:off x="0" y="0"/>
+          <a:ext cx="0" cy="0"/>
+          <a:chOff x="0" y="0"/>
+          <a:chExt cx="0" cy="0"/>
+        </a:xfrm>
+      </p:grpSpPr>
       <p:sp>
         <p:nvSpPr>
           <p:cNvPr id="2" name="TextBox 1"/>
@@ -4654,7 +6147,7 @@
         <p:spPr>
           <a:xfrm>
             <a:off x="502920" y="274320"/>
-            <a:ext cx="11155680" cy="502920"/>
+            <a:ext cx="11155680" cy="329321"/>
           </a:xfrm>
           <a:prstGeom prst="rect">
             <a:avLst/>
@@ -4662,7 +6155,7 @@
           <a:noFill/>
         </p:spPr>
         <p:txBody>
-          <a:bodyPr wrap="square" anchor="t" lIns="45720" rIns="45720" tIns="18288" bIns="18288">
+          <a:bodyPr wrap="square" lIns="45720" tIns="18288" rIns="45720" bIns="18288" anchor="t">
             <a:spAutoFit/>
           </a:bodyPr>
           <a:lstStyle/>
@@ -4677,8 +6170,8 @@
                 <a:solidFill>
                   <a:srgbClr val="008A3E"/>
                 </a:solidFill>
-                <a:latin typeface="Apple SD Gothic Neo"/>
-                <a:ea typeface="Apple SD Gothic Neo"/>
+                <a:latin typeface="NanumSquare Neo Regular" pitchFamily="2" charset="-127"/>
+                <a:ea typeface="NanumSquare Neo Regular" pitchFamily="2" charset="-127"/>
               </a:rPr>
               <a:t>01  </a:t>
             </a:r>
@@ -4687,8 +6180,8 @@
                 <a:solidFill>
                   <a:srgbClr val="243447"/>
                 </a:solidFill>
-                <a:latin typeface="Apple SD Gothic Neo"/>
-                <a:ea typeface="Apple SD Gothic Neo"/>
+                <a:latin typeface="NanumSquare Neo Regular" pitchFamily="2" charset="-127"/>
+                <a:ea typeface="NanumSquare Neo Regular" pitchFamily="2" charset="-127"/>
               </a:rPr>
               <a:t>검증 체계 — 모든 실험에 동일하게 적용한 채점 규칙</a:t>
             </a:r>
@@ -4739,7 +6232,7 @@
         <p:spPr>
           <a:xfrm>
             <a:off x="502920" y="1143000"/>
-            <a:ext cx="5303520" cy="4206240"/>
+            <a:ext cx="5303520" cy="2835135"/>
           </a:xfrm>
           <a:prstGeom prst="rect">
             <a:avLst/>
@@ -4747,7 +6240,7 @@
           <a:noFill/>
         </p:spPr>
         <p:txBody>
-          <a:bodyPr wrap="square" anchor="t" lIns="45720" rIns="45720" tIns="18288" bIns="18288">
+          <a:bodyPr wrap="square" lIns="45720" tIns="18288" rIns="45720" bIns="18288" anchor="t">
             <a:spAutoFit/>
           </a:bodyPr>
           <a:lstStyle/>
@@ -4762,8 +6255,8 @@
                 <a:solidFill>
                   <a:srgbClr val="243447"/>
                 </a:solidFill>
-                <a:latin typeface="Apple SD Gothic Neo"/>
-                <a:ea typeface="Apple SD Gothic Neo"/>
+                <a:latin typeface="NanumSquare Neo Regular" pitchFamily="2" charset="-127"/>
+                <a:ea typeface="NanumSquare Neo Regular" pitchFamily="2" charset="-127"/>
               </a:rPr>
               <a:t>① 실시간 빈티지 재현</a:t>
             </a:r>
@@ -4779,8 +6272,8 @@
                 <a:solidFill>
                   <a:srgbClr val="262626"/>
                 </a:solidFill>
-                <a:latin typeface="Apple SD Gothic Neo"/>
-                <a:ea typeface="Apple SD Gothic Neo"/>
+                <a:latin typeface="NanumSquare Neo Regular" pitchFamily="2" charset="-127"/>
+                <a:ea typeface="NanumSquare Neo Regular" pitchFamily="2" charset="-127"/>
               </a:rPr>
               <a:t>각 예측 시점에 '그때 실제로 존재했던' 데이터만 사용.</a:t>
             </a:r>
@@ -4796,8 +6289,8 @@
                 <a:solidFill>
                   <a:srgbClr val="6B6B6B"/>
                 </a:solidFill>
-                <a:latin typeface="Apple SD Gothic Neo"/>
-                <a:ea typeface="Apple SD Gothic Neo"/>
+                <a:latin typeface="NanumSquare Neo Regular" pitchFamily="2" charset="-127"/>
+                <a:ea typeface="NanumSquare Neo Regular" pitchFamily="2" charset="-127"/>
               </a:rPr>
               <a:t>사후 개정된 데이터 사용 시 성능이 과대평가되는 문제를 차단.</a:t>
             </a:r>
@@ -4808,16 +6301,13 @@
                 <a:spcPts val="200"/>
               </a:spcAft>
             </a:pPr>
-            <a:r>
-              <a:rPr sz="400" b="0">
-                <a:solidFill>
-                  <a:srgbClr val="262626"/>
-                </a:solidFill>
-                <a:latin typeface="Apple SD Gothic Neo"/>
-                <a:ea typeface="Apple SD Gothic Neo"/>
-              </a:rPr>
-              <a:t/>
-            </a:r>
+            <a:endParaRPr sz="950" b="0">
+              <a:solidFill>
+                <a:srgbClr val="6B6B6B"/>
+              </a:solidFill>
+              <a:latin typeface="NanumSquare Neo Regular" pitchFamily="2" charset="-127"/>
+              <a:ea typeface="NanumSquare Neo Regular" pitchFamily="2" charset="-127"/>
+            </a:endParaRPr>
           </a:p>
           <a:p>
             <a:pPr algn="l">
@@ -4830,8 +6320,8 @@
                 <a:solidFill>
                   <a:srgbClr val="243447"/>
                 </a:solidFill>
-                <a:latin typeface="Apple SD Gothic Neo"/>
-                <a:ea typeface="Apple SD Gothic Neo"/>
+                <a:latin typeface="NanumSquare Neo Regular" pitchFamily="2" charset="-127"/>
+                <a:ea typeface="NanumSquare Neo Regular" pitchFamily="2" charset="-127"/>
               </a:rPr>
               <a:t>② 정답 = 속보치</a:t>
             </a:r>
@@ -4847,8 +6337,8 @@
                 <a:solidFill>
                   <a:srgbClr val="262626"/>
                 </a:solidFill>
-                <a:latin typeface="Apple SD Gothic Neo"/>
-                <a:ea typeface="Apple SD Gothic Neo"/>
+                <a:latin typeface="NanumSquare Neo Regular" pitchFamily="2" charset="-127"/>
+                <a:ea typeface="NanumSquare Neo Regular" pitchFamily="2" charset="-127"/>
               </a:rPr>
               <a:t>분기 종료 후 최초 발표되는 속보(advance) GDP를 채점 기준으로 사용.</a:t>
             </a:r>
@@ -4864,8 +6354,8 @@
                 <a:solidFill>
                   <a:srgbClr val="6B6B6B"/>
                 </a:solidFill>
-                <a:latin typeface="Apple SD Gothic Neo"/>
-                <a:ea typeface="Apple SD Gothic Neo"/>
+                <a:latin typeface="NanumSquare Neo Regular" pitchFamily="2" charset="-127"/>
+                <a:ea typeface="NanumSquare Neo Regular" pitchFamily="2" charset="-127"/>
               </a:rPr>
               <a:t>실무에서 맞혀야 하는 값이 속보치이기 때문.</a:t>
             </a:r>
@@ -4876,16 +6366,13 @@
                 <a:spcPts val="200"/>
               </a:spcAft>
             </a:pPr>
-            <a:r>
-              <a:rPr sz="400" b="0">
-                <a:solidFill>
-                  <a:srgbClr val="262626"/>
-                </a:solidFill>
-                <a:latin typeface="Apple SD Gothic Neo"/>
-                <a:ea typeface="Apple SD Gothic Neo"/>
-              </a:rPr>
-              <a:t/>
-            </a:r>
+            <a:endParaRPr sz="950" b="0">
+              <a:solidFill>
+                <a:srgbClr val="6B6B6B"/>
+              </a:solidFill>
+              <a:latin typeface="NanumSquare Neo Regular" pitchFamily="2" charset="-127"/>
+              <a:ea typeface="NanumSquare Neo Regular" pitchFamily="2" charset="-127"/>
+            </a:endParaRPr>
           </a:p>
           <a:p>
             <a:pPr algn="l">
@@ -4898,8 +6385,8 @@
                 <a:solidFill>
                   <a:srgbClr val="243447"/>
                 </a:solidFill>
-                <a:latin typeface="Apple SD Gothic Neo"/>
-                <a:ea typeface="Apple SD Gothic Neo"/>
+                <a:latin typeface="NanumSquare Neo Regular" pitchFamily="2" charset="-127"/>
+                <a:ea typeface="NanumSquare Neo Regular" pitchFamily="2" charset="-127"/>
               </a:rPr>
               <a:t>③ 주 단위 반복 예측 — 19회</a:t>
             </a:r>
@@ -4915,8 +6402,8 @@
                 <a:solidFill>
                   <a:srgbClr val="262626"/>
                 </a:solidFill>
-                <a:latin typeface="Apple SD Gothic Neo"/>
-                <a:ea typeface="Apple SD Gothic Neo"/>
+                <a:latin typeface="NanumSquare Neo Regular" pitchFamily="2" charset="-127"/>
+                <a:ea typeface="NanumSquare Neo Regular" pitchFamily="2" charset="-127"/>
               </a:rPr>
               <a:t>분기 시작 2주 전부터 속보 발표 직전까지 매주 예측을 갱신.</a:t>
             </a:r>
@@ -4932,8 +6419,8 @@
                 <a:solidFill>
                   <a:srgbClr val="6B6B6B"/>
                 </a:solidFill>
-                <a:latin typeface="Apple SD Gothic Neo"/>
-                <a:ea typeface="Apple SD Gothic Neo"/>
+                <a:latin typeface="NanumSquare Neo Regular" pitchFamily="2" charset="-127"/>
+                <a:ea typeface="NanumSquare Neo Regular" pitchFamily="2" charset="-127"/>
               </a:rPr>
               <a:t>19개 주차 오차를 모두 채점 — 조기 예측력까지 평가.</a:t>
             </a:r>
@@ -4944,16 +6431,13 @@
                 <a:spcPts val="200"/>
               </a:spcAft>
             </a:pPr>
-            <a:r>
-              <a:rPr sz="400" b="0">
-                <a:solidFill>
-                  <a:srgbClr val="262626"/>
-                </a:solidFill>
-                <a:latin typeface="Apple SD Gothic Neo"/>
-                <a:ea typeface="Apple SD Gothic Neo"/>
-              </a:rPr>
-              <a:t/>
-            </a:r>
+            <a:endParaRPr sz="950" b="0">
+              <a:solidFill>
+                <a:srgbClr val="6B6B6B"/>
+              </a:solidFill>
+              <a:latin typeface="NanumSquare Neo Regular" pitchFamily="2" charset="-127"/>
+              <a:ea typeface="NanumSquare Neo Regular" pitchFamily="2" charset="-127"/>
+            </a:endParaRPr>
           </a:p>
           <a:p>
             <a:pPr algn="l">
@@ -4966,8 +6450,8 @@
                 <a:solidFill>
                   <a:srgbClr val="243447"/>
                 </a:solidFill>
-                <a:latin typeface="Apple SD Gothic Neo"/>
-                <a:ea typeface="Apple SD Gothic Neo"/>
+                <a:latin typeface="NanumSquare Neo Regular" pitchFamily="2" charset="-127"/>
+                <a:ea typeface="NanumSquare Neo Regular" pitchFamily="2" charset="-127"/>
               </a:rPr>
               <a:t>④ 지표 = RMSE, 표본 = 32개 분기</a:t>
             </a:r>
@@ -4983,8 +6467,8 @@
                 <a:solidFill>
                   <a:srgbClr val="262626"/>
                 </a:solidFill>
-                <a:latin typeface="Apple SD Gothic Neo"/>
-                <a:ea typeface="Apple SD Gothic Neo"/>
+                <a:latin typeface="NanumSquare Neo Regular" pitchFamily="2" charset="-127"/>
+                <a:ea typeface="NanumSquare Neo Regular" pitchFamily="2" charset="-127"/>
               </a:rPr>
               <a:t>2018Q1~2025Q4, 큰 오차에 벌점이 큰 평균제곱근오차.</a:t>
             </a:r>
@@ -5000,8 +6484,8 @@
                 <a:solidFill>
                   <a:srgbClr val="6B6B6B"/>
                 </a:solidFill>
-                <a:latin typeface="Apple SD Gothic Neo"/>
-                <a:ea typeface="Apple SD Gothic Neo"/>
+                <a:latin typeface="NanumSquare Neo Regular" pitchFamily="2" charset="-127"/>
+                <a:ea typeface="NanumSquare Neo Regular" pitchFamily="2" charset="-127"/>
               </a:rPr>
               <a:t>코로나 급변기(2020)를 포함한 전 기간 채점.</a:t>
             </a:r>
@@ -5017,7 +6501,7 @@
         <p:spPr>
           <a:xfrm>
             <a:off x="6309360" y="1234440"/>
-            <a:ext cx="5303520" cy="365760"/>
+            <a:ext cx="5303520" cy="221599"/>
           </a:xfrm>
           <a:prstGeom prst="rect">
             <a:avLst/>
@@ -5025,7 +6509,7 @@
           <a:noFill/>
         </p:spPr>
         <p:txBody>
-          <a:bodyPr wrap="square" anchor="t" lIns="45720" rIns="45720" tIns="18288" bIns="18288">
+          <a:bodyPr wrap="square" lIns="45720" tIns="18288" rIns="45720" bIns="18288" anchor="t">
             <a:spAutoFit/>
           </a:bodyPr>
           <a:lstStyle/>
@@ -5040,8 +6524,8 @@
                 <a:solidFill>
                   <a:srgbClr val="243447"/>
                 </a:solidFill>
-                <a:latin typeface="Apple SD Gothic Neo"/>
-                <a:ea typeface="Apple SD Gothic Neo"/>
+                <a:latin typeface="NanumSquare Neo Regular" pitchFamily="2" charset="-127"/>
+                <a:ea typeface="NanumSquare Neo Regular" pitchFamily="2" charset="-127"/>
               </a:rPr>
               <a:t>한 분기의 예측 일정 (19주 창)</a:t>
             </a:r>
@@ -5089,6 +6573,10 @@
           <a:lstStyle/>
           <a:p>
             <a:pPr algn="ctr"/>
+            <a:endParaRPr>
+              <a:latin typeface="NanumSquare Neo Regular" pitchFamily="2" charset="-127"/>
+              <a:ea typeface="NanumSquare Neo Regular" pitchFamily="2" charset="-127"/>
+            </a:endParaRPr>
           </a:p>
         </p:txBody>
       </p:sp>
@@ -5101,7 +6589,7 @@
         <p:spPr>
           <a:xfrm>
             <a:off x="6309360" y="2450592"/>
-            <a:ext cx="1005840" cy="502920"/>
+            <a:ext cx="1005840" cy="339580"/>
           </a:xfrm>
           <a:prstGeom prst="rect">
             <a:avLst/>
@@ -5109,7 +6597,7 @@
           <a:noFill/>
         </p:spPr>
         <p:txBody>
-          <a:bodyPr wrap="square" anchor="t" lIns="45720" rIns="45720" tIns="18288" bIns="18288">
+          <a:bodyPr wrap="square" lIns="45720" tIns="18288" rIns="45720" bIns="18288" anchor="t">
             <a:spAutoFit/>
           </a:bodyPr>
           <a:lstStyle/>
@@ -5124,8 +6612,8 @@
                 <a:solidFill>
                   <a:srgbClr val="262626"/>
                 </a:solidFill>
-                <a:latin typeface="Apple SD Gothic Neo"/>
-                <a:ea typeface="Apple SD Gothic Neo"/>
+                <a:latin typeface="NanumSquare Neo Regular" pitchFamily="2" charset="-127"/>
+                <a:ea typeface="NanumSquare Neo Regular" pitchFamily="2" charset="-127"/>
               </a:rPr>
               <a:t>분기 시작 전
 2주</a:t>
@@ -5174,6 +6662,10 @@
           <a:lstStyle/>
           <a:p>
             <a:pPr algn="ctr"/>
+            <a:endParaRPr>
+              <a:latin typeface="NanumSquare Neo Regular" pitchFamily="2" charset="-127"/>
+              <a:ea typeface="NanumSquare Neo Regular" pitchFamily="2" charset="-127"/>
+            </a:endParaRPr>
           </a:p>
         </p:txBody>
       </p:sp>
@@ -5186,7 +6678,7 @@
         <p:spPr>
           <a:xfrm>
             <a:off x="7342632" y="2450592"/>
-            <a:ext cx="2926080" cy="502920"/>
+            <a:ext cx="2926080" cy="339580"/>
           </a:xfrm>
           <a:prstGeom prst="rect">
             <a:avLst/>
@@ -5194,7 +6686,7 @@
           <a:noFill/>
         </p:spPr>
         <p:txBody>
-          <a:bodyPr wrap="square" anchor="t" lIns="45720" rIns="45720" tIns="18288" bIns="18288">
+          <a:bodyPr wrap="square" lIns="45720" tIns="18288" rIns="45720" bIns="18288" anchor="t">
             <a:spAutoFit/>
           </a:bodyPr>
           <a:lstStyle/>
@@ -5209,8 +6701,8 @@
                 <a:solidFill>
                   <a:srgbClr val="262626"/>
                 </a:solidFill>
-                <a:latin typeface="Apple SD Gothic Neo"/>
-                <a:ea typeface="Apple SD Gothic Neo"/>
+                <a:latin typeface="NanumSquare Neo Regular" pitchFamily="2" charset="-127"/>
+                <a:ea typeface="NanumSquare Neo Regular" pitchFamily="2" charset="-127"/>
               </a:rPr>
               <a:t>대상 분기 진행
 13주</a:t>
@@ -5259,6 +6751,10 @@
           <a:lstStyle/>
           <a:p>
             <a:pPr algn="ctr"/>
+            <a:endParaRPr>
+              <a:latin typeface="NanumSquare Neo Regular" pitchFamily="2" charset="-127"/>
+              <a:ea typeface="NanumSquare Neo Regular" pitchFamily="2" charset="-127"/>
+            </a:endParaRPr>
           </a:p>
         </p:txBody>
       </p:sp>
@@ -5271,7 +6767,7 @@
         <p:spPr>
           <a:xfrm>
             <a:off x="10296144" y="2450592"/>
-            <a:ext cx="1234440" cy="502920"/>
+            <a:ext cx="1234440" cy="339580"/>
           </a:xfrm>
           <a:prstGeom prst="rect">
             <a:avLst/>
@@ -5279,7 +6775,7 @@
           <a:noFill/>
         </p:spPr>
         <p:txBody>
-          <a:bodyPr wrap="square" anchor="t" lIns="45720" rIns="45720" tIns="18288" bIns="18288">
+          <a:bodyPr wrap="square" lIns="45720" tIns="18288" rIns="45720" bIns="18288" anchor="t">
             <a:spAutoFit/>
           </a:bodyPr>
           <a:lstStyle/>
@@ -5294,8 +6790,8 @@
                 <a:solidFill>
                   <a:srgbClr val="262626"/>
                 </a:solidFill>
-                <a:latin typeface="Apple SD Gothic Neo"/>
-                <a:ea typeface="Apple SD Gothic Neo"/>
+                <a:latin typeface="NanumSquare Neo Regular" pitchFamily="2" charset="-127"/>
+                <a:ea typeface="NanumSquare Neo Regular" pitchFamily="2" charset="-127"/>
               </a:rPr>
               <a:t>발표 대기
 4주</a:t>
@@ -5344,6 +6840,10 @@
           <a:lstStyle/>
           <a:p>
             <a:pPr algn="ctr"/>
+            <a:endParaRPr>
+              <a:latin typeface="NanumSquare Neo Regular" pitchFamily="2" charset="-127"/>
+              <a:ea typeface="NanumSquare Neo Regular" pitchFamily="2" charset="-127"/>
+            </a:endParaRPr>
           </a:p>
         </p:txBody>
       </p:sp>
@@ -5356,7 +6856,7 @@
         <p:spPr>
           <a:xfrm>
             <a:off x="11100816" y="3017520"/>
-            <a:ext cx="1097280" cy="274320"/>
+            <a:ext cx="1097280" cy="183127"/>
           </a:xfrm>
           <a:prstGeom prst="rect">
             <a:avLst/>
@@ -5364,7 +6864,7 @@
           <a:noFill/>
         </p:spPr>
         <p:txBody>
-          <a:bodyPr wrap="square" anchor="t" lIns="45720" rIns="45720" tIns="18288" bIns="18288">
+          <a:bodyPr wrap="square" lIns="45720" tIns="18288" rIns="45720" bIns="18288" anchor="t">
             <a:spAutoFit/>
           </a:bodyPr>
           <a:lstStyle/>
@@ -5379,8 +6879,8 @@
                 <a:solidFill>
                   <a:srgbClr val="B0532F"/>
                 </a:solidFill>
-                <a:latin typeface="Apple SD Gothic Neo"/>
-                <a:ea typeface="Apple SD Gothic Neo"/>
+                <a:latin typeface="NanumSquare Neo Regular" pitchFamily="2" charset="-127"/>
+                <a:ea typeface="NanumSquare Neo Regular" pitchFamily="2" charset="-127"/>
               </a:rPr>
               <a:t>속보 발표</a:t>
             </a:r>
@@ -5396,7 +6896,7 @@
         <p:spPr>
           <a:xfrm>
             <a:off x="6309360" y="3429000"/>
-            <a:ext cx="5303520" cy="731520"/>
+            <a:ext cx="5303520" cy="362663"/>
           </a:xfrm>
           <a:prstGeom prst="rect">
             <a:avLst/>
@@ -5404,7 +6904,7 @@
           <a:noFill/>
         </p:spPr>
         <p:txBody>
-          <a:bodyPr wrap="square" anchor="t" lIns="45720" rIns="45720" tIns="18288" bIns="18288">
+          <a:bodyPr wrap="square" lIns="45720" tIns="18288" rIns="45720" bIns="18288" anchor="t">
             <a:spAutoFit/>
           </a:bodyPr>
           <a:lstStyle/>
@@ -5419,8 +6919,8 @@
                 <a:solidFill>
                   <a:srgbClr val="262626"/>
                 </a:solidFill>
-                <a:latin typeface="Apple SD Gothic Neo"/>
-                <a:ea typeface="Apple SD Gothic Neo"/>
+                <a:latin typeface="NanumSquare Neo Regular" pitchFamily="2" charset="-127"/>
+                <a:ea typeface="NanumSquare Neo Regular" pitchFamily="2" charset="-127"/>
               </a:rPr>
               <a:t>· 매주 1회, 분기당 총 19회 예측 → 19개 오차의 평균으로 채점</a:t>
             </a:r>
@@ -5436,8 +6936,8 @@
                 <a:solidFill>
                   <a:srgbClr val="6B6B6B"/>
                 </a:solidFill>
-                <a:latin typeface="Apple SD Gothic Neo"/>
-                <a:ea typeface="Apple SD Gothic Neo"/>
+                <a:latin typeface="NanumSquare Neo Regular" pitchFamily="2" charset="-127"/>
+                <a:ea typeface="NanumSquare Neo Regular" pitchFamily="2" charset="-127"/>
               </a:rPr>
               <a:t>· 초반(정보 부족)일수록 어렵고, 발표 직전일수록 쉬움</a:t>
             </a:r>
@@ -5487,6 +6987,10 @@
           <a:lstStyle/>
           <a:p>
             <a:pPr algn="ctr"/>
+            <a:endParaRPr>
+              <a:latin typeface="NanumSquare Neo Regular" pitchFamily="2" charset="-127"/>
+              <a:ea typeface="NanumSquare Neo Regular" pitchFamily="2" charset="-127"/>
+            </a:endParaRPr>
           </a:p>
         </p:txBody>
       </p:sp>
@@ -5499,7 +7003,7 @@
         <p:spPr>
           <a:xfrm>
             <a:off x="6510528" y="4343400"/>
-            <a:ext cx="4937760" cy="1005840"/>
+            <a:ext cx="4937760" cy="598625"/>
           </a:xfrm>
           <a:prstGeom prst="rect">
             <a:avLst/>
@@ -5507,7 +7011,7 @@
           <a:noFill/>
         </p:spPr>
         <p:txBody>
-          <a:bodyPr wrap="square" anchor="t" lIns="45720" rIns="45720" tIns="18288" bIns="18288">
+          <a:bodyPr wrap="square" lIns="45720" tIns="18288" rIns="45720" bIns="18288" anchor="t">
             <a:spAutoFit/>
           </a:bodyPr>
           <a:lstStyle/>
@@ -5522,8 +7026,8 @@
                 <a:solidFill>
                   <a:srgbClr val="243447"/>
                 </a:solidFill>
-                <a:latin typeface="Apple SD Gothic Neo"/>
-                <a:ea typeface="Apple SD Gothic Neo"/>
+                <a:latin typeface="NanumSquare Neo Regular" pitchFamily="2" charset="-127"/>
+                <a:ea typeface="NanumSquare Neo Regular" pitchFamily="2" charset="-127"/>
               </a:rPr>
               <a:t>현행 시스템 기준선 (동일 규약 채점)</a:t>
             </a:r>
@@ -5539,8 +7043,8 @@
                 <a:solidFill>
                   <a:srgbClr val="262626"/>
                 </a:solidFill>
-                <a:latin typeface="Apple SD Gothic Neo"/>
-                <a:ea typeface="Apple SD Gothic Neo"/>
+                <a:latin typeface="NanumSquare Neo Regular" pitchFamily="2" charset="-127"/>
+                <a:ea typeface="NanumSquare Neo Regular" pitchFamily="2" charset="-127"/>
               </a:rPr>
               <a:t>DFM 단독 0.865  ·  DFM+XGBoost 결합 0.765</a:t>
             </a:r>
@@ -5556,8 +7060,8 @@
                 <a:solidFill>
                   <a:srgbClr val="6B6B6B"/>
                 </a:solidFill>
-                <a:latin typeface="Apple SD Gothic Neo"/>
-                <a:ea typeface="Apple SD Gothic Neo"/>
+                <a:latin typeface="NanumSquare Neo Regular" pitchFamily="2" charset="-127"/>
+                <a:ea typeface="NanumSquare Neo Regular" pitchFamily="2" charset="-127"/>
               </a:rPr>
               <a:t>이하 모든 실험은 이 기준선과의 비교로 평가</a:t>
             </a:r>
@@ -5607,6 +7111,10 @@
           <a:lstStyle/>
           <a:p>
             <a:pPr algn="ctr"/>
+            <a:endParaRPr>
+              <a:latin typeface="NanumSquare Neo Regular" pitchFamily="2" charset="-127"/>
+              <a:ea typeface="NanumSquare Neo Regular" pitchFamily="2" charset="-127"/>
+            </a:endParaRPr>
           </a:p>
         </p:txBody>
       </p:sp>
@@ -5618,8 +7126,8 @@
         </p:nvSpPr>
         <p:spPr>
           <a:xfrm>
-            <a:off x="685800" y="6364224"/>
-            <a:ext cx="10881360" cy="256032"/>
+            <a:off x="685800" y="6406062"/>
+            <a:ext cx="10881360" cy="172355"/>
           </a:xfrm>
           <a:prstGeom prst="rect">
             <a:avLst/>
@@ -5627,7 +7135,7 @@
           <a:noFill/>
         </p:spPr>
         <p:txBody>
-          <a:bodyPr wrap="square" anchor="ctr" lIns="45720" rIns="45720" tIns="18288" bIns="18288">
+          <a:bodyPr wrap="square" lIns="45720" tIns="18288" rIns="45720" bIns="18288" anchor="ctr">
             <a:spAutoFit/>
           </a:bodyPr>
           <a:lstStyle/>
@@ -5642,8 +7150,8 @@
                 <a:solidFill>
                   <a:srgbClr val="6B6B6B"/>
                 </a:solidFill>
-                <a:latin typeface="Apple SD Gothic Neo"/>
-                <a:ea typeface="Apple SD Gothic Neo"/>
+                <a:latin typeface="NanumSquare Neo Regular" pitchFamily="2" charset="-127"/>
+                <a:ea typeface="NanumSquare Neo Regular" pitchFamily="2" charset="-127"/>
               </a:rPr>
               <a:t>공통 검증 규약: 한은 제공 실시간 빈티지 · 속보치 기준 · 전망주차 w[-19,-1] 평균 RMSE · 2018Q1~2025Q4 (32개 분기)</a:t>
             </a:r>
@@ -5659,7 +7167,7 @@
 </file>
 
 <file path=ppt/slides/slide3.xml><?xml version="1.0" encoding="utf-8"?>
-<p:sld xmlns:a="http://schemas.openxmlformats.org/drawingml/2006/main" xmlns:p="http://schemas.openxmlformats.org/presentationml/2006/main" xmlns:r="http://schemas.openxmlformats.org/officeDocument/2006/relationships">
+<p:sld xmlns:a="http://schemas.openxmlformats.org/drawingml/2006/main" xmlns:r="http://schemas.openxmlformats.org/officeDocument/2006/relationships" xmlns:p="http://schemas.openxmlformats.org/presentationml/2006/main">
   <p:cSld>
     <p:spTree>
       <p:nvGrpSpPr>
@@ -5667,7 +7175,14 @@
         <p:cNvGrpSpPr/>
         <p:nvPr/>
       </p:nvGrpSpPr>
-      <p:grpSpPr/>
+      <p:grpSpPr>
+        <a:xfrm>
+          <a:off x="0" y="0"/>
+          <a:ext cx="0" cy="0"/>
+          <a:chOff x="0" y="0"/>
+          <a:chExt cx="0" cy="0"/>
+        </a:xfrm>
+      </p:grpSpPr>
       <p:sp>
         <p:nvSpPr>
           <p:cNvPr id="2" name="TextBox 1"/>
@@ -5677,7 +7192,7 @@
         <p:spPr>
           <a:xfrm>
             <a:off x="502920" y="274320"/>
-            <a:ext cx="11155680" cy="502920"/>
+            <a:ext cx="11155680" cy="329321"/>
           </a:xfrm>
           <a:prstGeom prst="rect">
             <a:avLst/>
@@ -5685,7 +7200,7 @@
           <a:noFill/>
         </p:spPr>
         <p:txBody>
-          <a:bodyPr wrap="square" anchor="t" lIns="45720" rIns="45720" tIns="18288" bIns="18288">
+          <a:bodyPr wrap="square" lIns="45720" tIns="18288" rIns="45720" bIns="18288" anchor="t">
             <a:spAutoFit/>
           </a:bodyPr>
           <a:lstStyle/>
@@ -5700,8 +7215,8 @@
                 <a:solidFill>
                   <a:srgbClr val="008A3E"/>
                 </a:solidFill>
-                <a:latin typeface="Apple SD Gothic Neo"/>
-                <a:ea typeface="Apple SD Gothic Neo"/>
+                <a:latin typeface="NanumSquare Neo Regular" pitchFamily="2" charset="-127"/>
+                <a:ea typeface="NanumSquare Neo Regular" pitchFamily="2" charset="-127"/>
               </a:rPr>
               <a:t>02  </a:t>
             </a:r>
@@ -5710,8 +7225,8 @@
                 <a:solidFill>
                   <a:srgbClr val="243447"/>
                 </a:solidFill>
-                <a:latin typeface="Apple SD Gothic Neo"/>
-                <a:ea typeface="Apple SD Gothic Neo"/>
+                <a:latin typeface="NanumSquare Neo Regular" pitchFamily="2" charset="-127"/>
+                <a:ea typeface="NanumSquare Neo Regular" pitchFamily="2" charset="-127"/>
               </a:rPr>
               <a:t>경과 총괄 — 4개 트랙의 진행과 결론</a:t>
             </a:r>
@@ -5796,6 +7311,10 @@
           <a:lstStyle/>
           <a:p>
             <a:pPr algn="ctr"/>
+            <a:endParaRPr>
+              <a:latin typeface="NanumSquare Neo Regular" pitchFamily="2" charset="-127"/>
+              <a:ea typeface="NanumSquare Neo Regular" pitchFamily="2" charset="-127"/>
+            </a:endParaRPr>
           </a:p>
         </p:txBody>
       </p:sp>
@@ -5808,7 +7327,7 @@
         <p:spPr>
           <a:xfrm>
             <a:off x="731520" y="1316736"/>
-            <a:ext cx="640080" cy="365760"/>
+            <a:ext cx="640080" cy="236988"/>
           </a:xfrm>
           <a:prstGeom prst="rect">
             <a:avLst/>
@@ -5816,7 +7335,7 @@
           <a:noFill/>
         </p:spPr>
         <p:txBody>
-          <a:bodyPr wrap="square" anchor="t" lIns="45720" rIns="45720" tIns="18288" bIns="18288">
+          <a:bodyPr wrap="square" lIns="45720" tIns="18288" rIns="45720" bIns="18288" anchor="t">
             <a:spAutoFit/>
           </a:bodyPr>
           <a:lstStyle/>
@@ -5831,8 +7350,8 @@
                 <a:solidFill>
                   <a:srgbClr val="243447"/>
                 </a:solidFill>
-                <a:latin typeface="Apple SD Gothic Neo"/>
-                <a:ea typeface="Apple SD Gothic Neo"/>
+                <a:latin typeface="NanumSquare Neo Regular" pitchFamily="2" charset="-127"/>
+                <a:ea typeface="NanumSquare Neo Regular" pitchFamily="2" charset="-127"/>
               </a:rPr>
               <a:t>T1</a:t>
             </a:r>
@@ -5848,7 +7367,7 @@
         <p:spPr>
           <a:xfrm>
             <a:off x="1371600" y="1316736"/>
-            <a:ext cx="6949440" cy="365760"/>
+            <a:ext cx="6949440" cy="229294"/>
           </a:xfrm>
           <a:prstGeom prst="rect">
             <a:avLst/>
@@ -5856,7 +7375,7 @@
           <a:noFill/>
         </p:spPr>
         <p:txBody>
-          <a:bodyPr wrap="square" anchor="t" lIns="45720" rIns="45720" tIns="18288" bIns="18288">
+          <a:bodyPr wrap="square" lIns="45720" tIns="18288" rIns="45720" bIns="18288" anchor="t">
             <a:spAutoFit/>
           </a:bodyPr>
           <a:lstStyle/>
@@ -5871,8 +7390,8 @@
                 <a:solidFill>
                   <a:srgbClr val="243447"/>
                 </a:solidFill>
-                <a:latin typeface="Apple SD Gothic Neo"/>
-                <a:ea typeface="Apple SD Gothic Neo"/>
+                <a:latin typeface="NanumSquare Neo Regular" pitchFamily="2" charset="-127"/>
+                <a:ea typeface="NanumSquare Neo Regular" pitchFamily="2" charset="-127"/>
               </a:rPr>
               <a:t>기준선 구축 · 현행 시스템 재현</a:t>
             </a:r>
@@ -5922,6 +7441,10 @@
           <a:lstStyle/>
           <a:p>
             <a:pPr algn="ctr"/>
+            <a:endParaRPr>
+              <a:latin typeface="NanumSquare Neo Regular" pitchFamily="2" charset="-127"/>
+              <a:ea typeface="NanumSquare Neo Regular" pitchFamily="2" charset="-127"/>
+            </a:endParaRPr>
           </a:p>
         </p:txBody>
       </p:sp>
@@ -5934,7 +7457,7 @@
         <p:spPr>
           <a:xfrm>
             <a:off x="10104120" y="1371600"/>
-            <a:ext cx="1325880" cy="274320"/>
+            <a:ext cx="1325880" cy="190821"/>
           </a:xfrm>
           <a:prstGeom prst="rect">
             <a:avLst/>
@@ -5942,7 +7465,7 @@
           <a:noFill/>
         </p:spPr>
         <p:txBody>
-          <a:bodyPr wrap="square" anchor="t" lIns="45720" rIns="45720" tIns="18288" bIns="18288">
+          <a:bodyPr wrap="square" lIns="45720" tIns="18288" rIns="45720" bIns="18288" anchor="t">
             <a:spAutoFit/>
           </a:bodyPr>
           <a:lstStyle/>
@@ -5957,8 +7480,8 @@
                 <a:solidFill>
                   <a:srgbClr val="008A3E"/>
                 </a:solidFill>
-                <a:latin typeface="Apple SD Gothic Neo"/>
-                <a:ea typeface="Apple SD Gothic Neo"/>
+                <a:latin typeface="NanumSquare Neo Regular" pitchFamily="2" charset="-127"/>
+                <a:ea typeface="NanumSquare Neo Regular" pitchFamily="2" charset="-127"/>
               </a:rPr>
               <a:t>완료</a:t>
             </a:r>
@@ -5974,7 +7497,7 @@
         <p:spPr>
           <a:xfrm>
             <a:off x="1371600" y="1700784"/>
-            <a:ext cx="9966960" cy="548640"/>
+            <a:ext cx="9966960" cy="190821"/>
           </a:xfrm>
           <a:prstGeom prst="rect">
             <a:avLst/>
@@ -5982,7 +7505,7 @@
           <a:noFill/>
         </p:spPr>
         <p:txBody>
-          <a:bodyPr wrap="square" anchor="t" lIns="45720" rIns="45720" tIns="18288" bIns="18288">
+          <a:bodyPr wrap="square" lIns="45720" tIns="18288" rIns="45720" bIns="18288" anchor="t">
             <a:spAutoFit/>
           </a:bodyPr>
           <a:lstStyle/>
@@ -5997,8 +7520,8 @@
                 <a:solidFill>
                   <a:srgbClr val="262626"/>
                 </a:solidFill>
-                <a:latin typeface="Apple SD Gothic Neo"/>
-                <a:ea typeface="Apple SD Gothic Neo"/>
+                <a:latin typeface="NanumSquare Neo Regular" pitchFamily="2" charset="-127"/>
+                <a:ea typeface="NanumSquare Neo Regular" pitchFamily="2" charset="-127"/>
               </a:rPr>
               <a:t>실시간 빈티지 그리드 구축, 현행 DFM·XGBoost를 동일 규약으로 채점 (0.865 / 0.765). 이후 모든 비교의 기준.</a:t>
             </a:r>
@@ -6048,6 +7571,10 @@
           <a:lstStyle/>
           <a:p>
             <a:pPr algn="ctr"/>
+            <a:endParaRPr>
+              <a:latin typeface="NanumSquare Neo Regular" pitchFamily="2" charset="-127"/>
+              <a:ea typeface="NanumSquare Neo Regular" pitchFamily="2" charset="-127"/>
+            </a:endParaRPr>
           </a:p>
         </p:txBody>
       </p:sp>
@@ -6060,7 +7587,7 @@
         <p:spPr>
           <a:xfrm>
             <a:off x="731520" y="2560320"/>
-            <a:ext cx="640080" cy="365760"/>
+            <a:ext cx="640080" cy="236988"/>
           </a:xfrm>
           <a:prstGeom prst="rect">
             <a:avLst/>
@@ -6068,7 +7595,7 @@
           <a:noFill/>
         </p:spPr>
         <p:txBody>
-          <a:bodyPr wrap="square" anchor="t" lIns="45720" rIns="45720" tIns="18288" bIns="18288">
+          <a:bodyPr wrap="square" lIns="45720" tIns="18288" rIns="45720" bIns="18288" anchor="t">
             <a:spAutoFit/>
           </a:bodyPr>
           <a:lstStyle/>
@@ -6083,8 +7610,8 @@
                 <a:solidFill>
                   <a:srgbClr val="243447"/>
                 </a:solidFill>
-                <a:latin typeface="Apple SD Gothic Neo"/>
-                <a:ea typeface="Apple SD Gothic Neo"/>
+                <a:latin typeface="NanumSquare Neo Regular" pitchFamily="2" charset="-127"/>
+                <a:ea typeface="NanumSquare Neo Regular" pitchFamily="2" charset="-127"/>
               </a:rPr>
               <a:t>T2</a:t>
             </a:r>
@@ -6100,7 +7627,7 @@
         <p:spPr>
           <a:xfrm>
             <a:off x="1371600" y="2560320"/>
-            <a:ext cx="6949440" cy="365760"/>
+            <a:ext cx="6949440" cy="229294"/>
           </a:xfrm>
           <a:prstGeom prst="rect">
             <a:avLst/>
@@ -6108,7 +7635,7 @@
           <a:noFill/>
         </p:spPr>
         <p:txBody>
-          <a:bodyPr wrap="square" anchor="t" lIns="45720" rIns="45720" tIns="18288" bIns="18288">
+          <a:bodyPr wrap="square" lIns="45720" tIns="18288" rIns="45720" bIns="18288" anchor="t">
             <a:spAutoFit/>
           </a:bodyPr>
           <a:lstStyle/>
@@ -6123,8 +7650,8 @@
                 <a:solidFill>
                   <a:srgbClr val="243447"/>
                 </a:solidFill>
-                <a:latin typeface="Apple SD Gothic Neo"/>
-                <a:ea typeface="Apple SD Gothic Neo"/>
+                <a:latin typeface="NanumSquare Neo Regular" pitchFamily="2" charset="-127"/>
+                <a:ea typeface="NanumSquare Neo Regular" pitchFamily="2" charset="-127"/>
               </a:rPr>
               <a:t>국면 조건부 결합 연구 (v1→v3)</a:t>
             </a:r>
@@ -6174,6 +7701,10 @@
           <a:lstStyle/>
           <a:p>
             <a:pPr algn="ctr"/>
+            <a:endParaRPr>
+              <a:latin typeface="NanumSquare Neo Regular" pitchFamily="2" charset="-127"/>
+              <a:ea typeface="NanumSquare Neo Regular" pitchFamily="2" charset="-127"/>
+            </a:endParaRPr>
           </a:p>
         </p:txBody>
       </p:sp>
@@ -6186,7 +7717,7 @@
         <p:spPr>
           <a:xfrm>
             <a:off x="10104120" y="2615184"/>
-            <a:ext cx="1325880" cy="274320"/>
+            <a:ext cx="1325880" cy="190821"/>
           </a:xfrm>
           <a:prstGeom prst="rect">
             <a:avLst/>
@@ -6194,7 +7725,7 @@
           <a:noFill/>
         </p:spPr>
         <p:txBody>
-          <a:bodyPr wrap="square" anchor="t" lIns="45720" rIns="45720" tIns="18288" bIns="18288">
+          <a:bodyPr wrap="square" lIns="45720" tIns="18288" rIns="45720" bIns="18288" anchor="t">
             <a:spAutoFit/>
           </a:bodyPr>
           <a:lstStyle/>
@@ -6209,8 +7740,8 @@
                 <a:solidFill>
                   <a:srgbClr val="6B6B6B"/>
                 </a:solidFill>
-                <a:latin typeface="Apple SD Gothic Neo"/>
-                <a:ea typeface="Apple SD Gothic Neo"/>
+                <a:latin typeface="NanumSquare Neo Regular" pitchFamily="2" charset="-127"/>
+                <a:ea typeface="NanumSquare Neo Regular" pitchFamily="2" charset="-127"/>
               </a:rPr>
               <a:t>연구 보류</a:t>
             </a:r>
@@ -6226,7 +7757,7 @@
         <p:spPr>
           <a:xfrm>
             <a:off x="1371600" y="2944368"/>
-            <a:ext cx="9966960" cy="548640"/>
+            <a:ext cx="9966960" cy="190821"/>
           </a:xfrm>
           <a:prstGeom prst="rect">
             <a:avLst/>
@@ -6234,7 +7765,7 @@
           <a:noFill/>
         </p:spPr>
         <p:txBody>
-          <a:bodyPr wrap="square" anchor="t" lIns="45720" rIns="45720" tIns="18288" bIns="18288">
+          <a:bodyPr wrap="square" lIns="45720" tIns="18288" rIns="45720" bIns="18288" anchor="t">
             <a:spAutoFit/>
           </a:bodyPr>
           <a:lstStyle/>
@@ -6249,8 +7780,8 @@
                 <a:solidFill>
                   <a:srgbClr val="262626"/>
                 </a:solidFill>
-                <a:latin typeface="Apple SD Gothic Neo"/>
-                <a:ea typeface="Apple SD Gothic Neo"/>
+                <a:latin typeface="NanumSquare Neo Regular" pitchFamily="2" charset="-127"/>
+                <a:ea typeface="NanumSquare Neo Regular" pitchFamily="2" charset="-127"/>
               </a:rPr>
               <a:t>국면별 모델 전환으로 0.718까지 개선 확인. 다만 '현재 국면 단정' 방식에 대한 방법론적 우려를 수용, 예측 경로 채택은 보류. 검증 자산은 후속 트랙에 재사용.</a:t>
             </a:r>
@@ -6300,6 +7831,10 @@
           <a:lstStyle/>
           <a:p>
             <a:pPr algn="ctr"/>
+            <a:endParaRPr>
+              <a:latin typeface="NanumSquare Neo Regular" pitchFamily="2" charset="-127"/>
+              <a:ea typeface="NanumSquare Neo Regular" pitchFamily="2" charset="-127"/>
+            </a:endParaRPr>
           </a:p>
         </p:txBody>
       </p:sp>
@@ -6312,7 +7847,7 @@
         <p:spPr>
           <a:xfrm>
             <a:off x="731520" y="3803904"/>
-            <a:ext cx="640080" cy="365760"/>
+            <a:ext cx="640080" cy="236988"/>
           </a:xfrm>
           <a:prstGeom prst="rect">
             <a:avLst/>
@@ -6320,7 +7855,7 @@
           <a:noFill/>
         </p:spPr>
         <p:txBody>
-          <a:bodyPr wrap="square" anchor="t" lIns="45720" rIns="45720" tIns="18288" bIns="18288">
+          <a:bodyPr wrap="square" lIns="45720" tIns="18288" rIns="45720" bIns="18288" anchor="t">
             <a:spAutoFit/>
           </a:bodyPr>
           <a:lstStyle/>
@@ -6335,8 +7870,8 @@
                 <a:solidFill>
                   <a:srgbClr val="243447"/>
                 </a:solidFill>
-                <a:latin typeface="Apple SD Gothic Neo"/>
-                <a:ea typeface="Apple SD Gothic Neo"/>
+                <a:latin typeface="NanumSquare Neo Regular" pitchFamily="2" charset="-127"/>
+                <a:ea typeface="NanumSquare Neo Regular" pitchFamily="2" charset="-127"/>
               </a:rPr>
               <a:t>T3</a:t>
             </a:r>
@@ -6352,7 +7887,7 @@
         <p:spPr>
           <a:xfrm>
             <a:off x="1371600" y="3803904"/>
-            <a:ext cx="6949440" cy="365760"/>
+            <a:ext cx="6949440" cy="229294"/>
           </a:xfrm>
           <a:prstGeom prst="rect">
             <a:avLst/>
@@ -6360,7 +7895,7 @@
           <a:noFill/>
         </p:spPr>
         <p:txBody>
-          <a:bodyPr wrap="square" anchor="t" lIns="45720" rIns="45720" tIns="18288" bIns="18288">
+          <a:bodyPr wrap="square" lIns="45720" tIns="18288" rIns="45720" bIns="18288" anchor="t">
             <a:spAutoFit/>
           </a:bodyPr>
           <a:lstStyle/>
@@ -6375,8 +7910,8 @@
                 <a:solidFill>
                   <a:srgbClr val="243447"/>
                 </a:solidFill>
-                <a:latin typeface="Apple SD Gothic Neo"/>
-                <a:ea typeface="Apple SD Gothic Neo"/>
+                <a:latin typeface="NanumSquare Neo Regular" pitchFamily="2" charset="-127"/>
+                <a:ea typeface="NanumSquare Neo Regular" pitchFamily="2" charset="-127"/>
               </a:rPr>
               <a:t>딥러닝 시계열 모델 전수 검증</a:t>
             </a:r>
@@ -6426,6 +7961,10 @@
           <a:lstStyle/>
           <a:p>
             <a:pPr algn="ctr"/>
+            <a:endParaRPr>
+              <a:latin typeface="NanumSquare Neo Regular" pitchFamily="2" charset="-127"/>
+              <a:ea typeface="NanumSquare Neo Regular" pitchFamily="2" charset="-127"/>
+            </a:endParaRPr>
           </a:p>
         </p:txBody>
       </p:sp>
@@ -6438,7 +7977,7 @@
         <p:spPr>
           <a:xfrm>
             <a:off x="10104120" y="3858768"/>
-            <a:ext cx="1325880" cy="274320"/>
+            <a:ext cx="1325880" cy="190821"/>
           </a:xfrm>
           <a:prstGeom prst="rect">
             <a:avLst/>
@@ -6446,7 +7985,7 @@
           <a:noFill/>
         </p:spPr>
         <p:txBody>
-          <a:bodyPr wrap="square" anchor="t" lIns="45720" rIns="45720" tIns="18288" bIns="18288">
+          <a:bodyPr wrap="square" lIns="45720" tIns="18288" rIns="45720" bIns="18288" anchor="t">
             <a:spAutoFit/>
           </a:bodyPr>
           <a:lstStyle/>
@@ -6461,8 +8000,8 @@
                 <a:solidFill>
                   <a:srgbClr val="008A3E"/>
                 </a:solidFill>
-                <a:latin typeface="Apple SD Gothic Neo"/>
-                <a:ea typeface="Apple SD Gothic Neo"/>
+                <a:latin typeface="NanumSquare Neo Regular" pitchFamily="2" charset="-127"/>
+                <a:ea typeface="NanumSquare Neo Regular" pitchFamily="2" charset="-127"/>
               </a:rPr>
               <a:t>완료</a:t>
             </a:r>
@@ -6478,7 +8017,7 @@
         <p:spPr>
           <a:xfrm>
             <a:off x="1371600" y="4187952"/>
-            <a:ext cx="9966960" cy="548640"/>
+            <a:ext cx="9966960" cy="190821"/>
           </a:xfrm>
           <a:prstGeom prst="rect">
             <a:avLst/>
@@ -6486,7 +8025,7 @@
           <a:noFill/>
         </p:spPr>
         <p:txBody>
-          <a:bodyPr wrap="square" anchor="t" lIns="45720" rIns="45720" tIns="18288" bIns="18288">
+          <a:bodyPr wrap="square" lIns="45720" tIns="18288" rIns="45720" bIns="18288" anchor="t">
             <a:spAutoFit/>
           </a:bodyPr>
           <a:lstStyle/>
@@ -6501,8 +8040,8 @@
                 <a:solidFill>
                   <a:srgbClr val="262626"/>
                 </a:solidFill>
-                <a:latin typeface="Apple SD Gothic Neo"/>
-                <a:ea typeface="Apple SD Gothic Neo"/>
+                <a:latin typeface="NanumSquare Neo Regular" pitchFamily="2" charset="-127"/>
+                <a:ea typeface="NanumSquare Neo Regular" pitchFamily="2" charset="-127"/>
               </a:rPr>
               <a:t>직접학습 계열(LSTM·NCDE 등) 전부 기각 — 소표본 한계. 사전학습 계열(TTM·Chronos-2·TabPFN)은 유효 — 일별 신호 결합 시 단독 0.808.</a:t>
             </a:r>
@@ -6552,6 +8091,10 @@
           <a:lstStyle/>
           <a:p>
             <a:pPr algn="ctr"/>
+            <a:endParaRPr>
+              <a:latin typeface="NanumSquare Neo Regular" pitchFamily="2" charset="-127"/>
+              <a:ea typeface="NanumSquare Neo Regular" pitchFamily="2" charset="-127"/>
+            </a:endParaRPr>
           </a:p>
         </p:txBody>
       </p:sp>
@@ -6564,7 +8107,7 @@
         <p:spPr>
           <a:xfrm>
             <a:off x="731520" y="5047488"/>
-            <a:ext cx="640080" cy="365760"/>
+            <a:ext cx="640080" cy="236988"/>
           </a:xfrm>
           <a:prstGeom prst="rect">
             <a:avLst/>
@@ -6572,7 +8115,7 @@
           <a:noFill/>
         </p:spPr>
         <p:txBody>
-          <a:bodyPr wrap="square" anchor="t" lIns="45720" rIns="45720" tIns="18288" bIns="18288">
+          <a:bodyPr wrap="square" lIns="45720" tIns="18288" rIns="45720" bIns="18288" anchor="t">
             <a:spAutoFit/>
           </a:bodyPr>
           <a:lstStyle/>
@@ -6587,8 +8130,8 @@
                 <a:solidFill>
                   <a:srgbClr val="243447"/>
                 </a:solidFill>
-                <a:latin typeface="Apple SD Gothic Neo"/>
-                <a:ea typeface="Apple SD Gothic Neo"/>
+                <a:latin typeface="NanumSquare Neo Regular" pitchFamily="2" charset="-127"/>
+                <a:ea typeface="NanumSquare Neo Regular" pitchFamily="2" charset="-127"/>
               </a:rPr>
               <a:t>T4</a:t>
             </a:r>
@@ -6604,7 +8147,7 @@
         <p:spPr>
           <a:xfrm>
             <a:off x="1371600" y="5047488"/>
-            <a:ext cx="6949440" cy="365760"/>
+            <a:ext cx="6949440" cy="229294"/>
           </a:xfrm>
           <a:prstGeom prst="rect">
             <a:avLst/>
@@ -6612,7 +8155,7 @@
           <a:noFill/>
         </p:spPr>
         <p:txBody>
-          <a:bodyPr wrap="square" anchor="t" lIns="45720" rIns="45720" tIns="18288" bIns="18288">
+          <a:bodyPr wrap="square" lIns="45720" tIns="18288" rIns="45720" bIns="18288" anchor="t">
             <a:spAutoFit/>
           </a:bodyPr>
           <a:lstStyle/>
@@ -6627,8 +8170,8 @@
                 <a:solidFill>
                   <a:srgbClr val="243447"/>
                 </a:solidFill>
-                <a:latin typeface="Apple SD Gothic Neo"/>
-                <a:ea typeface="Apple SD Gothic Neo"/>
+                <a:latin typeface="NanumSquare Neo Regular" pitchFamily="2" charset="-127"/>
+                <a:ea typeface="NanumSquare Neo Regular" pitchFamily="2" charset="-127"/>
               </a:rPr>
               <a:t>예측 불변 부가 레이어</a:t>
             </a:r>
@@ -6678,6 +8221,10 @@
           <a:lstStyle/>
           <a:p>
             <a:pPr algn="ctr"/>
+            <a:endParaRPr>
+              <a:latin typeface="NanumSquare Neo Regular" pitchFamily="2" charset="-127"/>
+              <a:ea typeface="NanumSquare Neo Regular" pitchFamily="2" charset="-127"/>
+            </a:endParaRPr>
           </a:p>
         </p:txBody>
       </p:sp>
@@ -6690,7 +8237,7 @@
         <p:spPr>
           <a:xfrm>
             <a:off x="10104120" y="5102352"/>
-            <a:ext cx="1325880" cy="274320"/>
+            <a:ext cx="1325880" cy="190821"/>
           </a:xfrm>
           <a:prstGeom prst="rect">
             <a:avLst/>
@@ -6698,7 +8245,7 @@
           <a:noFill/>
         </p:spPr>
         <p:txBody>
-          <a:bodyPr wrap="square" anchor="t" lIns="45720" rIns="45720" tIns="18288" bIns="18288">
+          <a:bodyPr wrap="square" lIns="45720" tIns="18288" rIns="45720" bIns="18288" anchor="t">
             <a:spAutoFit/>
           </a:bodyPr>
           <a:lstStyle/>
@@ -6713,8 +8260,8 @@
                 <a:solidFill>
                   <a:srgbClr val="1C5CAB"/>
                 </a:solidFill>
-                <a:latin typeface="Apple SD Gothic Neo"/>
-                <a:ea typeface="Apple SD Gothic Neo"/>
+                <a:latin typeface="NanumSquare Neo Regular" pitchFamily="2" charset="-127"/>
+                <a:ea typeface="NanumSquare Neo Regular" pitchFamily="2" charset="-127"/>
               </a:rPr>
               <a:t>진행 중</a:t>
             </a:r>
@@ -6730,7 +8277,7 @@
         <p:spPr>
           <a:xfrm>
             <a:off x="1371600" y="5431536"/>
-            <a:ext cx="9966960" cy="548640"/>
+            <a:ext cx="9966960" cy="190821"/>
           </a:xfrm>
           <a:prstGeom prst="rect">
             <a:avLst/>
@@ -6738,7 +8285,7 @@
           <a:noFill/>
         </p:spPr>
         <p:txBody>
-          <a:bodyPr wrap="square" anchor="t" lIns="45720" rIns="45720" tIns="18288" bIns="18288">
+          <a:bodyPr wrap="square" lIns="45720" tIns="18288" rIns="45720" bIns="18288" anchor="t">
             <a:spAutoFit/>
           </a:bodyPr>
           <a:lstStyle/>
@@ -6753,8 +8300,8 @@
                 <a:solidFill>
                   <a:srgbClr val="262626"/>
                 </a:solidFill>
-                <a:latin typeface="Apple SD Gothic Neo"/>
-                <a:ea typeface="Apple SD Gothic Neo"/>
+                <a:latin typeface="NanumSquare Neo Regular" pitchFamily="2" charset="-127"/>
+                <a:ea typeface="NanumSquare Neo Regular" pitchFamily="2" charset="-127"/>
               </a:rPr>
               <a:t>현행 점 예측은 그대로 두고 가치를 더하는 층위: fan chart(예측구간, 검증 완료) · 전망변동 자동 설명 리포트(설계 중) · 속보-확정 개정 예측(타당성 검토 예정).</a:t>
             </a:r>
@@ -6804,6 +8351,10 @@
           <a:lstStyle/>
           <a:p>
             <a:pPr algn="ctr"/>
+            <a:endParaRPr>
+              <a:latin typeface="NanumSquare Neo Regular" pitchFamily="2" charset="-127"/>
+              <a:ea typeface="NanumSquare Neo Regular" pitchFamily="2" charset="-127"/>
+            </a:endParaRPr>
           </a:p>
         </p:txBody>
       </p:sp>
@@ -6815,8 +8366,8 @@
         </p:nvSpPr>
         <p:spPr>
           <a:xfrm>
-            <a:off x="685800" y="6364224"/>
-            <a:ext cx="10881360" cy="256032"/>
+            <a:off x="685800" y="6406062"/>
+            <a:ext cx="10881360" cy="172355"/>
           </a:xfrm>
           <a:prstGeom prst="rect">
             <a:avLst/>
@@ -6824,7 +8375,7 @@
           <a:noFill/>
         </p:spPr>
         <p:txBody>
-          <a:bodyPr wrap="square" anchor="ctr" lIns="45720" rIns="45720" tIns="18288" bIns="18288">
+          <a:bodyPr wrap="square" lIns="45720" tIns="18288" rIns="45720" bIns="18288" anchor="ctr">
             <a:spAutoFit/>
           </a:bodyPr>
           <a:lstStyle/>
@@ -6839,8 +8390,8 @@
                 <a:solidFill>
                   <a:srgbClr val="6B6B6B"/>
                 </a:solidFill>
-                <a:latin typeface="Apple SD Gothic Neo"/>
-                <a:ea typeface="Apple SD Gothic Neo"/>
+                <a:latin typeface="NanumSquare Neo Regular" pitchFamily="2" charset="-127"/>
+                <a:ea typeface="NanumSquare Neo Regular" pitchFamily="2" charset="-127"/>
               </a:rPr>
               <a:t>공통 검증 규약: 한은 제공 실시간 빈티지 · 속보치 기준 · 전망주차 w[-19,-1] 평균 RMSE · 2018Q1~2025Q4 (32개 분기)</a:t>
             </a:r>
@@ -6856,7 +8407,7 @@
 </file>
 
 <file path=ppt/slides/slide4.xml><?xml version="1.0" encoding="utf-8"?>
-<p:sld xmlns:a="http://schemas.openxmlformats.org/drawingml/2006/main" xmlns:p="http://schemas.openxmlformats.org/presentationml/2006/main" xmlns:r="http://schemas.openxmlformats.org/officeDocument/2006/relationships">
+<p:sld xmlns:a="http://schemas.openxmlformats.org/drawingml/2006/main" xmlns:r="http://schemas.openxmlformats.org/officeDocument/2006/relationships" xmlns:p="http://schemas.openxmlformats.org/presentationml/2006/main">
   <p:cSld>
     <p:spTree>
       <p:nvGrpSpPr>
@@ -6864,7 +8415,14 @@
         <p:cNvGrpSpPr/>
         <p:nvPr/>
       </p:nvGrpSpPr>
-      <p:grpSpPr/>
+      <p:grpSpPr>
+        <a:xfrm>
+          <a:off x="0" y="0"/>
+          <a:ext cx="0" cy="0"/>
+          <a:chOff x="0" y="0"/>
+          <a:chExt cx="0" cy="0"/>
+        </a:xfrm>
+      </p:grpSpPr>
       <p:sp>
         <p:nvSpPr>
           <p:cNvPr id="2" name="TextBox 1"/>
@@ -6874,7 +8432,7 @@
         <p:spPr>
           <a:xfrm>
             <a:off x="502920" y="274320"/>
-            <a:ext cx="11155680" cy="502920"/>
+            <a:ext cx="11155680" cy="329321"/>
           </a:xfrm>
           <a:prstGeom prst="rect">
             <a:avLst/>
@@ -6882,7 +8440,7 @@
           <a:noFill/>
         </p:spPr>
         <p:txBody>
-          <a:bodyPr wrap="square" anchor="t" lIns="45720" rIns="45720" tIns="18288" bIns="18288">
+          <a:bodyPr wrap="square" lIns="45720" tIns="18288" rIns="45720" bIns="18288" anchor="t">
             <a:spAutoFit/>
           </a:bodyPr>
           <a:lstStyle/>
@@ -6893,25 +8451,132 @@
               </a:spcAft>
             </a:pPr>
             <a:r>
-              <a:rPr sz="1900" b="1">
+              <a:rPr sz="1900" b="1" dirty="0">
                 <a:solidFill>
                   <a:srgbClr val="008A3E"/>
                 </a:solidFill>
-                <a:latin typeface="Apple SD Gothic Neo"/>
-                <a:ea typeface="Apple SD Gothic Neo"/>
+                <a:latin typeface="NanumSquare Neo Regular" pitchFamily="2" charset="-127"/>
+                <a:ea typeface="NanumSquare Neo Regular" pitchFamily="2" charset="-127"/>
               </a:rPr>
               <a:t>03  </a:t>
             </a:r>
             <a:r>
-              <a:rPr sz="1900" b="1">
+              <a:rPr sz="1900" b="1" dirty="0" err="1">
                 <a:solidFill>
                   <a:srgbClr val="243447"/>
                 </a:solidFill>
-                <a:latin typeface="Apple SD Gothic Neo"/>
-                <a:ea typeface="Apple SD Gothic Neo"/>
-              </a:rPr>
-              <a:t>검증 결과 총괄 — 주요 구성 성적표</a:t>
-            </a:r>
+                <a:latin typeface="NanumSquare Neo Regular" pitchFamily="2" charset="-127"/>
+                <a:ea typeface="NanumSquare Neo Regular" pitchFamily="2" charset="-127"/>
+              </a:rPr>
+              <a:t>검증</a:t>
+            </a:r>
+            <a:r>
+              <a:rPr sz="1900" b="1" dirty="0">
+                <a:solidFill>
+                  <a:srgbClr val="243447"/>
+                </a:solidFill>
+                <a:latin typeface="NanumSquare Neo Regular" pitchFamily="2" charset="-127"/>
+                <a:ea typeface="NanumSquare Neo Regular" pitchFamily="2" charset="-127"/>
+              </a:rPr>
+              <a:t> </a:t>
+            </a:r>
+            <a:r>
+              <a:rPr sz="1900" b="1" dirty="0" err="1">
+                <a:solidFill>
+                  <a:srgbClr val="243447"/>
+                </a:solidFill>
+                <a:latin typeface="NanumSquare Neo Regular" pitchFamily="2" charset="-127"/>
+                <a:ea typeface="NanumSquare Neo Regular" pitchFamily="2" charset="-127"/>
+              </a:rPr>
+              <a:t>결과</a:t>
+            </a:r>
+            <a:r>
+              <a:rPr sz="1900" b="1" dirty="0">
+                <a:solidFill>
+                  <a:srgbClr val="243447"/>
+                </a:solidFill>
+                <a:latin typeface="NanumSquare Neo Regular" pitchFamily="2" charset="-127"/>
+                <a:ea typeface="NanumSquare Neo Regular" pitchFamily="2" charset="-127"/>
+              </a:rPr>
+              <a:t> </a:t>
+            </a:r>
+            <a:r>
+              <a:rPr sz="1900" b="1" dirty="0" err="1">
+                <a:solidFill>
+                  <a:srgbClr val="243447"/>
+                </a:solidFill>
+                <a:latin typeface="NanumSquare Neo Regular" pitchFamily="2" charset="-127"/>
+                <a:ea typeface="NanumSquare Neo Regular" pitchFamily="2" charset="-127"/>
+              </a:rPr>
+              <a:t>총괄</a:t>
+            </a:r>
+            <a:r>
+              <a:rPr sz="1900" b="1" dirty="0">
+                <a:solidFill>
+                  <a:srgbClr val="243447"/>
+                </a:solidFill>
+                <a:latin typeface="NanumSquare Neo Regular" pitchFamily="2" charset="-127"/>
+                <a:ea typeface="NanumSquare Neo Regular" pitchFamily="2" charset="-127"/>
+              </a:rPr>
+              <a:t> — </a:t>
+            </a:r>
+            <a:r>
+              <a:rPr sz="1900" b="1" dirty="0" err="1">
+                <a:solidFill>
+                  <a:srgbClr val="243447"/>
+                </a:solidFill>
+                <a:latin typeface="NanumSquare Neo Regular" pitchFamily="2" charset="-127"/>
+                <a:ea typeface="NanumSquare Neo Regular" pitchFamily="2" charset="-127"/>
+              </a:rPr>
+              <a:t>주요</a:t>
+            </a:r>
+            <a:r>
+              <a:rPr sz="1900" b="1" dirty="0">
+                <a:solidFill>
+                  <a:srgbClr val="243447"/>
+                </a:solidFill>
+                <a:latin typeface="NanumSquare Neo Regular" pitchFamily="2" charset="-127"/>
+                <a:ea typeface="NanumSquare Neo Regular" pitchFamily="2" charset="-127"/>
+              </a:rPr>
+              <a:t> </a:t>
+            </a:r>
+            <a:r>
+              <a:rPr sz="1900" b="1" dirty="0" err="1">
+                <a:solidFill>
+                  <a:srgbClr val="243447"/>
+                </a:solidFill>
+                <a:latin typeface="NanumSquare Neo Regular" pitchFamily="2" charset="-127"/>
+                <a:ea typeface="NanumSquare Neo Regular" pitchFamily="2" charset="-127"/>
+              </a:rPr>
+              <a:t>구성</a:t>
+            </a:r>
+            <a:r>
+              <a:rPr sz="1900" b="1" dirty="0">
+                <a:solidFill>
+                  <a:srgbClr val="243447"/>
+                </a:solidFill>
+                <a:latin typeface="NanumSquare Neo Regular" pitchFamily="2" charset="-127"/>
+                <a:ea typeface="NanumSquare Neo Regular" pitchFamily="2" charset="-127"/>
+              </a:rPr>
+              <a:t> </a:t>
+            </a:r>
+            <a:r>
+              <a:rPr sz="1900" b="1" dirty="0" err="1">
+                <a:solidFill>
+                  <a:srgbClr val="243447"/>
+                </a:solidFill>
+                <a:latin typeface="NanumSquare Neo Regular" pitchFamily="2" charset="-127"/>
+                <a:ea typeface="NanumSquare Neo Regular" pitchFamily="2" charset="-127"/>
+              </a:rPr>
+              <a:t>성적표</a:t>
+            </a:r>
+            <a:endParaRPr sz="1900" b="1" dirty="0">
+              <a:solidFill>
+                <a:srgbClr val="243447"/>
+              </a:solidFill>
+              <a:latin typeface="NanumSquare Neo Regular" pitchFamily="2" charset="-127"/>
+              <a:ea typeface="NanumSquare Neo Regular" pitchFamily="2" charset="-127"/>
+            </a:endParaRPr>
           </a:p>
         </p:txBody>
       </p:sp>
@@ -6959,7 +8624,7 @@
           <p:nvPr/>
         </p:nvPicPr>
         <p:blipFill>
-          <a:blip r:embed="rId2"/>
+          <a:blip r:embed="rId3"/>
           <a:stretch>
             <a:fillRect/>
           </a:stretch>
@@ -6983,7 +8648,7 @@
         <p:spPr>
           <a:xfrm>
             <a:off x="7406640" y="1325880"/>
-            <a:ext cx="4297680" cy="4480560"/>
+            <a:ext cx="4297680" cy="3068532"/>
           </a:xfrm>
           <a:prstGeom prst="rect">
             <a:avLst/>
@@ -6991,7 +8656,7 @@
           <a:noFill/>
         </p:spPr>
         <p:txBody>
-          <a:bodyPr wrap="square" anchor="t" lIns="45720" rIns="45720" tIns="18288" bIns="18288">
+          <a:bodyPr wrap="square" lIns="45720" tIns="18288" rIns="45720" bIns="18288" anchor="t">
             <a:spAutoFit/>
           </a:bodyPr>
           <a:lstStyle/>
@@ -7006,8 +8671,8 @@
                 <a:solidFill>
                   <a:srgbClr val="243447"/>
                 </a:solidFill>
-                <a:latin typeface="Apple SD Gothic Neo"/>
-                <a:ea typeface="Apple SD Gothic Neo"/>
+                <a:latin typeface="NanumSquare Neo Regular" pitchFamily="2" charset="-127"/>
+                <a:ea typeface="NanumSquare Neo Regular" pitchFamily="2" charset="-127"/>
               </a:rPr>
               <a:t>읽는 법</a:t>
             </a:r>
@@ -7023,8 +8688,8 @@
                 <a:solidFill>
                   <a:srgbClr val="262626"/>
                 </a:solidFill>
-                <a:latin typeface="Apple SD Gothic Neo"/>
-                <a:ea typeface="Apple SD Gothic Neo"/>
+                <a:latin typeface="NanumSquare Neo Regular" pitchFamily="2" charset="-127"/>
+                <a:ea typeface="NanumSquare Neo Regular" pitchFamily="2" charset="-127"/>
               </a:rPr>
               <a:t>· 낮을수록 정확 (RMSE)</a:t>
             </a:r>
@@ -7040,8 +8705,8 @@
                 <a:solidFill>
                   <a:srgbClr val="262626"/>
                 </a:solidFill>
-                <a:latin typeface="Apple SD Gothic Neo"/>
-                <a:ea typeface="Apple SD Gothic Neo"/>
+                <a:latin typeface="NanumSquare Neo Regular" pitchFamily="2" charset="-127"/>
+                <a:ea typeface="NanumSquare Neo Regular" pitchFamily="2" charset="-127"/>
               </a:rPr>
               <a:t>· 전 구성 동일 규약 — 직접 비교 가능</a:t>
             </a:r>
@@ -7052,16 +8717,13 @@
                 <a:spcPts val="300"/>
               </a:spcAft>
             </a:pPr>
-            <a:r>
-              <a:rPr sz="600" b="0">
-                <a:solidFill>
-                  <a:srgbClr val="262626"/>
-                </a:solidFill>
-                <a:latin typeface="Apple SD Gothic Neo"/>
-                <a:ea typeface="Apple SD Gothic Neo"/>
-              </a:rPr>
-              <a:t/>
-            </a:r>
+            <a:endParaRPr sz="1050" b="0">
+              <a:solidFill>
+                <a:srgbClr val="262626"/>
+              </a:solidFill>
+              <a:latin typeface="NanumSquare Neo Regular" pitchFamily="2" charset="-127"/>
+              <a:ea typeface="NanumSquare Neo Regular" pitchFamily="2" charset="-127"/>
+            </a:endParaRPr>
           </a:p>
           <a:p>
             <a:pPr algn="l">
@@ -7074,8 +8736,8 @@
                 <a:solidFill>
                   <a:srgbClr val="008A3E"/>
                 </a:solidFill>
-                <a:latin typeface="Apple SD Gothic Neo"/>
-                <a:ea typeface="Apple SD Gothic Neo"/>
+                <a:latin typeface="NanumSquare Neo Regular" pitchFamily="2" charset="-127"/>
+                <a:ea typeface="NanumSquare Neo Regular" pitchFamily="2" charset="-127"/>
               </a:rPr>
               <a:t>관찰 1</a:t>
             </a:r>
@@ -7091,8 +8753,8 @@
                 <a:solidFill>
                   <a:srgbClr val="262626"/>
                 </a:solidFill>
-                <a:latin typeface="Apple SD Gothic Neo"/>
-                <a:ea typeface="Apple SD Gothic Neo"/>
+                <a:latin typeface="NanumSquare Neo Regular" pitchFamily="2" charset="-127"/>
+                <a:ea typeface="NanumSquare Neo Regular" pitchFamily="2" charset="-127"/>
               </a:rPr>
               <a:t>현행 구성(0.765)은 검증한 40여 개 구성</a:t>
             </a:r>
@@ -7108,8 +8770,8 @@
                 <a:solidFill>
                   <a:srgbClr val="262626"/>
                 </a:solidFill>
-                <a:latin typeface="Apple SD Gothic Neo"/>
-                <a:ea typeface="Apple SD Gothic Neo"/>
+                <a:latin typeface="NanumSquare Neo Regular" pitchFamily="2" charset="-127"/>
+                <a:ea typeface="NanumSquare Neo Regular" pitchFamily="2" charset="-127"/>
               </a:rPr>
               <a:t>대부분을 상회 — 견고하게 설계된 시스템</a:t>
             </a:r>
@@ -7120,16 +8782,13 @@
                 <a:spcPts val="300"/>
               </a:spcAft>
             </a:pPr>
-            <a:r>
-              <a:rPr sz="600" b="0">
-                <a:solidFill>
-                  <a:srgbClr val="262626"/>
-                </a:solidFill>
-                <a:latin typeface="Apple SD Gothic Neo"/>
-                <a:ea typeface="Apple SD Gothic Neo"/>
-              </a:rPr>
-              <a:t/>
-            </a:r>
+            <a:endParaRPr sz="1050" b="1">
+              <a:solidFill>
+                <a:srgbClr val="262626"/>
+              </a:solidFill>
+              <a:latin typeface="NanumSquare Neo Regular" pitchFamily="2" charset="-127"/>
+              <a:ea typeface="NanumSquare Neo Regular" pitchFamily="2" charset="-127"/>
+            </a:endParaRPr>
           </a:p>
           <a:p>
             <a:pPr algn="l">
@@ -7142,8 +8801,8 @@
                 <a:solidFill>
                   <a:srgbClr val="008A3E"/>
                 </a:solidFill>
-                <a:latin typeface="Apple SD Gothic Neo"/>
-                <a:ea typeface="Apple SD Gothic Neo"/>
+                <a:latin typeface="NanumSquare Neo Regular" pitchFamily="2" charset="-127"/>
+                <a:ea typeface="NanumSquare Neo Regular" pitchFamily="2" charset="-127"/>
               </a:rPr>
               <a:t>관찰 2</a:t>
             </a:r>
@@ -7159,8 +8818,8 @@
                 <a:solidFill>
                   <a:srgbClr val="262626"/>
                 </a:solidFill>
-                <a:latin typeface="Apple SD Gothic Neo"/>
-                <a:ea typeface="Apple SD Gothic Neo"/>
+                <a:latin typeface="NanumSquare Neo Regular" pitchFamily="2" charset="-127"/>
+                <a:ea typeface="NanumSquare Neo Regular" pitchFamily="2" charset="-127"/>
               </a:rPr>
               <a:t>이를 넘는 상시 구성은 3자 결합이 유일</a:t>
             </a:r>
@@ -7176,8 +8835,8 @@
                 <a:solidFill>
                   <a:srgbClr val="262626"/>
                 </a:solidFill>
-                <a:latin typeface="Apple SD Gothic Neo"/>
-                <a:ea typeface="Apple SD Gothic Neo"/>
+                <a:latin typeface="NanumSquare Neo Regular" pitchFamily="2" charset="-127"/>
+                <a:ea typeface="NanumSquare Neo Regular" pitchFamily="2" charset="-127"/>
               </a:rPr>
               <a:t>(0.746, 현행 대비 -2.5%)</a:t>
             </a:r>
@@ -7188,16 +8847,13 @@
                 <a:spcPts val="300"/>
               </a:spcAft>
             </a:pPr>
-            <a:r>
-              <a:rPr sz="600" b="0">
-                <a:solidFill>
-                  <a:srgbClr val="262626"/>
-                </a:solidFill>
-                <a:latin typeface="Apple SD Gothic Neo"/>
-                <a:ea typeface="Apple SD Gothic Neo"/>
-              </a:rPr>
-              <a:t/>
-            </a:r>
+            <a:endParaRPr sz="1050" b="0">
+              <a:solidFill>
+                <a:srgbClr val="262626"/>
+              </a:solidFill>
+              <a:latin typeface="NanumSquare Neo Regular" pitchFamily="2" charset="-127"/>
+              <a:ea typeface="NanumSquare Neo Regular" pitchFamily="2" charset="-127"/>
+            </a:endParaRPr>
           </a:p>
           <a:p>
             <a:pPr algn="l">
@@ -7210,8 +8866,8 @@
                 <a:solidFill>
                   <a:srgbClr val="008A3E"/>
                 </a:solidFill>
-                <a:latin typeface="Apple SD Gothic Neo"/>
-                <a:ea typeface="Apple SD Gothic Neo"/>
+                <a:latin typeface="NanumSquare Neo Regular" pitchFamily="2" charset="-127"/>
+                <a:ea typeface="NanumSquare Neo Regular" pitchFamily="2" charset="-127"/>
               </a:rPr>
               <a:t>관찰 3</a:t>
             </a:r>
@@ -7227,8 +8883,8 @@
                 <a:solidFill>
                   <a:srgbClr val="262626"/>
                 </a:solidFill>
-                <a:latin typeface="Apple SD Gothic Neo"/>
-                <a:ea typeface="Apple SD Gothic Neo"/>
+                <a:latin typeface="NanumSquare Neo Regular" pitchFamily="2" charset="-127"/>
+                <a:ea typeface="NanumSquare Neo Regular" pitchFamily="2" charset="-127"/>
               </a:rPr>
               <a:t>사전학습 딥러닝 단독으로도 0.808 —</a:t>
             </a:r>
@@ -7244,8 +8900,8 @@
                 <a:solidFill>
                   <a:srgbClr val="262626"/>
                 </a:solidFill>
-                <a:latin typeface="Apple SD Gothic Neo"/>
-                <a:ea typeface="Apple SD Gothic Neo"/>
+                <a:latin typeface="NanumSquare Neo Regular" pitchFamily="2" charset="-127"/>
+                <a:ea typeface="NanumSquare Neo Regular" pitchFamily="2" charset="-127"/>
               </a:rPr>
               <a:t>보조 예측기로서 실용 수준 진입</a:t>
             </a:r>
@@ -7295,6 +8951,10 @@
           <a:lstStyle/>
           <a:p>
             <a:pPr algn="ctr"/>
+            <a:endParaRPr>
+              <a:latin typeface="NanumSquare Neo Regular" pitchFamily="2" charset="-127"/>
+              <a:ea typeface="NanumSquare Neo Regular" pitchFamily="2" charset="-127"/>
+            </a:endParaRPr>
           </a:p>
         </p:txBody>
       </p:sp>
@@ -7306,8 +8966,8 @@
         </p:nvSpPr>
         <p:spPr>
           <a:xfrm>
-            <a:off x="685800" y="6364224"/>
-            <a:ext cx="10881360" cy="256032"/>
+            <a:off x="685800" y="6406062"/>
+            <a:ext cx="10881360" cy="172355"/>
           </a:xfrm>
           <a:prstGeom prst="rect">
             <a:avLst/>
@@ -7315,7 +8975,7 @@
           <a:noFill/>
         </p:spPr>
         <p:txBody>
-          <a:bodyPr wrap="square" anchor="ctr" lIns="45720" rIns="45720" tIns="18288" bIns="18288">
+          <a:bodyPr wrap="square" lIns="45720" tIns="18288" rIns="45720" bIns="18288" anchor="ctr">
             <a:spAutoFit/>
           </a:bodyPr>
           <a:lstStyle/>
@@ -7330,8 +8990,8 @@
                 <a:solidFill>
                   <a:srgbClr val="6B6B6B"/>
                 </a:solidFill>
-                <a:latin typeface="Apple SD Gothic Neo"/>
-                <a:ea typeface="Apple SD Gothic Neo"/>
+                <a:latin typeface="NanumSquare Neo Regular" pitchFamily="2" charset="-127"/>
+                <a:ea typeface="NanumSquare Neo Regular" pitchFamily="2" charset="-127"/>
               </a:rPr>
               <a:t>공통 검증 규약: 한은 제공 실시간 빈티지 · 속보치 기준 · 전망주차 w[-19,-1] 평균 RMSE · 2018Q1~2025Q4 (32개 분기)  ·  이외 30여 개 구성(직접학습 신경망, 예측결합 변형 등)은 전부 현행 미달로 생략</a:t>
             </a:r>
@@ -7347,7 +9007,7 @@
 </file>
 
 <file path=ppt/slides/slide5.xml><?xml version="1.0" encoding="utf-8"?>
-<p:sld xmlns:a="http://schemas.openxmlformats.org/drawingml/2006/main" xmlns:p="http://schemas.openxmlformats.org/presentationml/2006/main" xmlns:r="http://schemas.openxmlformats.org/officeDocument/2006/relationships">
+<p:sld xmlns:a="http://schemas.openxmlformats.org/drawingml/2006/main" xmlns:r="http://schemas.openxmlformats.org/officeDocument/2006/relationships" xmlns:p="http://schemas.openxmlformats.org/presentationml/2006/main">
   <p:cSld>
     <p:spTree>
       <p:nvGrpSpPr>
@@ -7355,7 +9015,14 @@
         <p:cNvGrpSpPr/>
         <p:nvPr/>
       </p:nvGrpSpPr>
-      <p:grpSpPr/>
+      <p:grpSpPr>
+        <a:xfrm>
+          <a:off x="0" y="0"/>
+          <a:ext cx="0" cy="0"/>
+          <a:chOff x="0" y="0"/>
+          <a:chExt cx="0" cy="0"/>
+        </a:xfrm>
+      </p:grpSpPr>
       <p:sp>
         <p:nvSpPr>
           <p:cNvPr id="2" name="TextBox 1"/>
@@ -7365,7 +9032,7 @@
         <p:spPr>
           <a:xfrm>
             <a:off x="502920" y="274320"/>
-            <a:ext cx="11155680" cy="502920"/>
+            <a:ext cx="11155680" cy="329321"/>
           </a:xfrm>
           <a:prstGeom prst="rect">
             <a:avLst/>
@@ -7373,7 +9040,7 @@
           <a:noFill/>
         </p:spPr>
         <p:txBody>
-          <a:bodyPr wrap="square" anchor="t" lIns="45720" rIns="45720" tIns="18288" bIns="18288">
+          <a:bodyPr wrap="square" lIns="45720" tIns="18288" rIns="45720" bIns="18288" anchor="t">
             <a:spAutoFit/>
           </a:bodyPr>
           <a:lstStyle/>
@@ -7388,8 +9055,8 @@
                 <a:solidFill>
                   <a:srgbClr val="008A3E"/>
                 </a:solidFill>
-                <a:latin typeface="Apple SD Gothic Neo"/>
-                <a:ea typeface="Apple SD Gothic Neo"/>
+                <a:latin typeface="NanumSquare Neo Regular" pitchFamily="2" charset="-127"/>
+                <a:ea typeface="NanumSquare Neo Regular" pitchFamily="2" charset="-127"/>
               </a:rPr>
               <a:t>04  </a:t>
             </a:r>
@@ -7398,8 +9065,8 @@
                 <a:solidFill>
                   <a:srgbClr val="243447"/>
                 </a:solidFill>
-                <a:latin typeface="Apple SD Gothic Neo"/>
-                <a:ea typeface="Apple SD Gothic Neo"/>
+                <a:latin typeface="NanumSquare Neo Regular" pitchFamily="2" charset="-127"/>
+                <a:ea typeface="NanumSquare Neo Regular" pitchFamily="2" charset="-127"/>
               </a:rPr>
               <a:t>딥러닝 검증 — 사전학습 모델 + 일별 신호의 결합이 유효</a:t>
             </a:r>
@@ -7450,7 +9117,7 @@
         <p:spPr>
           <a:xfrm>
             <a:off x="502920" y="1143000"/>
-            <a:ext cx="5394960" cy="2377440"/>
+            <a:ext cx="5394960" cy="1532214"/>
           </a:xfrm>
           <a:prstGeom prst="rect">
             <a:avLst/>
@@ -7458,7 +9125,7 @@
           <a:noFill/>
         </p:spPr>
         <p:txBody>
-          <a:bodyPr wrap="square" anchor="t" lIns="45720" rIns="45720" tIns="18288" bIns="18288">
+          <a:bodyPr wrap="square" lIns="45720" tIns="18288" rIns="45720" bIns="18288" anchor="t">
             <a:spAutoFit/>
           </a:bodyPr>
           <a:lstStyle/>
@@ -7469,14 +9136,144 @@
               </a:spcAft>
             </a:pPr>
             <a:r>
-              <a:rPr sz="1250" b="1">
+              <a:rPr sz="1250" b="1" dirty="0" err="1">
                 <a:solidFill>
                   <a:srgbClr val="243447"/>
                 </a:solidFill>
-                <a:latin typeface="Apple SD Gothic Neo"/>
-                <a:ea typeface="Apple SD Gothic Neo"/>
-              </a:rPr>
-              <a:t>검증 결론 (모델 10여 종, 논문 50여 편 검토)</a:t>
+                <a:latin typeface="NanumSquare Neo Regular" pitchFamily="2" charset="-127"/>
+                <a:ea typeface="NanumSquare Neo Regular" pitchFamily="2" charset="-127"/>
+              </a:rPr>
+              <a:t>검증</a:t>
+            </a:r>
+            <a:r>
+              <a:rPr sz="1250" b="1" dirty="0">
+                <a:solidFill>
+                  <a:srgbClr val="243447"/>
+                </a:solidFill>
+                <a:latin typeface="NanumSquare Neo Regular" pitchFamily="2" charset="-127"/>
+                <a:ea typeface="NanumSquare Neo Regular" pitchFamily="2" charset="-127"/>
+              </a:rPr>
+              <a:t> </a:t>
+            </a:r>
+            <a:r>
+              <a:rPr sz="1250" b="1" dirty="0" err="1">
+                <a:solidFill>
+                  <a:srgbClr val="243447"/>
+                </a:solidFill>
+                <a:latin typeface="NanumSquare Neo Regular" pitchFamily="2" charset="-127"/>
+                <a:ea typeface="NanumSquare Neo Regular" pitchFamily="2" charset="-127"/>
+              </a:rPr>
+              <a:t>결론</a:t>
+            </a:r>
+            <a:r>
+              <a:rPr sz="1250" b="1" dirty="0">
+                <a:solidFill>
+                  <a:srgbClr val="243447"/>
+                </a:solidFill>
+                <a:latin typeface="NanumSquare Neo Regular" pitchFamily="2" charset="-127"/>
+                <a:ea typeface="NanumSquare Neo Regular" pitchFamily="2" charset="-127"/>
+              </a:rPr>
+              <a:t> (</a:t>
+            </a:r>
+            <a:r>
+              <a:rPr sz="1250" b="1" dirty="0" err="1">
+                <a:solidFill>
+                  <a:srgbClr val="243447"/>
+                </a:solidFill>
+                <a:latin typeface="NanumSquare Neo Regular" pitchFamily="2" charset="-127"/>
+                <a:ea typeface="NanumSquare Neo Regular" pitchFamily="2" charset="-127"/>
+              </a:rPr>
+              <a:t>모델</a:t>
+            </a:r>
+            <a:r>
+              <a:rPr sz="1250" b="1" dirty="0">
+                <a:solidFill>
+                  <a:srgbClr val="243447"/>
+                </a:solidFill>
+                <a:latin typeface="NanumSquare Neo Regular" pitchFamily="2" charset="-127"/>
+                <a:ea typeface="NanumSquare Neo Regular" pitchFamily="2" charset="-127"/>
+              </a:rPr>
+              <a:t> 10여 </a:t>
+            </a:r>
+            <a:r>
+              <a:rPr sz="1250" b="1" dirty="0" err="1">
+                <a:solidFill>
+                  <a:srgbClr val="243447"/>
+                </a:solidFill>
+                <a:latin typeface="NanumSquare Neo Regular" pitchFamily="2" charset="-127"/>
+                <a:ea typeface="NanumSquare Neo Regular" pitchFamily="2" charset="-127"/>
+              </a:rPr>
+              <a:t>종</a:t>
+            </a:r>
+            <a:r>
+              <a:rPr sz="1250" b="1" dirty="0">
+                <a:solidFill>
+                  <a:srgbClr val="243447"/>
+                </a:solidFill>
+                <a:latin typeface="NanumSquare Neo Regular" pitchFamily="2" charset="-127"/>
+                <a:ea typeface="NanumSquare Neo Regular" pitchFamily="2" charset="-127"/>
+              </a:rPr>
+              <a:t>, </a:t>
+            </a:r>
+            <a:r>
+              <a:rPr sz="1250" b="1" dirty="0" err="1">
+                <a:solidFill>
+                  <a:srgbClr val="243447"/>
+                </a:solidFill>
+                <a:latin typeface="NanumSquare Neo Regular" pitchFamily="2" charset="-127"/>
+                <a:ea typeface="NanumSquare Neo Regular" pitchFamily="2" charset="-127"/>
+              </a:rPr>
+              <a:t>논문</a:t>
+            </a:r>
+            <a:r>
+              <a:rPr sz="1250" b="1" dirty="0">
+                <a:solidFill>
+                  <a:srgbClr val="243447"/>
+                </a:solidFill>
+                <a:latin typeface="NanumSquare Neo Regular" pitchFamily="2" charset="-127"/>
+                <a:ea typeface="NanumSquare Neo Regular" pitchFamily="2" charset="-127"/>
+              </a:rPr>
+              <a:t> 50여 </a:t>
+            </a:r>
+            <a:r>
+              <a:rPr sz="1250" b="1" dirty="0" err="1">
+                <a:solidFill>
+                  <a:srgbClr val="243447"/>
+                </a:solidFill>
+                <a:latin typeface="NanumSquare Neo Regular" pitchFamily="2" charset="-127"/>
+                <a:ea typeface="NanumSquare Neo Regular" pitchFamily="2" charset="-127"/>
+              </a:rPr>
+              <a:t>편</a:t>
+            </a:r>
+            <a:r>
+              <a:rPr sz="1250" b="1" dirty="0">
+                <a:solidFill>
+                  <a:srgbClr val="243447"/>
+                </a:solidFill>
+                <a:latin typeface="NanumSquare Neo Regular" pitchFamily="2" charset="-127"/>
+                <a:ea typeface="NanumSquare Neo Regular" pitchFamily="2" charset="-127"/>
+              </a:rPr>
+              <a:t> </a:t>
+            </a:r>
+            <a:r>
+              <a:rPr sz="1250" b="1" dirty="0" err="1">
+                <a:solidFill>
+                  <a:srgbClr val="243447"/>
+                </a:solidFill>
+                <a:latin typeface="NanumSquare Neo Regular" pitchFamily="2" charset="-127"/>
+                <a:ea typeface="NanumSquare Neo Regular" pitchFamily="2" charset="-127"/>
+              </a:rPr>
+              <a:t>검토</a:t>
+            </a:r>
+            <a:r>
+              <a:rPr sz="1250" b="1" dirty="0">
+                <a:solidFill>
+                  <a:srgbClr val="243447"/>
+                </a:solidFill>
+                <a:latin typeface="NanumSquare Neo Regular" pitchFamily="2" charset="-127"/>
+                <a:ea typeface="NanumSquare Neo Regular" pitchFamily="2" charset="-127"/>
+              </a:rPr>
+              <a:t>)</a:t>
             </a:r>
           </a:p>
           <a:p>
@@ -7485,16 +9282,13 @@
                 <a:spcPts val="200"/>
               </a:spcAft>
             </a:pPr>
-            <a:r>
-              <a:rPr sz="400" b="0">
-                <a:solidFill>
-                  <a:srgbClr val="262626"/>
-                </a:solidFill>
-                <a:latin typeface="Apple SD Gothic Neo"/>
-                <a:ea typeface="Apple SD Gothic Neo"/>
-              </a:rPr>
-              <a:t/>
-            </a:r>
+            <a:endParaRPr sz="1250" b="1" dirty="0">
+              <a:solidFill>
+                <a:srgbClr val="243447"/>
+              </a:solidFill>
+              <a:latin typeface="NanumSquare Neo Regular" pitchFamily="2" charset="-127"/>
+              <a:ea typeface="NanumSquare Neo Regular" pitchFamily="2" charset="-127"/>
+            </a:endParaRPr>
           </a:p>
           <a:p>
             <a:pPr algn="l">
@@ -7503,25 +9297,112 @@
               </a:spcAft>
             </a:pPr>
             <a:r>
-              <a:rPr sz="1050" b="0">
+              <a:rPr sz="1050" b="0" dirty="0">
                 <a:solidFill>
                   <a:srgbClr val="262626"/>
                 </a:solidFill>
-                <a:latin typeface="Apple SD Gothic Neo"/>
-                <a:ea typeface="Apple SD Gothic Neo"/>
-              </a:rPr>
-              <a:t>· 직접학습 신경망(LSTM·NCDE 등): </a:t>
-            </a:r>
-            <a:r>
-              <a:rPr sz="1050" b="1">
+                <a:latin typeface="NanumSquare Neo Regular" pitchFamily="2" charset="-127"/>
+                <a:ea typeface="NanumSquare Neo Regular" pitchFamily="2" charset="-127"/>
+              </a:rPr>
+              <a:t>· </a:t>
+            </a:r>
+            <a:r>
+              <a:rPr sz="1050" b="0" dirty="0" err="1">
+                <a:solidFill>
+                  <a:srgbClr val="262626"/>
+                </a:solidFill>
+                <a:latin typeface="NanumSquare Neo Regular" pitchFamily="2" charset="-127"/>
+                <a:ea typeface="NanumSquare Neo Regular" pitchFamily="2" charset="-127"/>
+              </a:rPr>
+              <a:t>직접학습</a:t>
+            </a:r>
+            <a:r>
+              <a:rPr sz="1050" b="0" dirty="0">
+                <a:solidFill>
+                  <a:srgbClr val="262626"/>
+                </a:solidFill>
+                <a:latin typeface="NanumSquare Neo Regular" pitchFamily="2" charset="-127"/>
+                <a:ea typeface="NanumSquare Neo Regular" pitchFamily="2" charset="-127"/>
+              </a:rPr>
+              <a:t> </a:t>
+            </a:r>
+            <a:r>
+              <a:rPr sz="1050" b="0" dirty="0" err="1">
+                <a:solidFill>
+                  <a:srgbClr val="262626"/>
+                </a:solidFill>
+                <a:latin typeface="NanumSquare Neo Regular" pitchFamily="2" charset="-127"/>
+                <a:ea typeface="NanumSquare Neo Regular" pitchFamily="2" charset="-127"/>
+              </a:rPr>
+              <a:t>신경망</a:t>
+            </a:r>
+            <a:r>
+              <a:rPr sz="1050" b="0" dirty="0">
+                <a:solidFill>
+                  <a:srgbClr val="262626"/>
+                </a:solidFill>
+                <a:latin typeface="NanumSquare Neo Regular" pitchFamily="2" charset="-127"/>
+                <a:ea typeface="NanumSquare Neo Regular" pitchFamily="2" charset="-127"/>
+              </a:rPr>
+              <a:t>(LSTM·NCDE </a:t>
+            </a:r>
+            <a:r>
+              <a:rPr sz="1050" b="0" dirty="0" err="1">
+                <a:solidFill>
+                  <a:srgbClr val="262626"/>
+                </a:solidFill>
+                <a:latin typeface="NanumSquare Neo Regular" pitchFamily="2" charset="-127"/>
+                <a:ea typeface="NanumSquare Neo Regular" pitchFamily="2" charset="-127"/>
+              </a:rPr>
+              <a:t>등</a:t>
+            </a:r>
+            <a:r>
+              <a:rPr sz="1050" b="0" dirty="0">
+                <a:solidFill>
+                  <a:srgbClr val="262626"/>
+                </a:solidFill>
+                <a:latin typeface="NanumSquare Neo Regular" pitchFamily="2" charset="-127"/>
+                <a:ea typeface="NanumSquare Neo Regular" pitchFamily="2" charset="-127"/>
+              </a:rPr>
+              <a:t>): </a:t>
+            </a:r>
+            <a:r>
+              <a:rPr sz="1050" b="1" dirty="0" err="1">
                 <a:solidFill>
                   <a:srgbClr val="B0532F"/>
                 </a:solidFill>
-                <a:latin typeface="Apple SD Gothic Neo"/>
-                <a:ea typeface="Apple SD Gothic Neo"/>
-              </a:rPr>
-              <a:t>전부 기각</a:t>
-            </a:r>
+                <a:latin typeface="NanumSquare Neo Regular" pitchFamily="2" charset="-127"/>
+                <a:ea typeface="NanumSquare Neo Regular" pitchFamily="2" charset="-127"/>
+              </a:rPr>
+              <a:t>전부</a:t>
+            </a:r>
+            <a:r>
+              <a:rPr sz="1050" b="1" dirty="0">
+                <a:solidFill>
+                  <a:srgbClr val="B0532F"/>
+                </a:solidFill>
+                <a:latin typeface="NanumSquare Neo Regular" pitchFamily="2" charset="-127"/>
+                <a:ea typeface="NanumSquare Neo Regular" pitchFamily="2" charset="-127"/>
+              </a:rPr>
+              <a:t> </a:t>
+            </a:r>
+            <a:r>
+              <a:rPr sz="1050" b="1" dirty="0" err="1">
+                <a:solidFill>
+                  <a:srgbClr val="B0532F"/>
+                </a:solidFill>
+                <a:latin typeface="NanumSquare Neo Regular" pitchFamily="2" charset="-127"/>
+                <a:ea typeface="NanumSquare Neo Regular" pitchFamily="2" charset="-127"/>
+              </a:rPr>
+              <a:t>기각</a:t>
+            </a:r>
+            <a:endParaRPr sz="1050" b="1" dirty="0">
+              <a:solidFill>
+                <a:srgbClr val="B0532F"/>
+              </a:solidFill>
+              <a:latin typeface="NanumSquare Neo Regular" pitchFamily="2" charset="-127"/>
+              <a:ea typeface="NanumSquare Neo Regular" pitchFamily="2" charset="-127"/>
+            </a:endParaRPr>
           </a:p>
           <a:p>
             <a:pPr algn="l">
@@ -7530,15 +9411,92 @@
               </a:spcAft>
             </a:pPr>
             <a:r>
-              <a:rPr sz="950" b="0">
+              <a:rPr sz="950" b="0" dirty="0">
                 <a:solidFill>
                   <a:srgbClr val="6B6B6B"/>
                 </a:solidFill>
-                <a:latin typeface="Apple SD Gothic Neo"/>
-                <a:ea typeface="Apple SD Gothic Neo"/>
-              </a:rPr>
-              <a:t>  — 월 140개 관측치로는 과적합 불가피</a:t>
-            </a:r>
+                <a:latin typeface="NanumSquare Neo Regular" pitchFamily="2" charset="-127"/>
+                <a:ea typeface="NanumSquare Neo Regular" pitchFamily="2" charset="-127"/>
+              </a:rPr>
+              <a:t>  — </a:t>
+            </a:r>
+            <a:r>
+              <a:rPr sz="950" b="0" dirty="0" err="1">
+                <a:solidFill>
+                  <a:srgbClr val="6B6B6B"/>
+                </a:solidFill>
+                <a:latin typeface="NanumSquare Neo Regular" pitchFamily="2" charset="-127"/>
+                <a:ea typeface="NanumSquare Neo Regular" pitchFamily="2" charset="-127"/>
+              </a:rPr>
+              <a:t>월</a:t>
+            </a:r>
+            <a:r>
+              <a:rPr sz="950" b="0" dirty="0">
+                <a:solidFill>
+                  <a:srgbClr val="6B6B6B"/>
+                </a:solidFill>
+                <a:latin typeface="NanumSquare Neo Regular" pitchFamily="2" charset="-127"/>
+                <a:ea typeface="NanumSquare Neo Regular" pitchFamily="2" charset="-127"/>
+              </a:rPr>
+              <a:t> 140개 </a:t>
+            </a:r>
+            <a:r>
+              <a:rPr sz="950" b="0" dirty="0" err="1">
+                <a:solidFill>
+                  <a:srgbClr val="6B6B6B"/>
+                </a:solidFill>
+                <a:latin typeface="NanumSquare Neo Regular" pitchFamily="2" charset="-127"/>
+                <a:ea typeface="NanumSquare Neo Regular" pitchFamily="2" charset="-127"/>
+              </a:rPr>
+              <a:t>관측치로는</a:t>
+            </a:r>
+            <a:r>
+              <a:rPr sz="950" b="0" dirty="0">
+                <a:solidFill>
+                  <a:srgbClr val="6B6B6B"/>
+                </a:solidFill>
+                <a:latin typeface="NanumSquare Neo Regular" pitchFamily="2" charset="-127"/>
+                <a:ea typeface="NanumSquare Neo Regular" pitchFamily="2" charset="-127"/>
+              </a:rPr>
+              <a:t> </a:t>
+            </a:r>
+            <a:r>
+              <a:rPr sz="950" b="0" dirty="0" err="1">
+                <a:solidFill>
+                  <a:srgbClr val="6B6B6B"/>
+                </a:solidFill>
+                <a:latin typeface="NanumSquare Neo Regular" pitchFamily="2" charset="-127"/>
+                <a:ea typeface="NanumSquare Neo Regular" pitchFamily="2" charset="-127"/>
+              </a:rPr>
+              <a:t>과적합</a:t>
+            </a:r>
+            <a:r>
+              <a:rPr sz="950" b="0" dirty="0">
+                <a:solidFill>
+                  <a:srgbClr val="6B6B6B"/>
+                </a:solidFill>
+                <a:latin typeface="NanumSquare Neo Regular" pitchFamily="2" charset="-127"/>
+                <a:ea typeface="NanumSquare Neo Regular" pitchFamily="2" charset="-127"/>
+              </a:rPr>
+              <a:t> </a:t>
+            </a:r>
+            <a:r>
+              <a:rPr sz="950" b="0" dirty="0" err="1">
+                <a:solidFill>
+                  <a:srgbClr val="6B6B6B"/>
+                </a:solidFill>
+                <a:latin typeface="NanumSquare Neo Regular" pitchFamily="2" charset="-127"/>
+                <a:ea typeface="NanumSquare Neo Regular" pitchFamily="2" charset="-127"/>
+              </a:rPr>
+              <a:t>불가피</a:t>
+            </a:r>
+            <a:endParaRPr sz="950" b="0" dirty="0">
+              <a:solidFill>
+                <a:srgbClr val="6B6B6B"/>
+              </a:solidFill>
+              <a:latin typeface="NanumSquare Neo Regular" pitchFamily="2" charset="-127"/>
+              <a:ea typeface="NanumSquare Neo Regular" pitchFamily="2" charset="-127"/>
+            </a:endParaRPr>
           </a:p>
           <a:p>
             <a:pPr algn="l">
@@ -7547,25 +9505,72 @@
               </a:spcAft>
             </a:pPr>
             <a:r>
-              <a:rPr sz="1050" b="0">
+              <a:rPr sz="1050" b="0" dirty="0">
                 <a:solidFill>
                   <a:srgbClr val="262626"/>
                 </a:solidFill>
-                <a:latin typeface="Apple SD Gothic Neo"/>
-                <a:ea typeface="Apple SD Gothic Neo"/>
-              </a:rPr>
-              <a:t>· 사전학습 모델(TTM·TabPFN·Chronos-2): </a:t>
-            </a:r>
-            <a:r>
-              <a:rPr sz="1050" b="1">
+                <a:latin typeface="NanumSquare Neo Regular" pitchFamily="2" charset="-127"/>
+                <a:ea typeface="NanumSquare Neo Regular" pitchFamily="2" charset="-127"/>
+              </a:rPr>
+              <a:t>· </a:t>
+            </a:r>
+            <a:r>
+              <a:rPr sz="1050" b="0" dirty="0" err="1">
+                <a:solidFill>
+                  <a:srgbClr val="262626"/>
+                </a:solidFill>
+                <a:latin typeface="NanumSquare Neo Regular" pitchFamily="2" charset="-127"/>
+                <a:ea typeface="NanumSquare Neo Regular" pitchFamily="2" charset="-127"/>
+              </a:rPr>
+              <a:t>사전학습</a:t>
+            </a:r>
+            <a:r>
+              <a:rPr sz="1050" b="0" dirty="0">
+                <a:solidFill>
+                  <a:srgbClr val="262626"/>
+                </a:solidFill>
+                <a:latin typeface="NanumSquare Neo Regular" pitchFamily="2" charset="-127"/>
+                <a:ea typeface="NanumSquare Neo Regular" pitchFamily="2" charset="-127"/>
+              </a:rPr>
+              <a:t> </a:t>
+            </a:r>
+            <a:r>
+              <a:rPr sz="1050" b="0" dirty="0" err="1">
+                <a:solidFill>
+                  <a:srgbClr val="262626"/>
+                </a:solidFill>
+                <a:latin typeface="NanumSquare Neo Regular" pitchFamily="2" charset="-127"/>
+                <a:ea typeface="NanumSquare Neo Regular" pitchFamily="2" charset="-127"/>
+              </a:rPr>
+              <a:t>모델</a:t>
+            </a:r>
+            <a:r>
+              <a:rPr sz="1050" b="0" dirty="0">
+                <a:solidFill>
+                  <a:srgbClr val="262626"/>
+                </a:solidFill>
+                <a:latin typeface="NanumSquare Neo Regular" pitchFamily="2" charset="-127"/>
+                <a:ea typeface="NanumSquare Neo Regular" pitchFamily="2" charset="-127"/>
+              </a:rPr>
+              <a:t>(TTM·TabPFN·Chronos-2): </a:t>
+            </a:r>
+            <a:r>
+              <a:rPr sz="1050" b="1" dirty="0" err="1">
                 <a:solidFill>
                   <a:srgbClr val="008A3E"/>
                 </a:solidFill>
-                <a:latin typeface="Apple SD Gothic Neo"/>
-                <a:ea typeface="Apple SD Gothic Neo"/>
+                <a:latin typeface="NanumSquare Neo Regular" pitchFamily="2" charset="-127"/>
+                <a:ea typeface="NanumSquare Neo Regular" pitchFamily="2" charset="-127"/>
               </a:rPr>
               <a:t>유효</a:t>
             </a:r>
+            <a:endParaRPr sz="1050" b="1" dirty="0">
+              <a:solidFill>
+                <a:srgbClr val="008A3E"/>
+              </a:solidFill>
+              <a:latin typeface="NanumSquare Neo Regular" pitchFamily="2" charset="-127"/>
+              <a:ea typeface="NanumSquare Neo Regular" pitchFamily="2" charset="-127"/>
+            </a:endParaRPr>
           </a:p>
           <a:p>
             <a:pPr algn="l">
@@ -7574,15 +9579,152 @@
               </a:spcAft>
             </a:pPr>
             <a:r>
-              <a:rPr sz="950" b="0">
+              <a:rPr sz="950" b="0" dirty="0">
                 <a:solidFill>
                   <a:srgbClr val="6B6B6B"/>
                 </a:solidFill>
-                <a:latin typeface="Apple SD Gothic Neo"/>
-                <a:ea typeface="Apple SD Gothic Neo"/>
-              </a:rPr>
-              <a:t>  — 외부 지식 + 우리 데이터 소량 결합이 관건</a:t>
-            </a:r>
+                <a:latin typeface="NanumSquare Neo Regular" pitchFamily="2" charset="-127"/>
+                <a:ea typeface="NanumSquare Neo Regular" pitchFamily="2" charset="-127"/>
+              </a:rPr>
+              <a:t>  — </a:t>
+            </a:r>
+            <a:r>
+              <a:rPr sz="950" b="0" dirty="0" err="1">
+                <a:solidFill>
+                  <a:srgbClr val="6B6B6B"/>
+                </a:solidFill>
+                <a:latin typeface="NanumSquare Neo Regular" pitchFamily="2" charset="-127"/>
+                <a:ea typeface="NanumSquare Neo Regular" pitchFamily="2" charset="-127"/>
+              </a:rPr>
+              <a:t>외부</a:t>
+            </a:r>
+            <a:r>
+              <a:rPr sz="950" b="0" dirty="0">
+                <a:solidFill>
+                  <a:srgbClr val="6B6B6B"/>
+                </a:solidFill>
+                <a:latin typeface="NanumSquare Neo Regular" pitchFamily="2" charset="-127"/>
+                <a:ea typeface="NanumSquare Neo Regular" pitchFamily="2" charset="-127"/>
+              </a:rPr>
+              <a:t> </a:t>
+            </a:r>
+            <a:r>
+              <a:rPr sz="950" b="0" dirty="0" err="1">
+                <a:solidFill>
+                  <a:srgbClr val="6B6B6B"/>
+                </a:solidFill>
+                <a:latin typeface="NanumSquare Neo Regular" pitchFamily="2" charset="-127"/>
+                <a:ea typeface="NanumSquare Neo Regular" pitchFamily="2" charset="-127"/>
+              </a:rPr>
+              <a:t>지식</a:t>
+            </a:r>
+            <a:r>
+              <a:rPr sz="950" b="0" dirty="0">
+                <a:solidFill>
+                  <a:srgbClr val="6B6B6B"/>
+                </a:solidFill>
+                <a:latin typeface="NanumSquare Neo Regular" pitchFamily="2" charset="-127"/>
+                <a:ea typeface="NanumSquare Neo Regular" pitchFamily="2" charset="-127"/>
+              </a:rPr>
+              <a:t> + </a:t>
+            </a:r>
+            <a:r>
+              <a:rPr sz="950" b="0" dirty="0" err="1">
+                <a:solidFill>
+                  <a:srgbClr val="6B6B6B"/>
+                </a:solidFill>
+                <a:latin typeface="NanumSquare Neo Regular" pitchFamily="2" charset="-127"/>
+                <a:ea typeface="NanumSquare Neo Regular" pitchFamily="2" charset="-127"/>
+              </a:rPr>
+              <a:t>우리</a:t>
+            </a:r>
+            <a:r>
+              <a:rPr sz="950" b="0" dirty="0">
+                <a:solidFill>
+                  <a:srgbClr val="6B6B6B"/>
+                </a:solidFill>
+                <a:latin typeface="NanumSquare Neo Regular" pitchFamily="2" charset="-127"/>
+                <a:ea typeface="NanumSquare Neo Regular" pitchFamily="2" charset="-127"/>
+              </a:rPr>
+              <a:t> </a:t>
+            </a:r>
+            <a:r>
+              <a:rPr sz="950" b="0" dirty="0" err="1">
+                <a:solidFill>
+                  <a:srgbClr val="6B6B6B"/>
+                </a:solidFill>
+                <a:latin typeface="NanumSquare Neo Regular" pitchFamily="2" charset="-127"/>
+                <a:ea typeface="NanumSquare Neo Regular" pitchFamily="2" charset="-127"/>
+              </a:rPr>
+              <a:t>데이터</a:t>
+            </a:r>
+            <a:r>
+              <a:rPr sz="950" b="0" dirty="0">
+                <a:solidFill>
+                  <a:srgbClr val="6B6B6B"/>
+                </a:solidFill>
+                <a:latin typeface="NanumSquare Neo Regular" pitchFamily="2" charset="-127"/>
+                <a:ea typeface="NanumSquare Neo Regular" pitchFamily="2" charset="-127"/>
+              </a:rPr>
+              <a:t> </a:t>
+            </a:r>
+            <a:r>
+              <a:rPr sz="950" b="0" dirty="0" err="1">
+                <a:solidFill>
+                  <a:srgbClr val="6B6B6B"/>
+                </a:solidFill>
+                <a:latin typeface="NanumSquare Neo Regular" pitchFamily="2" charset="-127"/>
+                <a:ea typeface="NanumSquare Neo Regular" pitchFamily="2" charset="-127"/>
+              </a:rPr>
+              <a:t>소량</a:t>
+            </a:r>
+            <a:r>
+              <a:rPr sz="950" b="0" dirty="0">
+                <a:solidFill>
+                  <a:srgbClr val="6B6B6B"/>
+                </a:solidFill>
+                <a:latin typeface="NanumSquare Neo Regular" pitchFamily="2" charset="-127"/>
+                <a:ea typeface="NanumSquare Neo Regular" pitchFamily="2" charset="-127"/>
+              </a:rPr>
+              <a:t> </a:t>
+            </a:r>
+            <a:r>
+              <a:rPr sz="950" b="0" dirty="0" err="1">
+                <a:solidFill>
+                  <a:srgbClr val="6B6B6B"/>
+                </a:solidFill>
+                <a:latin typeface="NanumSquare Neo Regular" pitchFamily="2" charset="-127"/>
+                <a:ea typeface="NanumSquare Neo Regular" pitchFamily="2" charset="-127"/>
+              </a:rPr>
+              <a:t>결합이</a:t>
+            </a:r>
+            <a:r>
+              <a:rPr sz="950" b="0" dirty="0">
+                <a:solidFill>
+                  <a:srgbClr val="6B6B6B"/>
+                </a:solidFill>
+                <a:latin typeface="NanumSquare Neo Regular" pitchFamily="2" charset="-127"/>
+                <a:ea typeface="NanumSquare Neo Regular" pitchFamily="2" charset="-127"/>
+              </a:rPr>
+              <a:t> </a:t>
+            </a:r>
+            <a:r>
+              <a:rPr sz="950" b="0" dirty="0" err="1">
+                <a:solidFill>
+                  <a:srgbClr val="6B6B6B"/>
+                </a:solidFill>
+                <a:latin typeface="NanumSquare Neo Regular" pitchFamily="2" charset="-127"/>
+                <a:ea typeface="NanumSquare Neo Regular" pitchFamily="2" charset="-127"/>
+              </a:rPr>
+              <a:t>관건</a:t>
+            </a:r>
+            <a:endParaRPr sz="950" b="0" dirty="0">
+              <a:solidFill>
+                <a:srgbClr val="6B6B6B"/>
+              </a:solidFill>
+              <a:latin typeface="NanumSquare Neo Regular" pitchFamily="2" charset="-127"/>
+              <a:ea typeface="NanumSquare Neo Regular" pitchFamily="2" charset="-127"/>
+            </a:endParaRPr>
           </a:p>
           <a:p>
             <a:pPr algn="l">
@@ -7591,22 +9733,142 @@
               </a:spcAft>
             </a:pPr>
             <a:r>
-              <a:rPr sz="1050" b="0">
+              <a:rPr sz="1050" b="0" dirty="0">
                 <a:solidFill>
                   <a:srgbClr val="262626"/>
                 </a:solidFill>
-                <a:latin typeface="Apple SD Gothic Neo"/>
-                <a:ea typeface="Apple SD Gothic Neo"/>
-              </a:rPr>
-              <a:t>· 일별 신호 결합 시 추가 개선: 0.836 → </a:t>
-            </a:r>
-            <a:r>
-              <a:rPr sz="1100" b="1">
+                <a:latin typeface="NanumSquare Neo Regular" pitchFamily="2" charset="-127"/>
+                <a:ea typeface="NanumSquare Neo Regular" pitchFamily="2" charset="-127"/>
+              </a:rPr>
+              <a:t>· </a:t>
+            </a:r>
+            <a:r>
+              <a:rPr sz="1050" b="0" dirty="0" err="1">
+                <a:solidFill>
+                  <a:srgbClr val="262626"/>
+                </a:solidFill>
+                <a:latin typeface="NanumSquare Neo Regular" pitchFamily="2" charset="-127"/>
+                <a:ea typeface="NanumSquare Neo Regular" pitchFamily="2" charset="-127"/>
+              </a:rPr>
+              <a:t>일별</a:t>
+            </a:r>
+            <a:r>
+              <a:rPr sz="1050" b="0" dirty="0">
+                <a:solidFill>
+                  <a:srgbClr val="262626"/>
+                </a:solidFill>
+                <a:latin typeface="NanumSquare Neo Regular" pitchFamily="2" charset="-127"/>
+                <a:ea typeface="NanumSquare Neo Regular" pitchFamily="2" charset="-127"/>
+              </a:rPr>
+              <a:t> </a:t>
+            </a:r>
+            <a:r>
+              <a:rPr sz="1050" b="0" dirty="0" err="1">
+                <a:solidFill>
+                  <a:srgbClr val="262626"/>
+                </a:solidFill>
+                <a:latin typeface="NanumSquare Neo Regular" pitchFamily="2" charset="-127"/>
+                <a:ea typeface="NanumSquare Neo Regular" pitchFamily="2" charset="-127"/>
+              </a:rPr>
+              <a:t>신호</a:t>
+            </a:r>
+            <a:r>
+              <a:rPr sz="1050" b="0" dirty="0">
+                <a:solidFill>
+                  <a:srgbClr val="262626"/>
+                </a:solidFill>
+                <a:latin typeface="NanumSquare Neo Regular" pitchFamily="2" charset="-127"/>
+                <a:ea typeface="NanumSquare Neo Regular" pitchFamily="2" charset="-127"/>
+              </a:rPr>
+              <a:t> </a:t>
+            </a:r>
+            <a:r>
+              <a:rPr sz="1050" b="0" dirty="0" err="1">
+                <a:solidFill>
+                  <a:srgbClr val="262626"/>
+                </a:solidFill>
+                <a:latin typeface="NanumSquare Neo Regular" pitchFamily="2" charset="-127"/>
+                <a:ea typeface="NanumSquare Neo Regular" pitchFamily="2" charset="-127"/>
+              </a:rPr>
+              <a:t>결합</a:t>
+            </a:r>
+            <a:r>
+              <a:rPr sz="1050" b="0" dirty="0">
+                <a:solidFill>
+                  <a:srgbClr val="262626"/>
+                </a:solidFill>
+                <a:latin typeface="NanumSquare Neo Regular" pitchFamily="2" charset="-127"/>
+                <a:ea typeface="NanumSquare Neo Regular" pitchFamily="2" charset="-127"/>
+              </a:rPr>
+              <a:t> </a:t>
+            </a:r>
+            <a:r>
+              <a:rPr sz="1050" b="0" dirty="0" err="1">
+                <a:solidFill>
+                  <a:srgbClr val="262626"/>
+                </a:solidFill>
+                <a:latin typeface="NanumSquare Neo Regular" pitchFamily="2" charset="-127"/>
+                <a:ea typeface="NanumSquare Neo Regular" pitchFamily="2" charset="-127"/>
+              </a:rPr>
+              <a:t>시</a:t>
+            </a:r>
+            <a:r>
+              <a:rPr sz="1050" b="0" dirty="0">
+                <a:solidFill>
+                  <a:srgbClr val="262626"/>
+                </a:solidFill>
+                <a:latin typeface="NanumSquare Neo Regular" pitchFamily="2" charset="-127"/>
+                <a:ea typeface="NanumSquare Neo Regular" pitchFamily="2" charset="-127"/>
+              </a:rPr>
+              <a:t> </a:t>
+            </a:r>
+            <a:r>
+              <a:rPr sz="1050" b="0" dirty="0" err="1">
+                <a:solidFill>
+                  <a:srgbClr val="262626"/>
+                </a:solidFill>
+                <a:latin typeface="NanumSquare Neo Regular" pitchFamily="2" charset="-127"/>
+                <a:ea typeface="NanumSquare Neo Regular" pitchFamily="2" charset="-127"/>
+              </a:rPr>
+              <a:t>추가</a:t>
+            </a:r>
+            <a:r>
+              <a:rPr sz="1050" b="0" dirty="0">
+                <a:solidFill>
+                  <a:srgbClr val="262626"/>
+                </a:solidFill>
+                <a:latin typeface="NanumSquare Neo Regular" pitchFamily="2" charset="-127"/>
+                <a:ea typeface="NanumSquare Neo Regular" pitchFamily="2" charset="-127"/>
+              </a:rPr>
+              <a:t> </a:t>
+            </a:r>
+            <a:r>
+              <a:rPr sz="1050" b="0" dirty="0" err="1">
+                <a:solidFill>
+                  <a:srgbClr val="262626"/>
+                </a:solidFill>
+                <a:latin typeface="NanumSquare Neo Regular" pitchFamily="2" charset="-127"/>
+                <a:ea typeface="NanumSquare Neo Regular" pitchFamily="2" charset="-127"/>
+              </a:rPr>
+              <a:t>개선</a:t>
+            </a:r>
+            <a:r>
+              <a:rPr sz="1050" b="0" dirty="0">
+                <a:solidFill>
+                  <a:srgbClr val="262626"/>
+                </a:solidFill>
+                <a:latin typeface="NanumSquare Neo Regular" pitchFamily="2" charset="-127"/>
+                <a:ea typeface="NanumSquare Neo Regular" pitchFamily="2" charset="-127"/>
+              </a:rPr>
+              <a:t>: 0.836 → </a:t>
+            </a:r>
+            <a:r>
+              <a:rPr sz="1100" b="1" dirty="0">
                 <a:solidFill>
                   <a:srgbClr val="008A3E"/>
                 </a:solidFill>
-                <a:latin typeface="Apple SD Gothic Neo"/>
-                <a:ea typeface="Apple SD Gothic Neo"/>
+                <a:latin typeface="NanumSquare Neo Regular" pitchFamily="2" charset="-127"/>
+                <a:ea typeface="NanumSquare Neo Regular" pitchFamily="2" charset="-127"/>
               </a:rPr>
               <a:t>0.808</a:t>
             </a:r>
@@ -7618,15 +9880,92 @@
               </a:spcAft>
             </a:pPr>
             <a:r>
-              <a:rPr sz="950" b="0">
+              <a:rPr sz="950" b="0" dirty="0">
                 <a:solidFill>
                   <a:srgbClr val="6B6B6B"/>
                 </a:solidFill>
-                <a:latin typeface="Apple SD Gothic Neo"/>
-                <a:ea typeface="Apple SD Gothic Neo"/>
-              </a:rPr>
-              <a:t>  — KOSPI·원달러(당일 확정·무개정) + ESI 원지수</a:t>
-            </a:r>
+                <a:latin typeface="NanumSquare Neo Regular" pitchFamily="2" charset="-127"/>
+                <a:ea typeface="NanumSquare Neo Regular" pitchFamily="2" charset="-127"/>
+              </a:rPr>
+              <a:t>  — </a:t>
+            </a:r>
+            <a:r>
+              <a:rPr sz="950" b="0" dirty="0" err="1">
+                <a:solidFill>
+                  <a:srgbClr val="6B6B6B"/>
+                </a:solidFill>
+                <a:latin typeface="NanumSquare Neo Regular" pitchFamily="2" charset="-127"/>
+                <a:ea typeface="NanumSquare Neo Regular" pitchFamily="2" charset="-127"/>
+              </a:rPr>
+              <a:t>KOSPI·원달러</a:t>
+            </a:r>
+            <a:r>
+              <a:rPr sz="950" b="0" dirty="0">
+                <a:solidFill>
+                  <a:srgbClr val="6B6B6B"/>
+                </a:solidFill>
+                <a:latin typeface="NanumSquare Neo Regular" pitchFamily="2" charset="-127"/>
+                <a:ea typeface="NanumSquare Neo Regular" pitchFamily="2" charset="-127"/>
+              </a:rPr>
+              <a:t>(</a:t>
+            </a:r>
+            <a:r>
+              <a:rPr sz="950" b="0" dirty="0" err="1">
+                <a:solidFill>
+                  <a:srgbClr val="6B6B6B"/>
+                </a:solidFill>
+                <a:latin typeface="NanumSquare Neo Regular" pitchFamily="2" charset="-127"/>
+                <a:ea typeface="NanumSquare Neo Regular" pitchFamily="2" charset="-127"/>
+              </a:rPr>
+              <a:t>당일</a:t>
+            </a:r>
+            <a:r>
+              <a:rPr sz="950" b="0" dirty="0">
+                <a:solidFill>
+                  <a:srgbClr val="6B6B6B"/>
+                </a:solidFill>
+                <a:latin typeface="NanumSquare Neo Regular" pitchFamily="2" charset="-127"/>
+                <a:ea typeface="NanumSquare Neo Regular" pitchFamily="2" charset="-127"/>
+              </a:rPr>
+              <a:t> </a:t>
+            </a:r>
+            <a:r>
+              <a:rPr sz="950" b="0" dirty="0" err="1">
+                <a:solidFill>
+                  <a:srgbClr val="6B6B6B"/>
+                </a:solidFill>
+                <a:latin typeface="NanumSquare Neo Regular" pitchFamily="2" charset="-127"/>
+                <a:ea typeface="NanumSquare Neo Regular" pitchFamily="2" charset="-127"/>
+              </a:rPr>
+              <a:t>확정·무개정</a:t>
+            </a:r>
+            <a:r>
+              <a:rPr sz="950" b="0" dirty="0">
+                <a:solidFill>
+                  <a:srgbClr val="6B6B6B"/>
+                </a:solidFill>
+                <a:latin typeface="NanumSquare Neo Regular" pitchFamily="2" charset="-127"/>
+                <a:ea typeface="NanumSquare Neo Regular" pitchFamily="2" charset="-127"/>
+              </a:rPr>
+              <a:t>) + ESI </a:t>
+            </a:r>
+            <a:r>
+              <a:rPr sz="950" b="0" dirty="0" err="1">
+                <a:solidFill>
+                  <a:srgbClr val="6B6B6B"/>
+                </a:solidFill>
+                <a:latin typeface="NanumSquare Neo Regular" pitchFamily="2" charset="-127"/>
+                <a:ea typeface="NanumSquare Neo Regular" pitchFamily="2" charset="-127"/>
+              </a:rPr>
+              <a:t>원지수</a:t>
+            </a:r>
+            <a:endParaRPr sz="950" b="0" dirty="0">
+              <a:solidFill>
+                <a:srgbClr val="6B6B6B"/>
+              </a:solidFill>
+              <a:latin typeface="NanumSquare Neo Regular" pitchFamily="2" charset="-127"/>
+              <a:ea typeface="NanumSquare Neo Regular" pitchFamily="2" charset="-127"/>
+            </a:endParaRPr>
           </a:p>
         </p:txBody>
       </p:sp>
@@ -7673,6 +10012,10 @@
           <a:lstStyle/>
           <a:p>
             <a:pPr algn="ctr"/>
+            <a:endParaRPr>
+              <a:latin typeface="NanumSquare Neo Regular" pitchFamily="2" charset="-127"/>
+              <a:ea typeface="NanumSquare Neo Regular" pitchFamily="2" charset="-127"/>
+            </a:endParaRPr>
           </a:p>
         </p:txBody>
       </p:sp>
@@ -7685,7 +10028,7 @@
         <p:spPr>
           <a:xfrm>
             <a:off x="704088" y="3794760"/>
-            <a:ext cx="5029200" cy="1508760"/>
+            <a:ext cx="5029200" cy="998735"/>
           </a:xfrm>
           <a:prstGeom prst="rect">
             <a:avLst/>
@@ -7693,7 +10036,7 @@
           <a:noFill/>
         </p:spPr>
         <p:txBody>
-          <a:bodyPr wrap="square" anchor="t" lIns="45720" rIns="45720" tIns="18288" bIns="18288">
+          <a:bodyPr wrap="square" lIns="45720" tIns="18288" rIns="45720" bIns="18288" anchor="t">
             <a:spAutoFit/>
           </a:bodyPr>
           <a:lstStyle/>
@@ -7708,8 +10051,8 @@
                 <a:solidFill>
                   <a:srgbClr val="008A3E"/>
                 </a:solidFill>
-                <a:latin typeface="Apple SD Gothic Neo"/>
-                <a:ea typeface="Apple SD Gothic Neo"/>
+                <a:latin typeface="NanumSquare Neo Regular" pitchFamily="2" charset="-127"/>
+                <a:ea typeface="NanumSquare Neo Regular" pitchFamily="2" charset="-127"/>
               </a:rPr>
               <a:t>주목할 결과 — 반등 국면</a:t>
             </a:r>
@@ -7725,8 +10068,8 @@
                 <a:solidFill>
                   <a:srgbClr val="262626"/>
                 </a:solidFill>
-                <a:latin typeface="Apple SD Gothic Neo"/>
-                <a:ea typeface="Apple SD Gothic Neo"/>
+                <a:latin typeface="NanumSquare Neo Regular" pitchFamily="2" charset="-127"/>
+                <a:ea typeface="NanumSquare Neo Regular" pitchFamily="2" charset="-127"/>
               </a:rPr>
               <a:t>경기 저점 통과 후 반등 분기 6개 평균에서</a:t>
             </a:r>
@@ -7742,8 +10085,8 @@
                 <a:solidFill>
                   <a:srgbClr val="262626"/>
                 </a:solidFill>
-                <a:latin typeface="Apple SD Gothic Neo"/>
-                <a:ea typeface="Apple SD Gothic Neo"/>
+                <a:latin typeface="NanumSquare Neo Regular" pitchFamily="2" charset="-127"/>
+                <a:ea typeface="NanumSquare Neo Regular" pitchFamily="2" charset="-127"/>
               </a:rPr>
               <a:t>사전학습 모델(0.581)이 DFM(0.621)을 상회 —</a:t>
             </a:r>
@@ -7759,8 +10102,8 @@
                 <a:solidFill>
                   <a:srgbClr val="262626"/>
                 </a:solidFill>
-                <a:latin typeface="Apple SD Gothic Neo"/>
-                <a:ea typeface="Apple SD Gothic Neo"/>
+                <a:latin typeface="NanumSquare Neo Regular" pitchFamily="2" charset="-127"/>
+                <a:ea typeface="NanumSquare Neo Regular" pitchFamily="2" charset="-127"/>
               </a:rPr>
               <a:t>빠른 금융·심리 신호가 공식 지표의 공백을 보완.</a:t>
             </a:r>
@@ -7776,8 +10119,8 @@
                 <a:solidFill>
                   <a:srgbClr val="6B6B6B"/>
                 </a:solidFill>
-                <a:latin typeface="Apple SD Gothic Neo"/>
-                <a:ea typeface="Apple SD Gothic Neo"/>
+                <a:latin typeface="NanumSquare Neo Regular" pitchFamily="2" charset="-127"/>
+                <a:ea typeface="NanumSquare Neo Regular" pitchFamily="2" charset="-127"/>
               </a:rPr>
               <a:t>우측: 2020년 사례 — 일별 지표가 반등을 먼저 포착</a:t>
             </a:r>
@@ -7793,7 +10136,7 @@
           <p:nvPr/>
         </p:nvPicPr>
         <p:blipFill>
-          <a:blip r:embed="rId2"/>
+          <a:blip r:embed="rId3"/>
           <a:stretch>
             <a:fillRect/>
           </a:stretch>
@@ -7851,6 +10194,10 @@
           <a:lstStyle/>
           <a:p>
             <a:pPr algn="ctr"/>
+            <a:endParaRPr>
+              <a:latin typeface="NanumSquare Neo Regular" pitchFamily="2" charset="-127"/>
+              <a:ea typeface="NanumSquare Neo Regular" pitchFamily="2" charset="-127"/>
+            </a:endParaRPr>
           </a:p>
         </p:txBody>
       </p:sp>
@@ -7862,8 +10209,8 @@
         </p:nvSpPr>
         <p:spPr>
           <a:xfrm>
-            <a:off x="685800" y="6364224"/>
-            <a:ext cx="10881360" cy="256032"/>
+            <a:off x="685800" y="6406062"/>
+            <a:ext cx="10881360" cy="172355"/>
           </a:xfrm>
           <a:prstGeom prst="rect">
             <a:avLst/>
@@ -7871,7 +10218,7 @@
           <a:noFill/>
         </p:spPr>
         <p:txBody>
-          <a:bodyPr wrap="square" anchor="ctr" lIns="45720" rIns="45720" tIns="18288" bIns="18288">
+          <a:bodyPr wrap="square" lIns="45720" tIns="18288" rIns="45720" bIns="18288" anchor="ctr">
             <a:spAutoFit/>
           </a:bodyPr>
           <a:lstStyle/>
@@ -7886,8 +10233,8 @@
                 <a:solidFill>
                   <a:srgbClr val="6B6B6B"/>
                 </a:solidFill>
-                <a:latin typeface="Apple SD Gothic Neo"/>
-                <a:ea typeface="Apple SD Gothic Neo"/>
+                <a:latin typeface="NanumSquare Neo Regular" pitchFamily="2" charset="-127"/>
+                <a:ea typeface="NanumSquare Neo Regular" pitchFamily="2" charset="-127"/>
               </a:rPr>
               <a:t>반등 분기 6개: 2018Q1 · 2019Q2 · 2020Q3 · 2023Q1 · 2024Q3 · 2025Q2 (직전 분기 속보 음(-) 및 심리지표 저점 통과 기준)</a:t>
             </a:r>
@@ -7903,7 +10250,7 @@
 </file>
 
 <file path=ppt/slides/slide6.xml><?xml version="1.0" encoding="utf-8"?>
-<p:sld xmlns:a="http://schemas.openxmlformats.org/drawingml/2006/main" xmlns:p="http://schemas.openxmlformats.org/presentationml/2006/main" xmlns:r="http://schemas.openxmlformats.org/officeDocument/2006/relationships">
+<p:sld xmlns:a="http://schemas.openxmlformats.org/drawingml/2006/main" xmlns:r="http://schemas.openxmlformats.org/officeDocument/2006/relationships" xmlns:p="http://schemas.openxmlformats.org/presentationml/2006/main">
   <p:cSld>
     <p:spTree>
       <p:nvGrpSpPr>
@@ -7911,7 +10258,14 @@
         <p:cNvGrpSpPr/>
         <p:nvPr/>
       </p:nvGrpSpPr>
-      <p:grpSpPr/>
+      <p:grpSpPr>
+        <a:xfrm>
+          <a:off x="0" y="0"/>
+          <a:ext cx="0" cy="0"/>
+          <a:chOff x="0" y="0"/>
+          <a:chExt cx="0" cy="0"/>
+        </a:xfrm>
+      </p:grpSpPr>
       <p:sp>
         <p:nvSpPr>
           <p:cNvPr id="2" name="TextBox 1"/>
@@ -7921,7 +10275,7 @@
         <p:spPr>
           <a:xfrm>
             <a:off x="502920" y="274320"/>
-            <a:ext cx="11155680" cy="502920"/>
+            <a:ext cx="11155680" cy="329321"/>
           </a:xfrm>
           <a:prstGeom prst="rect">
             <a:avLst/>
@@ -7929,7 +10283,7 @@
           <a:noFill/>
         </p:spPr>
         <p:txBody>
-          <a:bodyPr wrap="square" anchor="t" lIns="45720" rIns="45720" tIns="18288" bIns="18288">
+          <a:bodyPr wrap="square" lIns="45720" tIns="18288" rIns="45720" bIns="18288" anchor="t">
             <a:spAutoFit/>
           </a:bodyPr>
           <a:lstStyle/>
@@ -7944,8 +10298,8 @@
                 <a:solidFill>
                   <a:srgbClr val="008A3E"/>
                 </a:solidFill>
-                <a:latin typeface="Apple SD Gothic Neo"/>
-                <a:ea typeface="Apple SD Gothic Neo"/>
+                <a:latin typeface="NanumSquare Neo Regular" pitchFamily="2" charset="-127"/>
+                <a:ea typeface="NanumSquare Neo Regular" pitchFamily="2" charset="-127"/>
               </a:rPr>
               <a:t>05  </a:t>
             </a:r>
@@ -7954,8 +10308,8 @@
                 <a:solidFill>
                   <a:srgbClr val="243447"/>
                 </a:solidFill>
-                <a:latin typeface="Apple SD Gothic Neo"/>
-                <a:ea typeface="Apple SD Gothic Neo"/>
+                <a:latin typeface="NanumSquare Neo Regular" pitchFamily="2" charset="-127"/>
+                <a:ea typeface="NanumSquare Neo Regular" pitchFamily="2" charset="-127"/>
               </a:rPr>
               <a:t>상시 3자 결합 — 국면 판단 없이 현행 대비 개선 확인</a:t>
             </a:r>
@@ -8006,7 +10360,7 @@
         <p:spPr>
           <a:xfrm>
             <a:off x="502920" y="1143000"/>
-            <a:ext cx="5577840" cy="1005840"/>
+            <a:ext cx="5577840" cy="478080"/>
           </a:xfrm>
           <a:prstGeom prst="rect">
             <a:avLst/>
@@ -8014,7 +10368,7 @@
           <a:noFill/>
         </p:spPr>
         <p:txBody>
-          <a:bodyPr wrap="square" anchor="t" lIns="45720" rIns="45720" tIns="18288" bIns="18288">
+          <a:bodyPr wrap="square" lIns="45720" tIns="18288" rIns="45720" bIns="18288" anchor="t">
             <a:spAutoFit/>
           </a:bodyPr>
           <a:lstStyle/>
@@ -8029,8 +10383,8 @@
                 <a:solidFill>
                   <a:srgbClr val="243447"/>
                 </a:solidFill>
-                <a:latin typeface="Apple SD Gothic Neo"/>
-                <a:ea typeface="Apple SD Gothic Neo"/>
+                <a:latin typeface="NanumSquare Neo Regular" pitchFamily="2" charset="-127"/>
+                <a:ea typeface="NanumSquare Neo Regular" pitchFamily="2" charset="-127"/>
               </a:rPr>
               <a:t>(DFM + XGBoost + Chronos-2f) ÷ 3  =  </a:t>
             </a:r>
@@ -8039,8 +10393,8 @@
                 <a:solidFill>
                   <a:srgbClr val="008A3E"/>
                 </a:solidFill>
-                <a:latin typeface="Apple SD Gothic Neo"/>
-                <a:ea typeface="Apple SD Gothic Neo"/>
+                <a:latin typeface="NanumSquare Neo Regular" pitchFamily="2" charset="-127"/>
+                <a:ea typeface="NanumSquare Neo Regular" pitchFamily="2" charset="-127"/>
               </a:rPr>
               <a:t>0.746</a:t>
             </a:r>
@@ -8056,8 +10410,8 @@
                 <a:solidFill>
                   <a:srgbClr val="262626"/>
                 </a:solidFill>
-                <a:latin typeface="Apple SD Gothic Neo"/>
-                <a:ea typeface="Apple SD Gothic Neo"/>
+                <a:latin typeface="NanumSquare Neo Regular" pitchFamily="2" charset="-127"/>
+                <a:ea typeface="NanumSquare Neo Regular" pitchFamily="2" charset="-127"/>
               </a:rPr>
               <a:t>현행 0.765 대비 -2.5% · 항상 같은 공식 · 가중치 튜닝 없음</a:t>
             </a:r>
@@ -8083,8 +10437,20 @@
                 <a:tableStyleId>{5C22544A-7EE6-4342-B048-85BDC9FD1C3A}</a:tableStyleId>
               </a:tblPr>
               <a:tblGrid>
-                <a:gridCol w="1417320"/>
-                <a:gridCol w="4160520"/>
+                <a:gridCol w="1417320">
+                  <a:extLst>
+                    <a:ext uri="{9D8B030D-6E8A-4147-A177-3AD203B41FA5}">
+                      <a16:colId xmlns:a16="http://schemas.microsoft.com/office/drawing/2014/main" val="20000"/>
+                    </a:ext>
+                  </a:extLst>
+                </a:gridCol>
+                <a:gridCol w="4160520">
+                  <a:extLst>
+                    <a:ext uri="{9D8B030D-6E8A-4147-A177-3AD203B41FA5}">
+                      <a16:colId xmlns:a16="http://schemas.microsoft.com/office/drawing/2014/main" val="20001"/>
+                    </a:ext>
+                  </a:extLst>
+                </a:gridCol>
               </a:tblGrid>
               <a:tr h="438912">
                 <a:tc>
@@ -8135,6 +10501,11 @@
                     </a:solidFill>
                   </a:tcPr>
                 </a:tc>
+                <a:extLst>
+                  <a:ext uri="{0D108BD9-81ED-4DB2-BD59-A6C34878D82A}">
+                    <a16:rowId xmlns:a16="http://schemas.microsoft.com/office/drawing/2014/main" val="10000"/>
+                  </a:ext>
+                </a:extLst>
               </a:tr>
               <a:tr h="438912">
                 <a:tc>
@@ -8185,6 +10556,11 @@
                     </a:solidFill>
                   </a:tcPr>
                 </a:tc>
+                <a:extLst>
+                  <a:ext uri="{0D108BD9-81ED-4DB2-BD59-A6C34878D82A}">
+                    <a16:rowId xmlns:a16="http://schemas.microsoft.com/office/drawing/2014/main" val="10001"/>
+                  </a:ext>
+                </a:extLst>
               </a:tr>
               <a:tr h="438912">
                 <a:tc>
@@ -8235,6 +10611,11 @@
                     </a:solidFill>
                   </a:tcPr>
                 </a:tc>
+                <a:extLst>
+                  <a:ext uri="{0D108BD9-81ED-4DB2-BD59-A6C34878D82A}">
+                    <a16:rowId xmlns:a16="http://schemas.microsoft.com/office/drawing/2014/main" val="10002"/>
+                  </a:ext>
+                </a:extLst>
               </a:tr>
               <a:tr h="438912">
                 <a:tc>
@@ -8285,6 +10666,11 @@
                     </a:solidFill>
                   </a:tcPr>
                 </a:tc>
+                <a:extLst>
+                  <a:ext uri="{0D108BD9-81ED-4DB2-BD59-A6C34878D82A}">
+                    <a16:rowId xmlns:a16="http://schemas.microsoft.com/office/drawing/2014/main" val="10003"/>
+                  </a:ext>
+                </a:extLst>
               </a:tr>
               <a:tr h="438912">
                 <a:tc>
@@ -8335,6 +10721,11 @@
                     </a:solidFill>
                   </a:tcPr>
                 </a:tc>
+                <a:extLst>
+                  <a:ext uri="{0D108BD9-81ED-4DB2-BD59-A6C34878D82A}">
+                    <a16:rowId xmlns:a16="http://schemas.microsoft.com/office/drawing/2014/main" val="10004"/>
+                  </a:ext>
+                </a:extLst>
               </a:tr>
             </a:tbl>
           </a:graphicData>
@@ -8349,7 +10740,7 @@
         <p:spPr>
           <a:xfrm>
             <a:off x="502920" y="4800600"/>
-            <a:ext cx="5577840" cy="1280160"/>
+            <a:ext cx="5577840" cy="614014"/>
           </a:xfrm>
           <a:prstGeom prst="rect">
             <a:avLst/>
@@ -8357,7 +10748,7 @@
           <a:noFill/>
         </p:spPr>
         <p:txBody>
-          <a:bodyPr wrap="square" anchor="t" lIns="45720" rIns="45720" tIns="18288" bIns="18288">
+          <a:bodyPr wrap="square" lIns="45720" tIns="18288" rIns="45720" bIns="18288" anchor="t">
             <a:spAutoFit/>
           </a:bodyPr>
           <a:lstStyle/>
@@ -8372,8 +10763,8 @@
                 <a:solidFill>
                   <a:srgbClr val="243447"/>
                 </a:solidFill>
-                <a:latin typeface="Apple SD Gothic Neo"/>
-                <a:ea typeface="Apple SD Gothic Neo"/>
+                <a:latin typeface="NanumSquare Neo Regular" pitchFamily="2" charset="-127"/>
+                <a:ea typeface="NanumSquare Neo Regular" pitchFamily="2" charset="-127"/>
               </a:rPr>
               <a:t>제안 수위</a:t>
             </a:r>
@@ -8389,8 +10780,8 @@
                 <a:solidFill>
                   <a:srgbClr val="262626"/>
                 </a:solidFill>
-                <a:latin typeface="Apple SD Gothic Neo"/>
-                <a:ea typeface="Apple SD Gothic Neo"/>
+                <a:latin typeface="NanumSquare Neo Regular" pitchFamily="2" charset="-127"/>
+                <a:ea typeface="NanumSquare Neo Regular" pitchFamily="2" charset="-127"/>
               </a:rPr>
               <a:t>교체 제안이 아닌 검증 결과 공유입니다. 도입 시에도 현행과</a:t>
             </a:r>
@@ -8406,8 +10797,8 @@
                 <a:solidFill>
                   <a:srgbClr val="262626"/>
                 </a:solidFill>
-                <a:latin typeface="Apple SD Gothic Neo"/>
-                <a:ea typeface="Apple SD Gothic Neo"/>
+                <a:latin typeface="NanumSquare Neo Regular" pitchFamily="2" charset="-127"/>
+                <a:ea typeface="NanumSquare Neo Regular" pitchFamily="2" charset="-127"/>
               </a:rPr>
               <a:t>병행 산출해 참고 지표로 활용하는 형태를 권장드립니다.</a:t>
             </a:r>
@@ -8457,6 +10848,10 @@
           <a:lstStyle/>
           <a:p>
             <a:pPr algn="ctr"/>
+            <a:endParaRPr>
+              <a:latin typeface="NanumSquare Neo Regular" pitchFamily="2" charset="-127"/>
+              <a:ea typeface="NanumSquare Neo Regular" pitchFamily="2" charset="-127"/>
+            </a:endParaRPr>
           </a:p>
         </p:txBody>
       </p:sp>
@@ -8469,7 +10864,7 @@
         <p:spPr>
           <a:xfrm>
             <a:off x="6693407" y="1371600"/>
-            <a:ext cx="4754880" cy="1783080"/>
+            <a:ext cx="4754880" cy="983346"/>
           </a:xfrm>
           <a:prstGeom prst="rect">
             <a:avLst/>
@@ -8477,7 +10872,7 @@
           <a:noFill/>
         </p:spPr>
         <p:txBody>
-          <a:bodyPr wrap="square" anchor="t" lIns="45720" rIns="45720" tIns="18288" bIns="18288">
+          <a:bodyPr wrap="square" lIns="45720" tIns="18288" rIns="45720" bIns="18288" anchor="t">
             <a:spAutoFit/>
           </a:bodyPr>
           <a:lstStyle/>
@@ -8492,8 +10887,8 @@
                 <a:solidFill>
                   <a:srgbClr val="243447"/>
                 </a:solidFill>
-                <a:latin typeface="Apple SD Gothic Neo"/>
-                <a:ea typeface="Apple SD Gothic Neo"/>
+                <a:latin typeface="NanumSquare Neo Regular" pitchFamily="2" charset="-127"/>
+                <a:ea typeface="NanumSquare Neo Regular" pitchFamily="2" charset="-127"/>
               </a:rPr>
               <a:t>왜 세 모델의 평균이 개선되는가</a:t>
             </a:r>
@@ -8509,8 +10904,8 @@
                 <a:solidFill>
                   <a:srgbClr val="262626"/>
                 </a:solidFill>
-                <a:latin typeface="Apple SD Gothic Neo"/>
-                <a:ea typeface="Apple SD Gothic Neo"/>
+                <a:latin typeface="NanumSquare Neo Regular" pitchFamily="2" charset="-127"/>
+                <a:ea typeface="NanumSquare Neo Regular" pitchFamily="2" charset="-127"/>
               </a:rPr>
               <a:t>세 모델은 오차의 원천이 다릅니다 — DFM(선형 요인구조),</a:t>
             </a:r>
@@ -8526,8 +10921,8 @@
                 <a:solidFill>
                   <a:srgbClr val="262626"/>
                 </a:solidFill>
-                <a:latin typeface="Apple SD Gothic Neo"/>
-                <a:ea typeface="Apple SD Gothic Neo"/>
+                <a:latin typeface="NanumSquare Neo Regular" pitchFamily="2" charset="-127"/>
+                <a:ea typeface="NanumSquare Neo Regular" pitchFamily="2" charset="-127"/>
               </a:rPr>
               <a:t>XGBoost(비선형 보정), Chronos-2f(외부 사전학습 + 일별 신호).</a:t>
             </a:r>
@@ -8543,8 +10938,8 @@
                 <a:solidFill>
                   <a:srgbClr val="262626"/>
                 </a:solidFill>
-                <a:latin typeface="Apple SD Gothic Neo"/>
-                <a:ea typeface="Apple SD Gothic Neo"/>
+                <a:latin typeface="NanumSquare Neo Regular" pitchFamily="2" charset="-127"/>
+                <a:ea typeface="NanumSquare Neo Regular" pitchFamily="2" charset="-127"/>
               </a:rPr>
               <a:t>서로 다른 시점에 다른 방향으로 틀리기 때문에 평균이</a:t>
             </a:r>
@@ -8560,8 +10955,8 @@
                 <a:solidFill>
                   <a:srgbClr val="262626"/>
                 </a:solidFill>
-                <a:latin typeface="Apple SD Gothic Neo"/>
-                <a:ea typeface="Apple SD Gothic Neo"/>
+                <a:latin typeface="NanumSquare Neo Regular" pitchFamily="2" charset="-127"/>
+                <a:ea typeface="NanumSquare Neo Regular" pitchFamily="2" charset="-127"/>
               </a:rPr>
               <a:t>개별 오차를 상쇄합니다 (예측결합의 고전적 원리).</a:t>
             </a:r>
@@ -8611,6 +11006,10 @@
           <a:lstStyle/>
           <a:p>
             <a:pPr algn="ctr"/>
+            <a:endParaRPr>
+              <a:latin typeface="NanumSquare Neo Regular" pitchFamily="2" charset="-127"/>
+              <a:ea typeface="NanumSquare Neo Regular" pitchFamily="2" charset="-127"/>
+            </a:endParaRPr>
           </a:p>
         </p:txBody>
       </p:sp>
@@ -8623,7 +11022,7 @@
         <p:spPr>
           <a:xfrm>
             <a:off x="6693407" y="3566160"/>
-            <a:ext cx="4754880" cy="1737360"/>
+            <a:ext cx="4754880" cy="972574"/>
           </a:xfrm>
           <a:prstGeom prst="rect">
             <a:avLst/>
@@ -8631,7 +11030,7 @@
           <a:noFill/>
         </p:spPr>
         <p:txBody>
-          <a:bodyPr wrap="square" anchor="t" lIns="45720" rIns="45720" tIns="18288" bIns="18288">
+          <a:bodyPr wrap="square" lIns="45720" tIns="18288" rIns="45720" bIns="18288" anchor="t">
             <a:spAutoFit/>
           </a:bodyPr>
           <a:lstStyle/>
@@ -8646,8 +11045,8 @@
                 <a:solidFill>
                   <a:srgbClr val="243447"/>
                 </a:solidFill>
-                <a:latin typeface="Apple SD Gothic Neo"/>
-                <a:ea typeface="Apple SD Gothic Neo"/>
+                <a:latin typeface="NanumSquare Neo Regular" pitchFamily="2" charset="-127"/>
+                <a:ea typeface="NanumSquare Neo Regular" pitchFamily="2" charset="-127"/>
               </a:rPr>
               <a:t>검증 과정에서 함께 확인된 사실</a:t>
             </a:r>
@@ -8663,8 +11062,8 @@
                 <a:solidFill>
                   <a:srgbClr val="262626"/>
                 </a:solidFill>
-                <a:latin typeface="Apple SD Gothic Neo"/>
-                <a:ea typeface="Apple SD Gothic Neo"/>
+                <a:latin typeface="NanumSquare Neo Regular" pitchFamily="2" charset="-127"/>
+                <a:ea typeface="NanumSquare Neo Regular" pitchFamily="2" charset="-127"/>
               </a:rPr>
               <a:t>· 4개 이상 결합, 가중치 학습(적응형)은 모두 3자 균등보다 열세</a:t>
             </a:r>
@@ -8680,8 +11079,8 @@
                 <a:solidFill>
                   <a:srgbClr val="6B6B6B"/>
                 </a:solidFill>
-                <a:latin typeface="Apple SD Gothic Neo"/>
-                <a:ea typeface="Apple SD Gothic Neo"/>
+                <a:latin typeface="NanumSquare Neo Regular" pitchFamily="2" charset="-127"/>
+                <a:ea typeface="NanumSquare Neo Regular" pitchFamily="2" charset="-127"/>
               </a:rPr>
               <a:t>  — 소표본에서는 단순함이 강건함</a:t>
             </a:r>
@@ -8697,8 +11096,8 @@
                 <a:solidFill>
                   <a:srgbClr val="262626"/>
                 </a:solidFill>
-                <a:latin typeface="Apple SD Gothic Neo"/>
-                <a:ea typeface="Apple SD Gothic Neo"/>
+                <a:latin typeface="NanumSquare Neo Regular" pitchFamily="2" charset="-127"/>
+                <a:ea typeface="NanumSquare Neo Regular" pitchFamily="2" charset="-127"/>
               </a:rPr>
               <a:t>· 현행 스펙(지표 34종) 외 미사용 39종의 잔차 정보가치 검정:</a:t>
             </a:r>
@@ -8714,8 +11113,8 @@
                 <a:solidFill>
                   <a:srgbClr val="262626"/>
                 </a:solidFill>
-                <a:latin typeface="Apple SD Gothic Neo"/>
-                <a:ea typeface="Apple SD Gothic Neo"/>
+                <a:latin typeface="NanumSquare Neo Regular" pitchFamily="2" charset="-127"/>
+                <a:ea typeface="NanumSquare Neo Regular" pitchFamily="2" charset="-127"/>
               </a:rPr>
               <a:t>  유의한 추가 정보 없음 — </a:t>
             </a:r>
@@ -8724,8 +11123,8 @@
                 <a:solidFill>
                   <a:srgbClr val="008A3E"/>
                 </a:solidFill>
-                <a:latin typeface="Apple SD Gothic Neo"/>
-                <a:ea typeface="Apple SD Gothic Neo"/>
+                <a:latin typeface="NanumSquare Neo Regular" pitchFamily="2" charset="-127"/>
+                <a:ea typeface="NanumSquare Neo Regular" pitchFamily="2" charset="-127"/>
               </a:rPr>
               <a:t>현행 지표 선정의 타당성 확인</a:t>
             </a:r>
@@ -8775,6 +11174,10 @@
           <a:lstStyle/>
           <a:p>
             <a:pPr algn="ctr"/>
+            <a:endParaRPr>
+              <a:latin typeface="NanumSquare Neo Regular" pitchFamily="2" charset="-127"/>
+              <a:ea typeface="NanumSquare Neo Regular" pitchFamily="2" charset="-127"/>
+            </a:endParaRPr>
           </a:p>
         </p:txBody>
       </p:sp>
@@ -8786,8 +11189,8 @@
         </p:nvSpPr>
         <p:spPr>
           <a:xfrm>
-            <a:off x="685800" y="6364224"/>
-            <a:ext cx="10881360" cy="256032"/>
+            <a:off x="685800" y="6406062"/>
+            <a:ext cx="10881360" cy="172355"/>
           </a:xfrm>
           <a:prstGeom prst="rect">
             <a:avLst/>
@@ -8795,7 +11198,7 @@
           <a:noFill/>
         </p:spPr>
         <p:txBody>
-          <a:bodyPr wrap="square" anchor="ctr" lIns="45720" rIns="45720" tIns="18288" bIns="18288">
+          <a:bodyPr wrap="square" lIns="45720" tIns="18288" rIns="45720" bIns="18288" anchor="ctr">
             <a:spAutoFit/>
           </a:bodyPr>
           <a:lstStyle/>
@@ -8810,8 +11213,8 @@
                 <a:solidFill>
                   <a:srgbClr val="6B6B6B"/>
                 </a:solidFill>
-                <a:latin typeface="Apple SD Gothic Neo"/>
-                <a:ea typeface="Apple SD Gothic Neo"/>
+                <a:latin typeface="NanumSquare Neo Regular" pitchFamily="2" charset="-127"/>
+                <a:ea typeface="NanumSquare Neo Regular" pitchFamily="2" charset="-127"/>
               </a:rPr>
               <a:t>공통 검증 규약: 한은 제공 실시간 빈티지 · 속보치 기준 · 전망주차 w[-19,-1] 평균 RMSE · 2018Q1~2025Q4 (32개 분기)</a:t>
             </a:r>
@@ -8827,7 +11230,7 @@
 </file>
 
 <file path=ppt/slides/slide7.xml><?xml version="1.0" encoding="utf-8"?>
-<p:sld xmlns:a="http://schemas.openxmlformats.org/drawingml/2006/main" xmlns:p="http://schemas.openxmlformats.org/presentationml/2006/main" xmlns:r="http://schemas.openxmlformats.org/officeDocument/2006/relationships">
+<p:sld xmlns:a="http://schemas.openxmlformats.org/drawingml/2006/main" xmlns:r="http://schemas.openxmlformats.org/officeDocument/2006/relationships" xmlns:p="http://schemas.openxmlformats.org/presentationml/2006/main">
   <p:cSld>
     <p:spTree>
       <p:nvGrpSpPr>
@@ -8835,7 +11238,14 @@
         <p:cNvGrpSpPr/>
         <p:nvPr/>
       </p:nvGrpSpPr>
-      <p:grpSpPr/>
+      <p:grpSpPr>
+        <a:xfrm>
+          <a:off x="0" y="0"/>
+          <a:ext cx="0" cy="0"/>
+          <a:chOff x="0" y="0"/>
+          <a:chExt cx="0" cy="0"/>
+        </a:xfrm>
+      </p:grpSpPr>
       <p:sp>
         <p:nvSpPr>
           <p:cNvPr id="2" name="TextBox 1"/>
@@ -8845,7 +11255,7 @@
         <p:spPr>
           <a:xfrm>
             <a:off x="502920" y="274320"/>
-            <a:ext cx="11155680" cy="502920"/>
+            <a:ext cx="11155680" cy="329321"/>
           </a:xfrm>
           <a:prstGeom prst="rect">
             <a:avLst/>
@@ -8853,7 +11263,7 @@
           <a:noFill/>
         </p:spPr>
         <p:txBody>
-          <a:bodyPr wrap="square" anchor="t" lIns="45720" rIns="45720" tIns="18288" bIns="18288">
+          <a:bodyPr wrap="square" lIns="45720" tIns="18288" rIns="45720" bIns="18288" anchor="t">
             <a:spAutoFit/>
           </a:bodyPr>
           <a:lstStyle/>
@@ -8868,8 +11278,8 @@
                 <a:solidFill>
                   <a:srgbClr val="008A3E"/>
                 </a:solidFill>
-                <a:latin typeface="Apple SD Gothic Neo"/>
-                <a:ea typeface="Apple SD Gothic Neo"/>
+                <a:latin typeface="NanumSquare Neo Regular" pitchFamily="2" charset="-127"/>
+                <a:ea typeface="NanumSquare Neo Regular" pitchFamily="2" charset="-127"/>
               </a:rPr>
               <a:t>06  </a:t>
             </a:r>
@@ -8878,8 +11288,8 @@
                 <a:solidFill>
                   <a:srgbClr val="243447"/>
                 </a:solidFill>
-                <a:latin typeface="Apple SD Gothic Neo"/>
-                <a:ea typeface="Apple SD Gothic Neo"/>
+                <a:latin typeface="NanumSquare Neo Regular" pitchFamily="2" charset="-127"/>
+                <a:ea typeface="NanumSquare Neo Regular" pitchFamily="2" charset="-127"/>
               </a:rPr>
               <a:t>제안 — Fan Chart: 예측은 그대로, 불확실성 구간을 부여</a:t>
             </a:r>
@@ -8930,7 +11340,7 @@
         <p:spPr>
           <a:xfrm>
             <a:off x="502920" y="1143000"/>
-            <a:ext cx="5394960" cy="2286000"/>
+            <a:ext cx="5394960" cy="1898981"/>
           </a:xfrm>
           <a:prstGeom prst="rect">
             <a:avLst/>
@@ -8938,7 +11348,7 @@
           <a:noFill/>
         </p:spPr>
         <p:txBody>
-          <a:bodyPr wrap="square" anchor="t" lIns="45720" rIns="45720" tIns="18288" bIns="18288">
+          <a:bodyPr wrap="square" lIns="45720" tIns="18288" rIns="45720" bIns="18288" anchor="t">
             <a:spAutoFit/>
           </a:bodyPr>
           <a:lstStyle/>
@@ -8953,8 +11363,8 @@
                 <a:solidFill>
                   <a:srgbClr val="243447"/>
                 </a:solidFill>
-                <a:latin typeface="Apple SD Gothic Neo"/>
-                <a:ea typeface="Apple SD Gothic Neo"/>
+                <a:latin typeface="NanumSquare Neo Regular" pitchFamily="2" charset="-127"/>
+                <a:ea typeface="NanumSquare Neo Regular" pitchFamily="2" charset="-127"/>
               </a:rPr>
               <a:t>방법 (예측 불변 원칙)</a:t>
             </a:r>
@@ -8970,8 +11380,8 @@
                 <a:solidFill>
                   <a:srgbClr val="262626"/>
                 </a:solidFill>
-                <a:latin typeface="Apple SD Gothic Neo"/>
-                <a:ea typeface="Apple SD Gothic Neo"/>
+                <a:latin typeface="NanumSquare Neo Regular" pitchFamily="2" charset="-127"/>
+                <a:ea typeface="NanumSquare Neo Regular" pitchFamily="2" charset="-127"/>
               </a:rPr>
               <a:t>· 중심선 = 현행 점 예측 그대로 — 모형·스킴 변경 없음</a:t>
             </a:r>
@@ -8987,8 +11397,8 @@
                 <a:solidFill>
                   <a:srgbClr val="262626"/>
                 </a:solidFill>
-                <a:latin typeface="Apple SD Gothic Neo"/>
-                <a:ea typeface="Apple SD Gothic Neo"/>
+                <a:latin typeface="NanumSquare Neo Regular" pitchFamily="2" charset="-127"/>
+                <a:ea typeface="NanumSquare Neo Regular" pitchFamily="2" charset="-127"/>
               </a:rPr>
               <a:t>· 구간 = 과거 실시간 예측오차의 경험분포 (컨포멀 보정)</a:t>
             </a:r>
@@ -9004,8 +11414,8 @@
                 <a:solidFill>
                   <a:srgbClr val="6B6B6B"/>
                 </a:solidFill>
-                <a:latin typeface="Apple SD Gothic Neo"/>
-                <a:ea typeface="Apple SD Gothic Neo"/>
+                <a:latin typeface="NanumSquare Neo Regular" pitchFamily="2" charset="-127"/>
+                <a:ea typeface="NanumSquare Neo Regular" pitchFamily="2" charset="-127"/>
               </a:rPr>
               <a:t>  — 분포 가정 없음 · 전망주차별 폭 차등 · 미래정보 미사용</a:t>
             </a:r>
@@ -9021,8 +11431,8 @@
                 <a:solidFill>
                   <a:srgbClr val="262626"/>
                 </a:solidFill>
-                <a:latin typeface="Apple SD Gothic Neo"/>
-                <a:ea typeface="Apple SD Gothic Neo"/>
+                <a:latin typeface="NanumSquare Neo Regular" pitchFamily="2" charset="-127"/>
+                <a:ea typeface="NanumSquare Neo Regular" pitchFamily="2" charset="-127"/>
               </a:rPr>
               <a:t>· 조기 주차(발표 19~14주 전)만 사전학습 모델의 분포를</a:t>
             </a:r>
@@ -9038,8 +11448,8 @@
                 <a:solidFill>
                   <a:srgbClr val="6B6B6B"/>
                 </a:solidFill>
-                <a:latin typeface="Apple SD Gothic Neo"/>
-                <a:ea typeface="Apple SD Gothic Neo"/>
+                <a:latin typeface="NanumSquare Neo Regular" pitchFamily="2" charset="-127"/>
+                <a:ea typeface="NanumSquare Neo Regular" pitchFamily="2" charset="-127"/>
               </a:rPr>
               <a:t>  같은 방식으로 보정해 사용 — 전망시계별 조건화(표준 관행)</a:t>
             </a:r>
@@ -9050,16 +11460,13 @@
                 <a:spcPts val="200"/>
               </a:spcAft>
             </a:pPr>
-            <a:r>
-              <a:rPr sz="500" b="0">
-                <a:solidFill>
-                  <a:srgbClr val="262626"/>
-                </a:solidFill>
-                <a:latin typeface="Apple SD Gothic Neo"/>
-                <a:ea typeface="Apple SD Gothic Neo"/>
-              </a:rPr>
-              <a:t/>
-            </a:r>
+            <a:endParaRPr sz="950" b="0">
+              <a:solidFill>
+                <a:srgbClr val="6B6B6B"/>
+              </a:solidFill>
+              <a:latin typeface="NanumSquare Neo Regular" pitchFamily="2" charset="-127"/>
+              <a:ea typeface="NanumSquare Neo Regular" pitchFamily="2" charset="-127"/>
+            </a:endParaRPr>
           </a:p>
           <a:p>
             <a:pPr algn="l">
@@ -9072,8 +11479,8 @@
                 <a:solidFill>
                   <a:srgbClr val="243447"/>
                 </a:solidFill>
-                <a:latin typeface="Apple SD Gothic Neo"/>
-                <a:ea typeface="Apple SD Gothic Neo"/>
+                <a:latin typeface="NanumSquare Neo Regular" pitchFamily="2" charset="-127"/>
+                <a:ea typeface="NanumSquare Neo Regular" pitchFamily="2" charset="-127"/>
               </a:rPr>
               <a:t>실시간 검증 (2020~2025, 23개 분기)</a:t>
             </a:r>
@@ -9089,8 +11496,8 @@
                 <a:solidFill>
                   <a:srgbClr val="262626"/>
                 </a:solidFill>
-                <a:latin typeface="Apple SD Gothic Neo"/>
-                <a:ea typeface="Apple SD Gothic Neo"/>
+                <a:latin typeface="NanumSquare Neo Regular" pitchFamily="2" charset="-127"/>
+                <a:ea typeface="NanumSquare Neo Regular" pitchFamily="2" charset="-127"/>
               </a:rPr>
               <a:t>· 명목 80% 구간의 실측 커버리지 </a:t>
             </a:r>
@@ -9099,8 +11506,8 @@
                 <a:solidFill>
                   <a:srgbClr val="008A3E"/>
                 </a:solidFill>
-                <a:latin typeface="Apple SD Gothic Neo"/>
-                <a:ea typeface="Apple SD Gothic Neo"/>
+                <a:latin typeface="NanumSquare Neo Regular" pitchFamily="2" charset="-127"/>
+                <a:ea typeface="NanumSquare Neo Regular" pitchFamily="2" charset="-127"/>
               </a:rPr>
               <a:t>81% (코로나 제외 87%)</a:t>
             </a:r>
@@ -9116,8 +11523,8 @@
                 <a:solidFill>
                   <a:srgbClr val="262626"/>
                 </a:solidFill>
-                <a:latin typeface="Apple SD Gothic Neo"/>
-                <a:ea typeface="Apple SD Gothic Neo"/>
+                <a:latin typeface="NanumSquare Neo Regular" pitchFamily="2" charset="-127"/>
+                <a:ea typeface="NanumSquare Neo Regular" pitchFamily="2" charset="-127"/>
               </a:rPr>
               <a:t>· 구간 점수(Winkler) 현행 단독 구간 대비 </a:t>
             </a:r>
@@ -9126,8 +11533,8 @@
                 <a:solidFill>
                   <a:srgbClr val="008A3E"/>
                 </a:solidFill>
-                <a:latin typeface="Apple SD Gothic Neo"/>
-                <a:ea typeface="Apple SD Gothic Neo"/>
+                <a:latin typeface="NanumSquare Neo Regular" pitchFamily="2" charset="-127"/>
+                <a:ea typeface="NanumSquare Neo Regular" pitchFamily="2" charset="-127"/>
               </a:rPr>
               <a:t>-5.5%</a:t>
             </a:r>
@@ -9177,6 +11584,10 @@
           <a:lstStyle/>
           <a:p>
             <a:pPr algn="ctr"/>
+            <a:endParaRPr>
+              <a:latin typeface="NanumSquare Neo Regular" pitchFamily="2" charset="-127"/>
+              <a:ea typeface="NanumSquare Neo Regular" pitchFamily="2" charset="-127"/>
+            </a:endParaRPr>
           </a:p>
         </p:txBody>
       </p:sp>
@@ -9189,7 +11600,7 @@
         <p:spPr>
           <a:xfrm>
             <a:off x="704088" y="4114800"/>
-            <a:ext cx="5029200" cy="1188720"/>
+            <a:ext cx="5029200" cy="814069"/>
           </a:xfrm>
           <a:prstGeom prst="rect">
             <a:avLst/>
@@ -9197,7 +11608,7 @@
           <a:noFill/>
         </p:spPr>
         <p:txBody>
-          <a:bodyPr wrap="square" anchor="t" lIns="45720" rIns="45720" tIns="18288" bIns="18288">
+          <a:bodyPr wrap="square" lIns="45720" tIns="18288" rIns="45720" bIns="18288" anchor="t">
             <a:spAutoFit/>
           </a:bodyPr>
           <a:lstStyle/>
@@ -9212,8 +11623,8 @@
                 <a:solidFill>
                   <a:srgbClr val="243447"/>
                 </a:solidFill>
-                <a:latin typeface="Apple SD Gothic Neo"/>
-                <a:ea typeface="Apple SD Gothic Neo"/>
+                <a:latin typeface="NanumSquare Neo Regular" pitchFamily="2" charset="-127"/>
+                <a:ea typeface="NanumSquare Neo Regular" pitchFamily="2" charset="-127"/>
               </a:rPr>
               <a:t>도입 형태 제안</a:t>
             </a:r>
@@ -9229,8 +11640,8 @@
                 <a:solidFill>
                   <a:srgbClr val="262626"/>
                 </a:solidFill>
-                <a:latin typeface="Apple SD Gothic Neo"/>
-                <a:ea typeface="Apple SD Gothic Neo"/>
+                <a:latin typeface="NanumSquare Neo Regular" pitchFamily="2" charset="-127"/>
+                <a:ea typeface="NanumSquare Neo Regular" pitchFamily="2" charset="-127"/>
               </a:rPr>
               <a:t>· 주간 전망 보고서에 그림 1장 추가가 전부</a:t>
             </a:r>
@@ -9246,8 +11657,8 @@
                 <a:solidFill>
                   <a:srgbClr val="262626"/>
                 </a:solidFill>
-                <a:latin typeface="Apple SD Gothic Neo"/>
-                <a:ea typeface="Apple SD Gothic Neo"/>
+                <a:latin typeface="NanumSquare Neo Regular" pitchFamily="2" charset="-127"/>
+                <a:ea typeface="NanumSquare Neo Regular" pitchFamily="2" charset="-127"/>
               </a:rPr>
               <a:t>· 기존 파이프라인 무수정 (산출물만 소비)</a:t>
             </a:r>
@@ -9263,8 +11674,8 @@
                 <a:solidFill>
                   <a:srgbClr val="262626"/>
                 </a:solidFill>
-                <a:latin typeface="Apple SD Gothic Neo"/>
-                <a:ea typeface="Apple SD Gothic Neo"/>
+                <a:latin typeface="NanumSquare Neo Regular" pitchFamily="2" charset="-127"/>
+                <a:ea typeface="NanumSquare Neo Regular" pitchFamily="2" charset="-127"/>
               </a:rPr>
               <a:t>· 전체 코드 재현 가능 형태로 이관</a:t>
             </a:r>
@@ -9280,7 +11691,7 @@
           <p:nvPr/>
         </p:nvPicPr>
         <p:blipFill>
-          <a:blip r:embed="rId2"/>
+          <a:blip r:embed="rId3"/>
           <a:stretch>
             <a:fillRect/>
           </a:stretch>
@@ -9304,7 +11715,7 @@
         <p:spPr>
           <a:xfrm>
             <a:off x="6263640" y="3794760"/>
-            <a:ext cx="5577840" cy="548640"/>
+            <a:ext cx="5577840" cy="175433"/>
           </a:xfrm>
           <a:prstGeom prst="rect">
             <a:avLst/>
@@ -9312,7 +11723,7 @@
           <a:noFill/>
         </p:spPr>
         <p:txBody>
-          <a:bodyPr wrap="square" anchor="t" lIns="45720" rIns="45720" tIns="18288" bIns="18288">
+          <a:bodyPr wrap="square" lIns="45720" tIns="18288" rIns="45720" bIns="18288" anchor="t">
             <a:spAutoFit/>
           </a:bodyPr>
           <a:lstStyle/>
@@ -9327,8 +11738,8 @@
                 <a:solidFill>
                   <a:srgbClr val="6B6B6B"/>
                 </a:solidFill>
-                <a:latin typeface="Apple SD Gothic Neo"/>
-                <a:ea typeface="Apple SD Gothic Neo"/>
+                <a:latin typeface="NanumSquare Neo Regular" pitchFamily="2" charset="-127"/>
+                <a:ea typeface="NanumSquare Neo Regular" pitchFamily="2" charset="-127"/>
               </a:rPr>
               <a:t>2025년 2·3분기 실시간 재현 — 점선(실제 속보치)이 두 분기 모두 80% 구간 내 실현</a:t>
             </a:r>
@@ -9378,6 +11789,10 @@
           <a:lstStyle/>
           <a:p>
             <a:pPr algn="ctr"/>
+            <a:endParaRPr>
+              <a:latin typeface="NanumSquare Neo Regular" pitchFamily="2" charset="-127"/>
+              <a:ea typeface="NanumSquare Neo Regular" pitchFamily="2" charset="-127"/>
+            </a:endParaRPr>
           </a:p>
         </p:txBody>
       </p:sp>
@@ -9389,8 +11804,8 @@
         </p:nvSpPr>
         <p:spPr>
           <a:xfrm>
-            <a:off x="685800" y="6364224"/>
-            <a:ext cx="10881360" cy="256032"/>
+            <a:off x="685800" y="6406062"/>
+            <a:ext cx="10881360" cy="172355"/>
           </a:xfrm>
           <a:prstGeom prst="rect">
             <a:avLst/>
@@ -9398,7 +11813,7 @@
           <a:noFill/>
         </p:spPr>
         <p:txBody>
-          <a:bodyPr wrap="square" anchor="ctr" lIns="45720" rIns="45720" tIns="18288" bIns="18288">
+          <a:bodyPr wrap="square" lIns="45720" tIns="18288" rIns="45720" bIns="18288" anchor="ctr">
             <a:spAutoFit/>
           </a:bodyPr>
           <a:lstStyle/>
@@ -9413,8 +11828,8 @@
                 <a:solidFill>
                   <a:srgbClr val="6B6B6B"/>
                 </a:solidFill>
-                <a:latin typeface="Apple SD Gothic Neo"/>
-                <a:ea typeface="Apple SD Gothic Neo"/>
+                <a:latin typeface="NanumSquare Neo Regular" pitchFamily="2" charset="-127"/>
+                <a:ea typeface="NanumSquare Neo Regular" pitchFamily="2" charset="-127"/>
               </a:rPr>
               <a:t>구간 산출에 사용한 오차는 해당 분기 이전에 발표된 분기의 것만 사용 (release-safe) — 미래 정보 유출 없음</a:t>
             </a:r>
@@ -9430,7 +11845,7 @@
 </file>
 
 <file path=ppt/slides/slide8.xml><?xml version="1.0" encoding="utf-8"?>
-<p:sld xmlns:a="http://schemas.openxmlformats.org/drawingml/2006/main" xmlns:p="http://schemas.openxmlformats.org/presentationml/2006/main" xmlns:r="http://schemas.openxmlformats.org/officeDocument/2006/relationships">
+<p:sld xmlns:a="http://schemas.openxmlformats.org/drawingml/2006/main" xmlns:r="http://schemas.openxmlformats.org/officeDocument/2006/relationships" xmlns:p="http://schemas.openxmlformats.org/presentationml/2006/main">
   <p:cSld>
     <p:spTree>
       <p:nvGrpSpPr>
@@ -9438,7 +11853,14 @@
         <p:cNvGrpSpPr/>
         <p:nvPr/>
       </p:nvGrpSpPr>
-      <p:grpSpPr/>
+      <p:grpSpPr>
+        <a:xfrm>
+          <a:off x="0" y="0"/>
+          <a:ext cx="0" cy="0"/>
+          <a:chOff x="0" y="0"/>
+          <a:chExt cx="0" cy="0"/>
+        </a:xfrm>
+      </p:grpSpPr>
       <p:sp>
         <p:nvSpPr>
           <p:cNvPr id="2" name="TextBox 1"/>
@@ -9448,7 +11870,7 @@
         <p:spPr>
           <a:xfrm>
             <a:off x="502920" y="274320"/>
-            <a:ext cx="11155680" cy="502920"/>
+            <a:ext cx="11155680" cy="329321"/>
           </a:xfrm>
           <a:prstGeom prst="rect">
             <a:avLst/>
@@ -9456,7 +11878,7 @@
           <a:noFill/>
         </p:spPr>
         <p:txBody>
-          <a:bodyPr wrap="square" anchor="t" lIns="45720" rIns="45720" tIns="18288" bIns="18288">
+          <a:bodyPr wrap="square" lIns="45720" tIns="18288" rIns="45720" bIns="18288" anchor="t">
             <a:spAutoFit/>
           </a:bodyPr>
           <a:lstStyle/>
@@ -9471,8 +11893,8 @@
                 <a:solidFill>
                   <a:srgbClr val="008A3E"/>
                 </a:solidFill>
-                <a:latin typeface="Apple SD Gothic Neo"/>
-                <a:ea typeface="Apple SD Gothic Neo"/>
+                <a:latin typeface="NanumSquare Neo Regular" pitchFamily="2" charset="-127"/>
+                <a:ea typeface="NanumSquare Neo Regular" pitchFamily="2" charset="-127"/>
               </a:rPr>
               <a:t>07  </a:t>
             </a:r>
@@ -9481,8 +11903,8 @@
                 <a:solidFill>
                   <a:srgbClr val="243447"/>
                 </a:solidFill>
-                <a:latin typeface="Apple SD Gothic Neo"/>
-                <a:ea typeface="Apple SD Gothic Neo"/>
+                <a:latin typeface="NanumSquare Neo Regular" pitchFamily="2" charset="-127"/>
+                <a:ea typeface="NanumSquare Neo Regular" pitchFamily="2" charset="-127"/>
               </a:rPr>
               <a:t>논의 안건</a:t>
             </a:r>
@@ -9567,6 +11989,10 @@
           <a:lstStyle/>
           <a:p>
             <a:pPr algn="ctr"/>
+            <a:endParaRPr>
+              <a:latin typeface="NanumSquare Neo Regular" pitchFamily="2" charset="-127"/>
+              <a:ea typeface="NanumSquare Neo Regular" pitchFamily="2" charset="-127"/>
+            </a:endParaRPr>
           </a:p>
         </p:txBody>
       </p:sp>
@@ -9579,7 +12005,7 @@
         <p:spPr>
           <a:xfrm>
             <a:off x="731520" y="1298448"/>
-            <a:ext cx="594360" cy="365760"/>
+            <a:ext cx="594360" cy="229294"/>
           </a:xfrm>
           <a:prstGeom prst="rect">
             <a:avLst/>
@@ -9587,7 +12013,7 @@
           <a:noFill/>
         </p:spPr>
         <p:txBody>
-          <a:bodyPr wrap="square" anchor="t" lIns="45720" rIns="45720" tIns="18288" bIns="18288">
+          <a:bodyPr wrap="square" lIns="45720" tIns="18288" rIns="45720" bIns="18288" anchor="t">
             <a:spAutoFit/>
           </a:bodyPr>
           <a:lstStyle/>
@@ -9602,8 +12028,8 @@
                 <a:solidFill>
                   <a:srgbClr val="243447"/>
                 </a:solidFill>
-                <a:latin typeface="Apple SD Gothic Neo"/>
-                <a:ea typeface="Apple SD Gothic Neo"/>
+                <a:latin typeface="NanumSquare Neo Regular" pitchFamily="2" charset="-127"/>
+                <a:ea typeface="NanumSquare Neo Regular" pitchFamily="2" charset="-127"/>
               </a:rPr>
               <a:t>A1</a:t>
             </a:r>
@@ -9619,7 +12045,7 @@
         <p:spPr>
           <a:xfrm>
             <a:off x="1371600" y="1298448"/>
-            <a:ext cx="3017520" cy="365760"/>
+            <a:ext cx="3017520" cy="213905"/>
           </a:xfrm>
           <a:prstGeom prst="rect">
             <a:avLst/>
@@ -9627,7 +12053,7 @@
           <a:noFill/>
         </p:spPr>
         <p:txBody>
-          <a:bodyPr wrap="square" anchor="t" lIns="45720" rIns="45720" tIns="18288" bIns="18288">
+          <a:bodyPr wrap="square" lIns="45720" tIns="18288" rIns="45720" bIns="18288" anchor="t">
             <a:spAutoFit/>
           </a:bodyPr>
           <a:lstStyle/>
@@ -9642,8 +12068,8 @@
                 <a:solidFill>
                   <a:srgbClr val="243447"/>
                 </a:solidFill>
-                <a:latin typeface="Apple SD Gothic Neo"/>
-                <a:ea typeface="Apple SD Gothic Neo"/>
+                <a:latin typeface="NanumSquare Neo Regular" pitchFamily="2" charset="-127"/>
+                <a:ea typeface="NanumSquare Neo Regular" pitchFamily="2" charset="-127"/>
               </a:rPr>
               <a:t>Fan chart 시범 도입</a:t>
             </a:r>
@@ -9659,7 +12085,7 @@
         <p:spPr>
           <a:xfrm>
             <a:off x="4480560" y="1298448"/>
-            <a:ext cx="5577840" cy="640080"/>
+            <a:ext cx="5577840" cy="187744"/>
           </a:xfrm>
           <a:prstGeom prst="rect">
             <a:avLst/>
@@ -9667,7 +12093,7 @@
           <a:noFill/>
         </p:spPr>
         <p:txBody>
-          <a:bodyPr wrap="square" anchor="t" lIns="45720" rIns="45720" tIns="18288" bIns="18288">
+          <a:bodyPr wrap="square" lIns="45720" tIns="18288" rIns="45720" bIns="18288" anchor="t">
             <a:spAutoFit/>
           </a:bodyPr>
           <a:lstStyle/>
@@ -9682,8 +12108,8 @@
                 <a:solidFill>
                   <a:srgbClr val="262626"/>
                 </a:solidFill>
-                <a:latin typeface="Apple SD Gothic Neo"/>
-                <a:ea typeface="Apple SD Gothic Neo"/>
+                <a:latin typeface="NanumSquare Neo Regular" pitchFamily="2" charset="-127"/>
+                <a:ea typeface="NanumSquare Neo Regular" pitchFamily="2" charset="-127"/>
               </a:rPr>
               <a:t>주간 전망 보고서에 예측구간 그림 1장 추가 — 도입 여부·형식·시범 기간 협의</a:t>
             </a:r>
@@ -9699,7 +12125,7 @@
         <p:spPr>
           <a:xfrm>
             <a:off x="10195560" y="1444752"/>
-            <a:ext cx="1280160" cy="320040"/>
+            <a:ext cx="1280160" cy="190821"/>
           </a:xfrm>
           <a:prstGeom prst="rect">
             <a:avLst/>
@@ -9707,7 +12133,7 @@
           <a:noFill/>
         </p:spPr>
         <p:txBody>
-          <a:bodyPr wrap="square" anchor="t" lIns="45720" rIns="45720" tIns="18288" bIns="18288">
+          <a:bodyPr wrap="square" lIns="45720" tIns="18288" rIns="45720" bIns="18288" anchor="t">
             <a:spAutoFit/>
           </a:bodyPr>
           <a:lstStyle/>
@@ -9722,8 +12148,8 @@
                 <a:solidFill>
                   <a:srgbClr val="008A3E"/>
                 </a:solidFill>
-                <a:latin typeface="Apple SD Gothic Neo"/>
-                <a:ea typeface="Apple SD Gothic Neo"/>
+                <a:latin typeface="NanumSquare Neo Regular" pitchFamily="2" charset="-127"/>
+                <a:ea typeface="NanumSquare Neo Regular" pitchFamily="2" charset="-127"/>
               </a:rPr>
               <a:t>결정 요청</a:t>
             </a:r>
@@ -9773,6 +12199,10 @@
           <a:lstStyle/>
           <a:p>
             <a:pPr algn="ctr"/>
+            <a:endParaRPr>
+              <a:latin typeface="NanumSquare Neo Regular" pitchFamily="2" charset="-127"/>
+              <a:ea typeface="NanumSquare Neo Regular" pitchFamily="2" charset="-127"/>
+            </a:endParaRPr>
           </a:p>
         </p:txBody>
       </p:sp>
@@ -9785,7 +12215,7 @@
         <p:spPr>
           <a:xfrm>
             <a:off x="731520" y="2267712"/>
-            <a:ext cx="594360" cy="365760"/>
+            <a:ext cx="594360" cy="229294"/>
           </a:xfrm>
           <a:prstGeom prst="rect">
             <a:avLst/>
@@ -9793,7 +12223,7 @@
           <a:noFill/>
         </p:spPr>
         <p:txBody>
-          <a:bodyPr wrap="square" anchor="t" lIns="45720" rIns="45720" tIns="18288" bIns="18288">
+          <a:bodyPr wrap="square" lIns="45720" tIns="18288" rIns="45720" bIns="18288" anchor="t">
             <a:spAutoFit/>
           </a:bodyPr>
           <a:lstStyle/>
@@ -9808,8 +12238,8 @@
                 <a:solidFill>
                   <a:srgbClr val="243447"/>
                 </a:solidFill>
-                <a:latin typeface="Apple SD Gothic Neo"/>
-                <a:ea typeface="Apple SD Gothic Neo"/>
+                <a:latin typeface="NanumSquare Neo Regular" pitchFamily="2" charset="-127"/>
+                <a:ea typeface="NanumSquare Neo Regular" pitchFamily="2" charset="-127"/>
               </a:rPr>
               <a:t>A2</a:t>
             </a:r>
@@ -9825,7 +12255,7 @@
         <p:spPr>
           <a:xfrm>
             <a:off x="1371600" y="2267712"/>
-            <a:ext cx="3017520" cy="365760"/>
+            <a:ext cx="3017520" cy="213905"/>
           </a:xfrm>
           <a:prstGeom prst="rect">
             <a:avLst/>
@@ -9833,7 +12263,7 @@
           <a:noFill/>
         </p:spPr>
         <p:txBody>
-          <a:bodyPr wrap="square" anchor="t" lIns="45720" rIns="45720" tIns="18288" bIns="18288">
+          <a:bodyPr wrap="square" lIns="45720" tIns="18288" rIns="45720" bIns="18288" anchor="t">
             <a:spAutoFit/>
           </a:bodyPr>
           <a:lstStyle/>
@@ -9848,8 +12278,8 @@
                 <a:solidFill>
                   <a:srgbClr val="243447"/>
                 </a:solidFill>
-                <a:latin typeface="Apple SD Gothic Neo"/>
-                <a:ea typeface="Apple SD Gothic Neo"/>
+                <a:latin typeface="NanumSquare Neo Regular" pitchFamily="2" charset="-127"/>
+                <a:ea typeface="NanumSquare Neo Regular" pitchFamily="2" charset="-127"/>
               </a:rPr>
               <a:t>상시 3자 결합의 병행 산출</a:t>
             </a:r>
@@ -9865,7 +12295,7 @@
         <p:spPr>
           <a:xfrm>
             <a:off x="4480560" y="2267712"/>
-            <a:ext cx="5577840" cy="640080"/>
+            <a:ext cx="5577840" cy="187744"/>
           </a:xfrm>
           <a:prstGeom prst="rect">
             <a:avLst/>
@@ -9873,7 +12303,7 @@
           <a:noFill/>
         </p:spPr>
         <p:txBody>
-          <a:bodyPr wrap="square" anchor="t" lIns="45720" rIns="45720" tIns="18288" bIns="18288">
+          <a:bodyPr wrap="square" lIns="45720" tIns="18288" rIns="45720" bIns="18288" anchor="t">
             <a:spAutoFit/>
           </a:bodyPr>
           <a:lstStyle/>
@@ -9888,8 +12318,8 @@
                 <a:solidFill>
                   <a:srgbClr val="262626"/>
                 </a:solidFill>
-                <a:latin typeface="Apple SD Gothic Neo"/>
-                <a:ea typeface="Apple SD Gothic Neo"/>
+                <a:latin typeface="NanumSquare Neo Regular" pitchFamily="2" charset="-127"/>
+                <a:ea typeface="NanumSquare Neo Regular" pitchFamily="2" charset="-127"/>
               </a:rPr>
               <a:t>현행 예측과 나란히 참고 지표로 산출·비교 축적 — 교체가 아닌 병행 검증</a:t>
             </a:r>
@@ -9905,7 +12335,7 @@
         <p:spPr>
           <a:xfrm>
             <a:off x="10195560" y="2414016"/>
-            <a:ext cx="1280160" cy="320040"/>
+            <a:ext cx="1280160" cy="190821"/>
           </a:xfrm>
           <a:prstGeom prst="rect">
             <a:avLst/>
@@ -9913,7 +12343,7 @@
           <a:noFill/>
         </p:spPr>
         <p:txBody>
-          <a:bodyPr wrap="square" anchor="t" lIns="45720" rIns="45720" tIns="18288" bIns="18288">
+          <a:bodyPr wrap="square" lIns="45720" tIns="18288" rIns="45720" bIns="18288" anchor="t">
             <a:spAutoFit/>
           </a:bodyPr>
           <a:lstStyle/>
@@ -9928,8 +12358,8 @@
                 <a:solidFill>
                   <a:srgbClr val="6B6B6B"/>
                 </a:solidFill>
-                <a:latin typeface="Apple SD Gothic Neo"/>
-                <a:ea typeface="Apple SD Gothic Neo"/>
+                <a:latin typeface="NanumSquare Neo Regular" pitchFamily="2" charset="-127"/>
+                <a:ea typeface="NanumSquare Neo Regular" pitchFamily="2" charset="-127"/>
               </a:rPr>
               <a:t>의견 요청</a:t>
             </a:r>
@@ -9979,6 +12409,10 @@
           <a:lstStyle/>
           <a:p>
             <a:pPr algn="ctr"/>
+            <a:endParaRPr>
+              <a:latin typeface="NanumSquare Neo Regular" pitchFamily="2" charset="-127"/>
+              <a:ea typeface="NanumSquare Neo Regular" pitchFamily="2" charset="-127"/>
+            </a:endParaRPr>
           </a:p>
         </p:txBody>
       </p:sp>
@@ -9991,7 +12425,7 @@
         <p:spPr>
           <a:xfrm>
             <a:off x="731520" y="3236976"/>
-            <a:ext cx="594360" cy="365760"/>
+            <a:ext cx="594360" cy="229294"/>
           </a:xfrm>
           <a:prstGeom prst="rect">
             <a:avLst/>
@@ -9999,7 +12433,7 @@
           <a:noFill/>
         </p:spPr>
         <p:txBody>
-          <a:bodyPr wrap="square" anchor="t" lIns="45720" rIns="45720" tIns="18288" bIns="18288">
+          <a:bodyPr wrap="square" lIns="45720" tIns="18288" rIns="45720" bIns="18288" anchor="t">
             <a:spAutoFit/>
           </a:bodyPr>
           <a:lstStyle/>
@@ -10014,8 +12448,8 @@
                 <a:solidFill>
                   <a:srgbClr val="243447"/>
                 </a:solidFill>
-                <a:latin typeface="Apple SD Gothic Neo"/>
-                <a:ea typeface="Apple SD Gothic Neo"/>
+                <a:latin typeface="NanumSquare Neo Regular" pitchFamily="2" charset="-127"/>
+                <a:ea typeface="NanumSquare Neo Regular" pitchFamily="2" charset="-127"/>
               </a:rPr>
               <a:t>A3</a:t>
             </a:r>
@@ -10031,7 +12465,7 @@
         <p:spPr>
           <a:xfrm>
             <a:off x="1371600" y="3236976"/>
-            <a:ext cx="3017520" cy="365760"/>
+            <a:ext cx="3017520" cy="213905"/>
           </a:xfrm>
           <a:prstGeom prst="rect">
             <a:avLst/>
@@ -10039,7 +12473,7 @@
           <a:noFill/>
         </p:spPr>
         <p:txBody>
-          <a:bodyPr wrap="square" anchor="t" lIns="45720" rIns="45720" tIns="18288" bIns="18288">
+          <a:bodyPr wrap="square" lIns="45720" tIns="18288" rIns="45720" bIns="18288" anchor="t">
             <a:spAutoFit/>
           </a:bodyPr>
           <a:lstStyle/>
@@ -10054,8 +12488,8 @@
                 <a:solidFill>
                   <a:srgbClr val="243447"/>
                 </a:solidFill>
-                <a:latin typeface="Apple SD Gothic Neo"/>
-                <a:ea typeface="Apple SD Gothic Neo"/>
+                <a:latin typeface="NanumSquare Neo Regular" pitchFamily="2" charset="-127"/>
+                <a:ea typeface="NanumSquare Neo Regular" pitchFamily="2" charset="-127"/>
               </a:rPr>
               <a:t>전망변동 자동 설명 리포트</a:t>
             </a:r>
@@ -10071,7 +12505,7 @@
         <p:spPr>
           <a:xfrm>
             <a:off x="4480560" y="3236976"/>
-            <a:ext cx="5577840" cy="640080"/>
+            <a:ext cx="5577840" cy="187744"/>
           </a:xfrm>
           <a:prstGeom prst="rect">
             <a:avLst/>
@@ -10079,7 +12513,7 @@
           <a:noFill/>
         </p:spPr>
         <p:txBody>
-          <a:bodyPr wrap="square" anchor="t" lIns="45720" rIns="45720" tIns="18288" bIns="18288">
+          <a:bodyPr wrap="square" lIns="45720" tIns="18288" rIns="45720" bIns="18288" anchor="t">
             <a:spAutoFit/>
           </a:bodyPr>
           <a:lstStyle/>
@@ -10094,8 +12528,8 @@
                 <a:solidFill>
                   <a:srgbClr val="262626"/>
                 </a:solidFill>
-                <a:latin typeface="Apple SD Gothic Neo"/>
-                <a:ea typeface="Apple SD Gothic Neo"/>
+                <a:latin typeface="NanumSquare Neo Regular" pitchFamily="2" charset="-127"/>
+                <a:ea typeface="NanumSquare Neo Regular" pitchFamily="2" charset="-127"/>
               </a:rPr>
               <a:t>주간 나우캐스트 변동의 원인(어떤 지표가 얼마나 움직였나)을 자동 서술 — 프로토타입 시연 후 협의</a:t>
             </a:r>
@@ -10111,7 +12545,7 @@
         <p:spPr>
           <a:xfrm>
             <a:off x="10195560" y="3383280"/>
-            <a:ext cx="1280160" cy="320040"/>
+            <a:ext cx="1280160" cy="190821"/>
           </a:xfrm>
           <a:prstGeom prst="rect">
             <a:avLst/>
@@ -10119,7 +12553,7 @@
           <a:noFill/>
         </p:spPr>
         <p:txBody>
-          <a:bodyPr wrap="square" anchor="t" lIns="45720" rIns="45720" tIns="18288" bIns="18288">
+          <a:bodyPr wrap="square" lIns="45720" tIns="18288" rIns="45720" bIns="18288" anchor="t">
             <a:spAutoFit/>
           </a:bodyPr>
           <a:lstStyle/>
@@ -10134,8 +12568,8 @@
                 <a:solidFill>
                   <a:srgbClr val="6B6B6B"/>
                 </a:solidFill>
-                <a:latin typeface="Apple SD Gothic Neo"/>
-                <a:ea typeface="Apple SD Gothic Neo"/>
+                <a:latin typeface="NanumSquare Neo Regular" pitchFamily="2" charset="-127"/>
+                <a:ea typeface="NanumSquare Neo Regular" pitchFamily="2" charset="-127"/>
               </a:rPr>
               <a:t>차기 시연</a:t>
             </a:r>
@@ -10185,6 +12619,10 @@
           <a:lstStyle/>
           <a:p>
             <a:pPr algn="ctr"/>
+            <a:endParaRPr>
+              <a:latin typeface="NanumSquare Neo Regular" pitchFamily="2" charset="-127"/>
+              <a:ea typeface="NanumSquare Neo Regular" pitchFamily="2" charset="-127"/>
+            </a:endParaRPr>
           </a:p>
         </p:txBody>
       </p:sp>
@@ -10197,7 +12635,7 @@
         <p:spPr>
           <a:xfrm>
             <a:off x="731520" y="4206240"/>
-            <a:ext cx="594360" cy="365760"/>
+            <a:ext cx="594360" cy="229294"/>
           </a:xfrm>
           <a:prstGeom prst="rect">
             <a:avLst/>
@@ -10205,7 +12643,7 @@
           <a:noFill/>
         </p:spPr>
         <p:txBody>
-          <a:bodyPr wrap="square" anchor="t" lIns="45720" rIns="45720" tIns="18288" bIns="18288">
+          <a:bodyPr wrap="square" lIns="45720" tIns="18288" rIns="45720" bIns="18288" anchor="t">
             <a:spAutoFit/>
           </a:bodyPr>
           <a:lstStyle/>
@@ -10220,8 +12658,8 @@
                 <a:solidFill>
                   <a:srgbClr val="243447"/>
                 </a:solidFill>
-                <a:latin typeface="Apple SD Gothic Neo"/>
-                <a:ea typeface="Apple SD Gothic Neo"/>
+                <a:latin typeface="NanumSquare Neo Regular" pitchFamily="2" charset="-127"/>
+                <a:ea typeface="NanumSquare Neo Regular" pitchFamily="2" charset="-127"/>
               </a:rPr>
               <a:t>A4</a:t>
             </a:r>
@@ -10237,7 +12675,7 @@
         <p:spPr>
           <a:xfrm>
             <a:off x="1371600" y="4206240"/>
-            <a:ext cx="3017520" cy="365760"/>
+            <a:ext cx="3017520" cy="213905"/>
           </a:xfrm>
           <a:prstGeom prst="rect">
             <a:avLst/>
@@ -10245,7 +12683,7 @@
           <a:noFill/>
         </p:spPr>
         <p:txBody>
-          <a:bodyPr wrap="square" anchor="t" lIns="45720" rIns="45720" tIns="18288" bIns="18288">
+          <a:bodyPr wrap="square" lIns="45720" tIns="18288" rIns="45720" bIns="18288" anchor="t">
             <a:spAutoFit/>
           </a:bodyPr>
           <a:lstStyle/>
@@ -10260,8 +12698,8 @@
                 <a:solidFill>
                   <a:srgbClr val="243447"/>
                 </a:solidFill>
-                <a:latin typeface="Apple SD Gothic Neo"/>
-                <a:ea typeface="Apple SD Gothic Neo"/>
+                <a:latin typeface="NanumSquare Neo Regular" pitchFamily="2" charset="-127"/>
+                <a:ea typeface="NanumSquare Neo Regular" pitchFamily="2" charset="-127"/>
               </a:rPr>
               <a:t>속보-확정 개정 예측 트랙</a:t>
             </a:r>
@@ -10277,7 +12715,7 @@
         <p:spPr>
           <a:xfrm>
             <a:off x="4480560" y="4206240"/>
-            <a:ext cx="5577840" cy="640080"/>
+            <a:ext cx="5577840" cy="187744"/>
           </a:xfrm>
           <a:prstGeom prst="rect">
             <a:avLst/>
@@ -10285,7 +12723,7 @@
           <a:noFill/>
         </p:spPr>
         <p:txBody>
-          <a:bodyPr wrap="square" anchor="t" lIns="45720" rIns="45720" tIns="18288" bIns="18288">
+          <a:bodyPr wrap="square" lIns="45720" tIns="18288" rIns="45720" bIns="18288" anchor="t">
             <a:spAutoFit/>
           </a:bodyPr>
           <a:lstStyle/>
@@ -10300,8 +12738,8 @@
                 <a:solidFill>
                   <a:srgbClr val="262626"/>
                 </a:solidFill>
-                <a:latin typeface="Apple SD Gothic Neo"/>
-                <a:ea typeface="Apple SD Gothic Neo"/>
+                <a:latin typeface="NanumSquare Neo Regular" pitchFamily="2" charset="-127"/>
+                <a:ea typeface="NanumSquare Neo Regular" pitchFamily="2" charset="-127"/>
               </a:rPr>
               <a:t>속보치와 확정치의 차이를 예측하는 신규 축 — 타당성 검토 착수 동의</a:t>
             </a:r>
@@ -10317,7 +12755,7 @@
         <p:spPr>
           <a:xfrm>
             <a:off x="10195560" y="4352544"/>
-            <a:ext cx="1280160" cy="320040"/>
+            <a:ext cx="1280160" cy="190821"/>
           </a:xfrm>
           <a:prstGeom prst="rect">
             <a:avLst/>
@@ -10325,7 +12763,7 @@
           <a:noFill/>
         </p:spPr>
         <p:txBody>
-          <a:bodyPr wrap="square" anchor="t" lIns="45720" rIns="45720" tIns="18288" bIns="18288">
+          <a:bodyPr wrap="square" lIns="45720" tIns="18288" rIns="45720" bIns="18288" anchor="t">
             <a:spAutoFit/>
           </a:bodyPr>
           <a:lstStyle/>
@@ -10340,8 +12778,8 @@
                 <a:solidFill>
                   <a:srgbClr val="6B6B6B"/>
                 </a:solidFill>
-                <a:latin typeface="Apple SD Gothic Neo"/>
-                <a:ea typeface="Apple SD Gothic Neo"/>
+                <a:latin typeface="NanumSquare Neo Regular" pitchFamily="2" charset="-127"/>
+                <a:ea typeface="NanumSquare Neo Regular" pitchFamily="2" charset="-127"/>
               </a:rPr>
               <a:t>동의 요청</a:t>
             </a:r>
@@ -10391,6 +12829,10 @@
           <a:lstStyle/>
           <a:p>
             <a:pPr algn="ctr"/>
+            <a:endParaRPr>
+              <a:latin typeface="NanumSquare Neo Regular" pitchFamily="2" charset="-127"/>
+              <a:ea typeface="NanumSquare Neo Regular" pitchFamily="2" charset="-127"/>
+            </a:endParaRPr>
           </a:p>
         </p:txBody>
       </p:sp>
@@ -10403,7 +12845,7 @@
         <p:spPr>
           <a:xfrm>
             <a:off x="731520" y="5175504"/>
-            <a:ext cx="594360" cy="365760"/>
+            <a:ext cx="594360" cy="229294"/>
           </a:xfrm>
           <a:prstGeom prst="rect">
             <a:avLst/>
@@ -10411,7 +12853,7 @@
           <a:noFill/>
         </p:spPr>
         <p:txBody>
-          <a:bodyPr wrap="square" anchor="t" lIns="45720" rIns="45720" tIns="18288" bIns="18288">
+          <a:bodyPr wrap="square" lIns="45720" tIns="18288" rIns="45720" bIns="18288" anchor="t">
             <a:spAutoFit/>
           </a:bodyPr>
           <a:lstStyle/>
@@ -10426,8 +12868,8 @@
                 <a:solidFill>
                   <a:srgbClr val="243447"/>
                 </a:solidFill>
-                <a:latin typeface="Apple SD Gothic Neo"/>
-                <a:ea typeface="Apple SD Gothic Neo"/>
+                <a:latin typeface="NanumSquare Neo Regular" pitchFamily="2" charset="-127"/>
+                <a:ea typeface="NanumSquare Neo Regular" pitchFamily="2" charset="-127"/>
               </a:rPr>
               <a:t>A5</a:t>
             </a:r>
@@ -10443,7 +12885,7 @@
         <p:spPr>
           <a:xfrm>
             <a:off x="1371600" y="5175504"/>
-            <a:ext cx="3017520" cy="365760"/>
+            <a:ext cx="3017520" cy="213905"/>
           </a:xfrm>
           <a:prstGeom prst="rect">
             <a:avLst/>
@@ -10451,7 +12893,7 @@
           <a:noFill/>
         </p:spPr>
         <p:txBody>
-          <a:bodyPr wrap="square" anchor="t" lIns="45720" rIns="45720" tIns="18288" bIns="18288">
+          <a:bodyPr wrap="square" lIns="45720" tIns="18288" rIns="45720" bIns="18288" anchor="t">
             <a:spAutoFit/>
           </a:bodyPr>
           <a:lstStyle/>
@@ -10466,8 +12908,8 @@
                 <a:solidFill>
                   <a:srgbClr val="243447"/>
                 </a:solidFill>
-                <a:latin typeface="Apple SD Gothic Neo"/>
-                <a:ea typeface="Apple SD Gothic Neo"/>
+                <a:latin typeface="NanumSquare Neo Regular" pitchFamily="2" charset="-127"/>
+                <a:ea typeface="NanumSquare Neo Regular" pitchFamily="2" charset="-127"/>
               </a:rPr>
               <a:t>데이터 협조</a:t>
             </a:r>
@@ -10483,7 +12925,7 @@
         <p:spPr>
           <a:xfrm>
             <a:off x="4480560" y="5175504"/>
-            <a:ext cx="5577840" cy="640080"/>
+            <a:ext cx="5577840" cy="187744"/>
           </a:xfrm>
           <a:prstGeom prst="rect">
             <a:avLst/>
@@ -10491,7 +12933,7 @@
           <a:noFill/>
         </p:spPr>
         <p:txBody>
-          <a:bodyPr wrap="square" anchor="t" lIns="45720" rIns="45720" tIns="18288" bIns="18288">
+          <a:bodyPr wrap="square" lIns="45720" tIns="18288" rIns="45720" bIns="18288" anchor="t">
             <a:spAutoFit/>
           </a:bodyPr>
           <a:lstStyle/>
@@ -10502,15 +12944,242 @@
               </a:spcAft>
             </a:pPr>
             <a:r>
-              <a:rPr sz="980" b="0">
+              <a:rPr sz="980" b="0" dirty="0" err="1">
                 <a:solidFill>
                   <a:srgbClr val="262626"/>
                 </a:solidFill>
-                <a:latin typeface="Apple SD Gothic Neo"/>
-                <a:ea typeface="Apple SD Gothic Neo"/>
-              </a:rPr>
-              <a:t>관세청 1~10일 수출(API) 등 고빈도 공개 데이터 연계, 일부 지표 컬럼 정의 확인</a:t>
-            </a:r>
+                <a:latin typeface="NanumSquare Neo Regular" pitchFamily="2" charset="-127"/>
+                <a:ea typeface="NanumSquare Neo Regular" pitchFamily="2" charset="-127"/>
+              </a:rPr>
+              <a:t>관세청</a:t>
+            </a:r>
+            <a:r>
+              <a:rPr sz="980" b="0" dirty="0">
+                <a:solidFill>
+                  <a:srgbClr val="262626"/>
+                </a:solidFill>
+                <a:latin typeface="NanumSquare Neo Regular" pitchFamily="2" charset="-127"/>
+                <a:ea typeface="NanumSquare Neo Regular" pitchFamily="2" charset="-127"/>
+              </a:rPr>
+              <a:t> 1~10일 </a:t>
+            </a:r>
+            <a:r>
+              <a:rPr sz="980" b="0" dirty="0" err="1">
+                <a:solidFill>
+                  <a:srgbClr val="262626"/>
+                </a:solidFill>
+                <a:latin typeface="NanumSquare Neo Regular" pitchFamily="2" charset="-127"/>
+                <a:ea typeface="NanumSquare Neo Regular" pitchFamily="2" charset="-127"/>
+              </a:rPr>
+              <a:t>수출</a:t>
+            </a:r>
+            <a:r>
+              <a:rPr sz="980" b="0" dirty="0">
+                <a:solidFill>
+                  <a:srgbClr val="262626"/>
+                </a:solidFill>
+                <a:latin typeface="NanumSquare Neo Regular" pitchFamily="2" charset="-127"/>
+                <a:ea typeface="NanumSquare Neo Regular" pitchFamily="2" charset="-127"/>
+              </a:rPr>
+              <a:t>(API) </a:t>
+            </a:r>
+            <a:r>
+              <a:rPr sz="980" b="0" dirty="0" err="1">
+                <a:solidFill>
+                  <a:srgbClr val="262626"/>
+                </a:solidFill>
+                <a:latin typeface="NanumSquare Neo Regular" pitchFamily="2" charset="-127"/>
+                <a:ea typeface="NanumSquare Neo Regular" pitchFamily="2" charset="-127"/>
+              </a:rPr>
+              <a:t>등</a:t>
+            </a:r>
+            <a:r>
+              <a:rPr sz="980" b="0" dirty="0">
+                <a:solidFill>
+                  <a:srgbClr val="262626"/>
+                </a:solidFill>
+                <a:latin typeface="NanumSquare Neo Regular" pitchFamily="2" charset="-127"/>
+                <a:ea typeface="NanumSquare Neo Regular" pitchFamily="2" charset="-127"/>
+              </a:rPr>
+              <a:t> </a:t>
+            </a:r>
+            <a:r>
+              <a:rPr sz="980" b="0" dirty="0" err="1">
+                <a:solidFill>
+                  <a:srgbClr val="262626"/>
+                </a:solidFill>
+                <a:latin typeface="NanumSquare Neo Regular" pitchFamily="2" charset="-127"/>
+                <a:ea typeface="NanumSquare Neo Regular" pitchFamily="2" charset="-127"/>
+              </a:rPr>
+              <a:t>고빈도</a:t>
+            </a:r>
+            <a:r>
+              <a:rPr sz="980" b="0" dirty="0">
+                <a:solidFill>
+                  <a:srgbClr val="262626"/>
+                </a:solidFill>
+                <a:latin typeface="NanumSquare Neo Regular" pitchFamily="2" charset="-127"/>
+                <a:ea typeface="NanumSquare Neo Regular" pitchFamily="2" charset="-127"/>
+              </a:rPr>
+              <a:t> </a:t>
+            </a:r>
+            <a:r>
+              <a:rPr sz="980" b="0" dirty="0" err="1">
+                <a:solidFill>
+                  <a:srgbClr val="262626"/>
+                </a:solidFill>
+                <a:latin typeface="NanumSquare Neo Regular" pitchFamily="2" charset="-127"/>
+                <a:ea typeface="NanumSquare Neo Regular" pitchFamily="2" charset="-127"/>
+              </a:rPr>
+              <a:t>공개</a:t>
+            </a:r>
+            <a:r>
+              <a:rPr sz="980" b="0" dirty="0">
+                <a:solidFill>
+                  <a:srgbClr val="262626"/>
+                </a:solidFill>
+                <a:latin typeface="NanumSquare Neo Regular" pitchFamily="2" charset="-127"/>
+                <a:ea typeface="NanumSquare Neo Regular" pitchFamily="2" charset="-127"/>
+              </a:rPr>
+              <a:t> </a:t>
+            </a:r>
+            <a:r>
+              <a:rPr sz="980" b="0" dirty="0" err="1">
+                <a:solidFill>
+                  <a:srgbClr val="262626"/>
+                </a:solidFill>
+                <a:latin typeface="NanumSquare Neo Regular" pitchFamily="2" charset="-127"/>
+                <a:ea typeface="NanumSquare Neo Regular" pitchFamily="2" charset="-127"/>
+              </a:rPr>
+              <a:t>데이터</a:t>
+            </a:r>
+            <a:r>
+              <a:rPr sz="980" b="0" dirty="0">
+                <a:solidFill>
+                  <a:srgbClr val="262626"/>
+                </a:solidFill>
+                <a:latin typeface="NanumSquare Neo Regular" pitchFamily="2" charset="-127"/>
+                <a:ea typeface="NanumSquare Neo Regular" pitchFamily="2" charset="-127"/>
+              </a:rPr>
+              <a:t> </a:t>
+            </a:r>
+            <a:r>
+              <a:rPr sz="980" b="0" dirty="0" err="1">
+                <a:solidFill>
+                  <a:srgbClr val="262626"/>
+                </a:solidFill>
+                <a:latin typeface="NanumSquare Neo Regular" pitchFamily="2" charset="-127"/>
+                <a:ea typeface="NanumSquare Neo Regular" pitchFamily="2" charset="-127"/>
+              </a:rPr>
+              <a:t>연계</a:t>
+            </a:r>
+            <a:r>
+              <a:rPr sz="980" b="0" dirty="0">
+                <a:solidFill>
+                  <a:srgbClr val="262626"/>
+                </a:solidFill>
+                <a:latin typeface="NanumSquare Neo Regular" pitchFamily="2" charset="-127"/>
+                <a:ea typeface="NanumSquare Neo Regular" pitchFamily="2" charset="-127"/>
+              </a:rPr>
+              <a:t>, </a:t>
+            </a:r>
+            <a:r>
+              <a:rPr sz="980" b="0" dirty="0" err="1">
+                <a:solidFill>
+                  <a:srgbClr val="262626"/>
+                </a:solidFill>
+                <a:latin typeface="NanumSquare Neo Regular" pitchFamily="2" charset="-127"/>
+                <a:ea typeface="NanumSquare Neo Regular" pitchFamily="2" charset="-127"/>
+              </a:rPr>
+              <a:t>일부</a:t>
+            </a:r>
+            <a:r>
+              <a:rPr sz="980" b="0" dirty="0">
+                <a:solidFill>
+                  <a:srgbClr val="262626"/>
+                </a:solidFill>
+                <a:latin typeface="NanumSquare Neo Regular" pitchFamily="2" charset="-127"/>
+                <a:ea typeface="NanumSquare Neo Regular" pitchFamily="2" charset="-127"/>
+              </a:rPr>
+              <a:t> </a:t>
+            </a:r>
+            <a:r>
+              <a:rPr sz="980" b="0" dirty="0" err="1">
+                <a:solidFill>
+                  <a:srgbClr val="262626"/>
+                </a:solidFill>
+                <a:latin typeface="NanumSquare Neo Regular" pitchFamily="2" charset="-127"/>
+                <a:ea typeface="NanumSquare Neo Regular" pitchFamily="2" charset="-127"/>
+              </a:rPr>
+              <a:t>지표</a:t>
+            </a:r>
+            <a:r>
+              <a:rPr sz="980" b="0" dirty="0">
+                <a:solidFill>
+                  <a:srgbClr val="262626"/>
+                </a:solidFill>
+                <a:latin typeface="NanumSquare Neo Regular" pitchFamily="2" charset="-127"/>
+                <a:ea typeface="NanumSquare Neo Regular" pitchFamily="2" charset="-127"/>
+              </a:rPr>
+              <a:t> </a:t>
+            </a:r>
+            <a:r>
+              <a:rPr sz="980" b="0" dirty="0" err="1">
+                <a:solidFill>
+                  <a:srgbClr val="262626"/>
+                </a:solidFill>
+                <a:latin typeface="NanumSquare Neo Regular" pitchFamily="2" charset="-127"/>
+                <a:ea typeface="NanumSquare Neo Regular" pitchFamily="2" charset="-127"/>
+              </a:rPr>
+              <a:t>컬럼</a:t>
+            </a:r>
+            <a:r>
+              <a:rPr sz="980" b="0" dirty="0">
+                <a:solidFill>
+                  <a:srgbClr val="262626"/>
+                </a:solidFill>
+                <a:latin typeface="NanumSquare Neo Regular" pitchFamily="2" charset="-127"/>
+                <a:ea typeface="NanumSquare Neo Regular" pitchFamily="2" charset="-127"/>
+              </a:rPr>
+              <a:t> </a:t>
+            </a:r>
+            <a:r>
+              <a:rPr sz="980" b="0" dirty="0" err="1">
+                <a:solidFill>
+                  <a:srgbClr val="262626"/>
+                </a:solidFill>
+                <a:latin typeface="NanumSquare Neo Regular" pitchFamily="2" charset="-127"/>
+                <a:ea typeface="NanumSquare Neo Regular" pitchFamily="2" charset="-127"/>
+              </a:rPr>
+              <a:t>정의</a:t>
+            </a:r>
+            <a:r>
+              <a:rPr sz="980" b="0" dirty="0">
+                <a:solidFill>
+                  <a:srgbClr val="262626"/>
+                </a:solidFill>
+                <a:latin typeface="NanumSquare Neo Regular" pitchFamily="2" charset="-127"/>
+                <a:ea typeface="NanumSquare Neo Regular" pitchFamily="2" charset="-127"/>
+              </a:rPr>
+              <a:t> </a:t>
+            </a:r>
+            <a:r>
+              <a:rPr sz="980" b="0" dirty="0" err="1">
+                <a:solidFill>
+                  <a:srgbClr val="262626"/>
+                </a:solidFill>
+                <a:latin typeface="NanumSquare Neo Regular" pitchFamily="2" charset="-127"/>
+                <a:ea typeface="NanumSquare Neo Regular" pitchFamily="2" charset="-127"/>
+              </a:rPr>
+              <a:t>확인</a:t>
+            </a:r>
+            <a:endParaRPr sz="980" b="0" dirty="0">
+              <a:solidFill>
+                <a:srgbClr val="262626"/>
+              </a:solidFill>
+              <a:latin typeface="NanumSquare Neo Regular" pitchFamily="2" charset="-127"/>
+              <a:ea typeface="NanumSquare Neo Regular" pitchFamily="2" charset="-127"/>
+            </a:endParaRPr>
           </a:p>
         </p:txBody>
       </p:sp>
@@ -10523,7 +13192,7 @@
         <p:spPr>
           <a:xfrm>
             <a:off x="10195560" y="5321808"/>
-            <a:ext cx="1280160" cy="320040"/>
+            <a:ext cx="1280160" cy="190821"/>
           </a:xfrm>
           <a:prstGeom prst="rect">
             <a:avLst/>
@@ -10531,7 +13200,7 @@
           <a:noFill/>
         </p:spPr>
         <p:txBody>
-          <a:bodyPr wrap="square" anchor="t" lIns="45720" rIns="45720" tIns="18288" bIns="18288">
+          <a:bodyPr wrap="square" lIns="45720" tIns="18288" rIns="45720" bIns="18288" anchor="t">
             <a:spAutoFit/>
           </a:bodyPr>
           <a:lstStyle/>
@@ -10546,8 +13215,8 @@
                 <a:solidFill>
                   <a:srgbClr val="6B6B6B"/>
                 </a:solidFill>
-                <a:latin typeface="Apple SD Gothic Neo"/>
-                <a:ea typeface="Apple SD Gothic Neo"/>
+                <a:latin typeface="NanumSquare Neo Regular" pitchFamily="2" charset="-127"/>
+                <a:ea typeface="NanumSquare Neo Regular" pitchFamily="2" charset="-127"/>
               </a:rPr>
               <a:t>실무 협조</a:t>
             </a:r>
@@ -10597,6 +13266,10 @@
           <a:lstStyle/>
           <a:p>
             <a:pPr algn="ctr"/>
+            <a:endParaRPr>
+              <a:latin typeface="NanumSquare Neo Regular" pitchFamily="2" charset="-127"/>
+              <a:ea typeface="NanumSquare Neo Regular" pitchFamily="2" charset="-127"/>
+            </a:endParaRPr>
           </a:p>
         </p:txBody>
       </p:sp>
@@ -10608,8 +13281,8 @@
         </p:nvSpPr>
         <p:spPr>
           <a:xfrm>
-            <a:off x="685800" y="6364224"/>
-            <a:ext cx="10881360" cy="256032"/>
+            <a:off x="685800" y="6406062"/>
+            <a:ext cx="10881360" cy="172355"/>
           </a:xfrm>
           <a:prstGeom prst="rect">
             <a:avLst/>
@@ -10617,7 +13290,7 @@
           <a:noFill/>
         </p:spPr>
         <p:txBody>
-          <a:bodyPr wrap="square" anchor="ctr" lIns="45720" rIns="45720" tIns="18288" bIns="18288">
+          <a:bodyPr wrap="square" lIns="45720" tIns="18288" rIns="45720" bIns="18288" anchor="ctr">
             <a:spAutoFit/>
           </a:bodyPr>
           <a:lstStyle/>
@@ -10632,8 +13305,8 @@
                 <a:solidFill>
                   <a:srgbClr val="6B6B6B"/>
                 </a:solidFill>
-                <a:latin typeface="Apple SD Gothic Neo"/>
-                <a:ea typeface="Apple SD Gothic Neo"/>
+                <a:latin typeface="NanumSquare Neo Regular" pitchFamily="2" charset="-127"/>
+                <a:ea typeface="NanumSquare Neo Regular" pitchFamily="2" charset="-127"/>
               </a:rPr>
               <a:t>제안 우선순위: A1(검증 완료·즉시 가능) → A3(주력, 프로토타입 준비 중) → A2·A4(협의 결과에 따라) · 모든 코드는 재현 가능 형태로 이관 예정</a:t>
             </a:r>
@@ -10969,7 +13642,7 @@
 </file>
 
 <file path=ppt/theme/theme2.xml><?xml version="1.0" encoding="utf-8"?>
-<a:theme xmlns:a="http://schemas.openxmlformats.org/drawingml/2006/main" name="Office Theme">
+<a:theme xmlns:a="http://schemas.openxmlformats.org/drawingml/2006/main" name="Office 테마">
   <a:themeElements>
     <a:clrScheme name="Office">
       <a:dk1>
@@ -10979,44 +13652,44 @@
         <a:sysClr val="window" lastClr="FFFFFF"/>
       </a:lt1>
       <a:dk2>
-        <a:srgbClr val="1F497D"/>
+        <a:srgbClr val="0E2841"/>
       </a:dk2>
       <a:lt2>
-        <a:srgbClr val="EEECE1"/>
+        <a:srgbClr val="E8E8E8"/>
       </a:lt2>
       <a:accent1>
-        <a:srgbClr val="4F81BD"/>
+        <a:srgbClr val="156082"/>
       </a:accent1>
       <a:accent2>
-        <a:srgbClr val="C0504D"/>
+        <a:srgbClr val="E97132"/>
       </a:accent2>
       <a:accent3>
-        <a:srgbClr val="9BBB59"/>
+        <a:srgbClr val="196B24"/>
       </a:accent3>
       <a:accent4>
-        <a:srgbClr val="8064A2"/>
+        <a:srgbClr val="0F9ED5"/>
       </a:accent4>
       <a:accent5>
-        <a:srgbClr val="4BACC6"/>
+        <a:srgbClr val="A02B93"/>
       </a:accent5>
       <a:accent6>
-        <a:srgbClr val="F79646"/>
+        <a:srgbClr val="4EA72E"/>
       </a:accent6>
       <a:hlink>
-        <a:srgbClr val="0000FF"/>
+        <a:srgbClr val="467886"/>
       </a:hlink>
       <a:folHlink>
-        <a:srgbClr val="800080"/>
+        <a:srgbClr val="96607D"/>
       </a:folHlink>
     </a:clrScheme>
     <a:fontScheme name="Office">
       <a:majorFont>
-        <a:latin typeface="Calibri"/>
+        <a:latin typeface="맑은 고딕" panose="02110004020202020204"/>
         <a:ea typeface=""/>
         <a:cs typeface=""/>
-        <a:font script="Jpan" typeface="ＭＳ Ｐゴシック"/>
+        <a:font script="Jpan" typeface="游ゴシック Light"/>
         <a:font script="Hang" typeface="맑은 고딕"/>
-        <a:font script="Hans" typeface="宋体"/>
+        <a:font script="Hans" typeface="等线 Light"/>
         <a:font script="Hant" typeface="新細明體"/>
         <a:font script="Arab" typeface="Times New Roman"/>
         <a:font script="Hebr" typeface="Times New Roman"/>
@@ -11044,14 +13717,31 @@
         <a:font script="Viet" typeface="Times New Roman"/>
         <a:font script="Uigh" typeface="Microsoft Uighur"/>
         <a:font script="Geor" typeface="Sylfaen"/>
+        <a:font script="Armn" typeface="Arial"/>
+        <a:font script="Bugi" typeface="Leelawadee UI"/>
+        <a:font script="Bopo" typeface="Microsoft JhengHei"/>
+        <a:font script="Java" typeface="Javanese Text"/>
+        <a:font script="Lisu" typeface="Segoe UI"/>
+        <a:font script="Mymr" typeface="Myanmar Text"/>
+        <a:font script="Nkoo" typeface="Ebrima"/>
+        <a:font script="Olck" typeface="Nirmala UI"/>
+        <a:font script="Osma" typeface="Ebrima"/>
+        <a:font script="Phag" typeface="Phagspa"/>
+        <a:font script="Syrn" typeface="Estrangelo Edessa"/>
+        <a:font script="Syrj" typeface="Estrangelo Edessa"/>
+        <a:font script="Syre" typeface="Estrangelo Edessa"/>
+        <a:font script="Sora" typeface="Nirmala UI"/>
+        <a:font script="Tale" typeface="Microsoft Tai Le"/>
+        <a:font script="Talu" typeface="Microsoft New Tai Lue"/>
+        <a:font script="Tfng" typeface="Ebrima"/>
       </a:majorFont>
       <a:minorFont>
-        <a:latin typeface="Calibri"/>
+        <a:latin typeface="맑은 고딕" panose="02110004020202020204"/>
         <a:ea typeface=""/>
         <a:cs typeface=""/>
-        <a:font script="Jpan" typeface="ＭＳ Ｐゴシック"/>
+        <a:font script="Jpan" typeface="游ゴシック"/>
         <a:font script="Hang" typeface="맑은 고딕"/>
-        <a:font script="Hans" typeface="宋体"/>
+        <a:font script="Hans" typeface="等线"/>
         <a:font script="Hant" typeface="新細明體"/>
         <a:font script="Arab" typeface="Arial"/>
         <a:font script="Hebr" typeface="Arial"/>
@@ -11079,6 +13769,23 @@
         <a:font script="Viet" typeface="Arial"/>
         <a:font script="Uigh" typeface="Microsoft Uighur"/>
         <a:font script="Geor" typeface="Sylfaen"/>
+        <a:font script="Armn" typeface="Arial"/>
+        <a:font script="Bugi" typeface="Leelawadee UI"/>
+        <a:font script="Bopo" typeface="Microsoft JhengHei"/>
+        <a:font script="Java" typeface="Javanese Text"/>
+        <a:font script="Lisu" typeface="Segoe UI"/>
+        <a:font script="Mymr" typeface="Myanmar Text"/>
+        <a:font script="Nkoo" typeface="Ebrima"/>
+        <a:font script="Olck" typeface="Nirmala UI"/>
+        <a:font script="Osma" typeface="Ebrima"/>
+        <a:font script="Phag" typeface="Phagspa"/>
+        <a:font script="Syrn" typeface="Estrangelo Edessa"/>
+        <a:font script="Syrj" typeface="Estrangelo Edessa"/>
+        <a:font script="Syre" typeface="Estrangelo Edessa"/>
+        <a:font script="Sora" typeface="Nirmala UI"/>
+        <a:font script="Tale" typeface="Microsoft Tai Le"/>
+        <a:font script="Talu" typeface="Microsoft New Tai Lue"/>
+        <a:font script="Tfng" typeface="Ebrima"/>
       </a:minorFont>
     </a:fontScheme>
     <a:fmtScheme name="Office">
@@ -11090,180 +13797,136 @@
           <a:gsLst>
             <a:gs pos="0">
               <a:schemeClr val="phClr">
-                <a:tint val="50000"/>
-                <a:satMod val="300000"/>
+                <a:lumMod val="110000"/>
+                <a:satMod val="105000"/>
+                <a:tint val="67000"/>
               </a:schemeClr>
             </a:gs>
-            <a:gs pos="35000">
+            <a:gs pos="50000">
               <a:schemeClr val="phClr">
-                <a:tint val="37000"/>
-                <a:satMod val="300000"/>
+                <a:lumMod val="105000"/>
+                <a:satMod val="103000"/>
+                <a:tint val="73000"/>
               </a:schemeClr>
             </a:gs>
             <a:gs pos="100000">
               <a:schemeClr val="phClr">
-                <a:tint val="15000"/>
-                <a:satMod val="350000"/>
+                <a:lumMod val="105000"/>
+                <a:satMod val="109000"/>
+                <a:tint val="81000"/>
               </a:schemeClr>
             </a:gs>
           </a:gsLst>
-          <a:lin ang="16200000" scaled="1"/>
+          <a:lin ang="5400000" scaled="0"/>
         </a:gradFill>
         <a:gradFill rotWithShape="1">
           <a:gsLst>
             <a:gs pos="0">
               <a:schemeClr val="phClr">
-                <a:tint val="100000"/>
+                <a:satMod val="103000"/>
+                <a:lumMod val="102000"/>
+                <a:tint val="94000"/>
+              </a:schemeClr>
+            </a:gs>
+            <a:gs pos="50000">
+              <a:schemeClr val="phClr">
+                <a:satMod val="110000"/>
+                <a:lumMod val="100000"/>
                 <a:shade val="100000"/>
-                <a:satMod val="130000"/>
               </a:schemeClr>
             </a:gs>
             <a:gs pos="100000">
               <a:schemeClr val="phClr">
-                <a:tint val="50000"/>
-                <a:shade val="100000"/>
-                <a:satMod val="350000"/>
+                <a:lumMod val="99000"/>
+                <a:satMod val="120000"/>
+                <a:shade val="78000"/>
               </a:schemeClr>
             </a:gs>
           </a:gsLst>
-          <a:lin ang="16200000" scaled="0"/>
+          <a:lin ang="5400000" scaled="0"/>
         </a:gradFill>
       </a:fillStyleLst>
       <a:lnStyleLst>
-        <a:ln w="9525" cap="flat" cmpd="sng" algn="ctr">
+        <a:ln w="12700" cap="flat" cmpd="sng" algn="ctr">
           <a:solidFill>
-            <a:schemeClr val="phClr">
-              <a:shade val="95000"/>
-              <a:satMod val="105000"/>
-            </a:schemeClr>
+            <a:schemeClr val="phClr"/>
           </a:solidFill>
           <a:prstDash val="solid"/>
+          <a:miter lim="800000"/>
+        </a:ln>
+        <a:ln w="19050" cap="flat" cmpd="sng" algn="ctr">
+          <a:solidFill>
+            <a:schemeClr val="phClr"/>
+          </a:solidFill>
+          <a:prstDash val="solid"/>
+          <a:miter lim="800000"/>
         </a:ln>
         <a:ln w="25400" cap="flat" cmpd="sng" algn="ctr">
           <a:solidFill>
             <a:schemeClr val="phClr"/>
           </a:solidFill>
           <a:prstDash val="solid"/>
-        </a:ln>
-        <a:ln w="38100" cap="flat" cmpd="sng" algn="ctr">
-          <a:solidFill>
-            <a:schemeClr val="phClr"/>
-          </a:solidFill>
-          <a:prstDash val="solid"/>
+          <a:miter lim="800000"/>
         </a:ln>
       </a:lnStyleLst>
       <a:effectStyleLst>
         <a:effectStyle>
+          <a:effectLst/>
+        </a:effectStyle>
+        <a:effectStyle>
+          <a:effectLst/>
+        </a:effectStyle>
+        <a:effectStyle>
           <a:effectLst>
-            <a:outerShdw blurRad="40000" dist="20000" dir="5400000" rotWithShape="0">
+            <a:outerShdw blurRad="57150" dist="19050" dir="5400000" algn="ctr" rotWithShape="0">
               <a:srgbClr val="000000">
-                <a:alpha val="38000"/>
+                <a:alpha val="63000"/>
               </a:srgbClr>
             </a:outerShdw>
           </a:effectLst>
-        </a:effectStyle>
-        <a:effectStyle>
-          <a:effectLst>
-            <a:outerShdw blurRad="40000" dist="23000" dir="5400000" rotWithShape="0">
-              <a:srgbClr val="000000">
-                <a:alpha val="35000"/>
-              </a:srgbClr>
-            </a:outerShdw>
-          </a:effectLst>
-        </a:effectStyle>
-        <a:effectStyle>
-          <a:effectLst>
-            <a:outerShdw blurRad="40000" dist="23000" dir="5400000" rotWithShape="0">
-              <a:srgbClr val="000000">
-                <a:alpha val="35000"/>
-              </a:srgbClr>
-            </a:outerShdw>
-          </a:effectLst>
-          <a:scene3d>
-            <a:camera prst="orthographicFront">
-              <a:rot lat="0" lon="0" rev="0"/>
-            </a:camera>
-            <a:lightRig rig="threePt" dir="t">
-              <a:rot lat="0" lon="0" rev="1200000"/>
-            </a:lightRig>
-          </a:scene3d>
-          <a:sp3d>
-            <a:bevelT w="63500" h="25400"/>
-          </a:sp3d>
         </a:effectStyle>
       </a:effectStyleLst>
       <a:bgFillStyleLst>
         <a:solidFill>
           <a:schemeClr val="phClr"/>
         </a:solidFill>
+        <a:solidFill>
+          <a:schemeClr val="phClr">
+            <a:tint val="95000"/>
+            <a:satMod val="170000"/>
+          </a:schemeClr>
+        </a:solidFill>
         <a:gradFill rotWithShape="1">
           <a:gsLst>
             <a:gs pos="0">
               <a:schemeClr val="phClr">
-                <a:tint val="40000"/>
-                <a:satMod val="350000"/>
+                <a:tint val="93000"/>
+                <a:satMod val="150000"/>
+                <a:shade val="98000"/>
+                <a:lumMod val="102000"/>
               </a:schemeClr>
             </a:gs>
-            <a:gs pos="40000">
+            <a:gs pos="50000">
               <a:schemeClr val="phClr">
-                <a:tint val="45000"/>
-                <a:shade val="99000"/>
-                <a:satMod val="350000"/>
+                <a:tint val="98000"/>
+                <a:satMod val="130000"/>
+                <a:shade val="90000"/>
+                <a:lumMod val="103000"/>
               </a:schemeClr>
             </a:gs>
             <a:gs pos="100000">
               <a:schemeClr val="phClr">
-                <a:shade val="20000"/>
-                <a:satMod val="255000"/>
+                <a:shade val="63000"/>
+                <a:satMod val="120000"/>
               </a:schemeClr>
             </a:gs>
           </a:gsLst>
-          <a:path path="circle">
-            <a:fillToRect l="50000" t="-80000" r="50000" b="180000"/>
-          </a:path>
-        </a:gradFill>
-        <a:gradFill rotWithShape="1">
-          <a:gsLst>
-            <a:gs pos="0">
-              <a:schemeClr val="phClr">
-                <a:tint val="80000"/>
-                <a:satMod val="300000"/>
-              </a:schemeClr>
-            </a:gs>
-            <a:gs pos="100000">
-              <a:schemeClr val="phClr">
-                <a:shade val="30000"/>
-                <a:satMod val="200000"/>
-              </a:schemeClr>
-            </a:gs>
-          </a:gsLst>
-          <a:path path="circle">
-            <a:fillToRect l="50000" t="50000" r="50000" b="50000"/>
-          </a:path>
+          <a:lin ang="5400000" scaled="0"/>
         </a:gradFill>
       </a:bgFillStyleLst>
     </a:fmtScheme>
   </a:themeElements>
   <a:objectDefaults>
-    <a:spDef>
-      <a:spPr/>
-      <a:bodyPr/>
-      <a:lstStyle/>
-      <a:style>
-        <a:lnRef idx="1">
-          <a:schemeClr val="accent1"/>
-        </a:lnRef>
-        <a:fillRef idx="3">
-          <a:schemeClr val="accent1"/>
-        </a:fillRef>
-        <a:effectRef idx="2">
-          <a:schemeClr val="accent1"/>
-        </a:effectRef>
-        <a:fontRef idx="minor">
-          <a:schemeClr val="lt1"/>
-        </a:fontRef>
-      </a:style>
-    </a:spDef>
     <a:lnDef>
       <a:spPr/>
       <a:bodyPr/>
@@ -11285,5 +13948,10 @@
     </a:lnDef>
   </a:objectDefaults>
   <a:extraClrSchemeLst/>
+  <a:extLst>
+    <a:ext uri="{05A4C25C-085E-4340-85A3-A5531E510DB2}">
+      <thm15:themeFamily xmlns:thm15="http://schemas.microsoft.com/office/thememl/2012/main" name="Office Theme" id="{2E142A2C-CD16-42D6-873A-C26D2A0506FA}" vid="{1BDDFF52-6CD6-40A5-AB3C-68EB2F1E4D0A}"/>
+    </a:ext>
+  </a:extLst>
 </a:theme>
 </file>